--- a/LUNA_STAFF_TRAINING_DECK.pptx
+++ b/LUNA_STAFF_TRAINING_DECK.pptx
@@ -33,6 +33,7 @@
     <p:sldId id="281" r:id="rId32"/>
     <p:sldId id="282" r:id="rId33"/>
     <p:sldId id="283" r:id="rId34"/>
+    <p:sldId id="284" r:id="rId35"/>
   </p:sldIdLst>
   <p:sldSz cx="12191695" cy="6858000" type="screen4x3"/>
   <p:notesSz cx="6858000" cy="9144000"/>
@@ -3336,7 +3337,7 @@
                 </a:solidFill>
                 <a:latin typeface="Helvetica"/>
               </a:rPr>
-              <a:t>v1.0 · Feb 2026</a:t>
+              <a:t>v1.1 · Apr 2026</a:t>
             </a:r>
           </a:p>
         </p:txBody>
@@ -7795,7 +7796,7 @@
     <p:bg>
       <p:bgPr>
         <a:solidFill>
-          <a:srgbClr val="1A1530"/>
+          <a:srgbClr val="08080E"/>
         </a:solidFill>
         <a:effectLst/>
       </p:bgPr>
@@ -7815,8 +7816,8 @@
         </p:nvSpPr>
         <p:spPr>
           <a:xfrm>
-            <a:off x="640080" y="2377440"/>
-            <a:ext cx="10972800" cy="548640"/>
+            <a:off x="548640" y="457200"/>
+            <a:ext cx="10972800" cy="365760"/>
           </a:xfrm>
           <a:prstGeom prst="rect">
             <a:avLst/>
@@ -7831,13 +7832,13 @@
           <a:p>
             <a:pPr algn="l"/>
             <a:r>
-              <a:rPr sz="1800" b="1">
+              <a:rPr sz="1200" b="1">
                 <a:solidFill>
                   <a:srgbClr val="D4AF5A"/>
                 </a:solidFill>
                 <a:latin typeface="Helvetica"/>
               </a:rPr>
-              <a:t>MODULE 7</a:t>
+              <a:t>MODULE 6.5 · NEW</a:t>
             </a:r>
           </a:p>
         </p:txBody>
@@ -7850,8 +7851,8 @@
         </p:nvSpPr>
         <p:spPr>
           <a:xfrm>
-            <a:off x="640080" y="2926080"/>
-            <a:ext cx="10972800" cy="1371600"/>
+            <a:off x="548640" y="868680"/>
+            <a:ext cx="10972800" cy="914400"/>
           </a:xfrm>
           <a:prstGeom prst="rect">
             <a:avLst/>
@@ -7866,14 +7867,13 @@
           <a:p>
             <a:pPr algn="l"/>
             <a:r>
-              <a:rPr sz="4400" b="1">
+              <a:rPr sz="3200" b="1">
                 <a:solidFill>
                   <a:srgbClr val="FFFFFF"/>
                 </a:solidFill>
                 <a:latin typeface="Helvetica"/>
               </a:rPr>
-              <a:t>Safety / SOS
-Workflow</a:t>
+              <a:t>Missions &amp; Milestones — what changed</a:t>
             </a:r>
           </a:p>
         </p:txBody>
@@ -7886,8 +7886,8 @@
         </p:nvSpPr>
         <p:spPr>
           <a:xfrm>
-            <a:off x="640080" y="4480560"/>
-            <a:ext cx="1371600" cy="54864"/>
+            <a:off x="548640" y="1691640"/>
+            <a:ext cx="914400" cy="45720"/>
           </a:xfrm>
           <a:prstGeom prst="rect">
             <a:avLst/>
@@ -7921,6 +7921,274 @@
           </a:p>
         </p:txBody>
       </p:sp>
+      <p:sp>
+        <p:nvSpPr>
+          <p:cNvPr id="5" name="TextBox 4"/>
+          <p:cNvSpPr txBox="1"/>
+          <p:nvPr/>
+        </p:nvSpPr>
+        <p:spPr>
+          <a:xfrm>
+            <a:off x="640080" y="2011680"/>
+            <a:ext cx="10972800" cy="4572000"/>
+          </a:xfrm>
+          <a:prstGeom prst="rect">
+            <a:avLst/>
+          </a:prstGeom>
+          <a:noFill/>
+        </p:spPr>
+        <p:txBody>
+          <a:bodyPr wrap="square">
+            <a:spAutoFit/>
+          </a:bodyPr>
+          <a:lstStyle/>
+          <a:p>
+            <a:pPr algn="l">
+              <a:spcAft>
+                <a:spcPts val="800"/>
+              </a:spcAft>
+            </a:pPr>
+            <a:r>
+              <a:rPr sz="1700" b="1">
+                <a:solidFill>
+                  <a:srgbClr val="D4AF5A"/>
+                </a:solidFill>
+                <a:latin typeface="Helvetica"/>
+              </a:rPr>
+              <a:t>•   </a:t>
+            </a:r>
+            <a:r>
+              <a:rPr sz="1700">
+                <a:solidFill>
+                  <a:srgbClr val="F0F0F8"/>
+                </a:solidFill>
+                <a:latin typeface="Helvetica"/>
+              </a:rPr>
+              <a:t>MISSIONS auto-progress every time you Quick-Award. No extra steps.</a:t>
+            </a:r>
+          </a:p>
+          <a:p>
+            <a:pPr algn="l">
+              <a:spcAft>
+                <a:spcPts val="800"/>
+              </a:spcAft>
+            </a:pPr>
+            <a:r>
+              <a:rPr sz="1700" b="1">
+                <a:solidFill>
+                  <a:srgbClr val="D4AF5A"/>
+                </a:solidFill>
+                <a:latin typeface="Helvetica"/>
+              </a:rPr>
+              <a:t>•   </a:t>
+            </a:r>
+            <a:r>
+              <a:rPr sz="1700">
+                <a:solidFill>
+                  <a:srgbClr val="F0F0F8"/>
+                </a:solidFill>
+                <a:latin typeface="Helvetica"/>
+              </a:rPr>
+              <a:t>Members see live progress in Profile → Missions</a:t>
+            </a:r>
+          </a:p>
+          <a:p>
+            <a:pPr algn="l">
+              <a:spcAft>
+                <a:spcPts val="800"/>
+              </a:spcAft>
+            </a:pPr>
+            <a:r>
+              <a:rPr sz="1700" b="1">
+                <a:solidFill>
+                  <a:srgbClr val="D4AF5A"/>
+                </a:solidFill>
+                <a:latin typeface="Helvetica"/>
+              </a:rPr>
+              <a:t>•   </a:t>
+            </a:r>
+            <a:r>
+              <a:rPr sz="1700">
+                <a:solidFill>
+                  <a:srgbClr val="F0F0F8"/>
+                </a:solidFill>
+                <a:latin typeface="Helvetica"/>
+              </a:rPr>
+              <a:t>Mission complete? — push fires; member taps Claim to bank the points</a:t>
+            </a:r>
+          </a:p>
+          <a:p>
+            <a:pPr algn="l">
+              <a:spcAft>
+                <a:spcPts val="800"/>
+              </a:spcAft>
+            </a:pPr>
+            <a:r>
+              <a:rPr sz="1700" b="1">
+                <a:solidFill>
+                  <a:srgbClr val="D4AF5A"/>
+                </a:solidFill>
+                <a:latin typeface="Helvetica"/>
+              </a:rPr>
+              <a:t>•   </a:t>
+            </a:r>
+            <a:r>
+              <a:rPr sz="1700">
+                <a:solidFill>
+                  <a:srgbClr val="F0F0F8"/>
+                </a:solidFill>
+                <a:latin typeface="Helvetica"/>
+              </a:rPr>
+              <a:t>MILESTONES are lifetime tiers — Newbie · Rising Star · VIP Status · Luna Elite · Supernova · Legend</a:t>
+            </a:r>
+          </a:p>
+          <a:p>
+            <a:pPr algn="l">
+              <a:spcAft>
+                <a:spcPts val="800"/>
+              </a:spcAft>
+            </a:pPr>
+            <a:r>
+              <a:rPr sz="1700" b="1">
+                <a:solidFill>
+                  <a:srgbClr val="D4AF5A"/>
+                </a:solidFill>
+                <a:latin typeface="Helvetica"/>
+              </a:rPr>
+              <a:t>•   </a:t>
+            </a:r>
+            <a:r>
+              <a:rPr sz="1700">
+                <a:solidFill>
+                  <a:srgbClr val="F0F0F8"/>
+                </a:solidFill>
+                <a:latin typeface="Helvetica"/>
+              </a:rPr>
+              <a:t>Hitting a milestone unlocks signed LUNA-TKT- QRs (single-use, can't be forged)</a:t>
+            </a:r>
+          </a:p>
+          <a:p>
+            <a:pPr algn="l">
+              <a:spcAft>
+                <a:spcPts val="800"/>
+              </a:spcAft>
+            </a:pPr>
+            <a:r>
+              <a:rPr sz="1700" b="1">
+                <a:solidFill>
+                  <a:srgbClr val="D4AF5A"/>
+                </a:solidFill>
+                <a:latin typeface="Helvetica"/>
+              </a:rPr>
+              <a:t>•   </a:t>
+            </a:r>
+            <a:r>
+              <a:rPr sz="1700">
+                <a:solidFill>
+                  <a:srgbClr val="F0F0F8"/>
+                </a:solidFill>
+                <a:latin typeface="Helvetica"/>
+              </a:rPr>
+              <a:t>Manager-only: Lovable now has a 'Test trigger' button + activity timeline</a:t>
+            </a:r>
+          </a:p>
+          <a:p>
+            <a:pPr algn="l">
+              <a:spcAft>
+                <a:spcPts val="800"/>
+              </a:spcAft>
+            </a:pPr>
+            <a:r>
+              <a:rPr sz="1700" b="1">
+                <a:solidFill>
+                  <a:srgbClr val="D4AF5A"/>
+                </a:solidFill>
+                <a:latin typeface="Helvetica"/>
+              </a:rPr>
+              <a:t>•   </a:t>
+            </a:r>
+            <a:r>
+              <a:rPr sz="1700">
+                <a:solidFill>
+                  <a:srgbClr val="F0F0F8"/>
+                </a:solidFill>
+                <a:latin typeface="Helvetica"/>
+              </a:rPr>
+              <a:t>Common Q: "did this count toward my mission?" — Answer: yes, automatically</a:t>
+            </a:r>
+          </a:p>
+        </p:txBody>
+      </p:sp>
+      <p:sp>
+        <p:nvSpPr>
+          <p:cNvPr id="6" name="TextBox 5"/>
+          <p:cNvSpPr txBox="1"/>
+          <p:nvPr/>
+        </p:nvSpPr>
+        <p:spPr>
+          <a:xfrm>
+            <a:off x="548640" y="6446520"/>
+            <a:ext cx="5486400" cy="274320"/>
+          </a:xfrm>
+          <a:prstGeom prst="rect">
+            <a:avLst/>
+          </a:prstGeom>
+          <a:noFill/>
+        </p:spPr>
+        <p:txBody>
+          <a:bodyPr wrap="square" lIns="0" rIns="0" tIns="0" bIns="0">
+            <a:spAutoFit/>
+          </a:bodyPr>
+          <a:lstStyle/>
+          <a:p>
+            <a:pPr algn="l"/>
+            <a:r>
+              <a:rPr sz="900" b="0">
+                <a:solidFill>
+                  <a:srgbClr val="9A95B0"/>
+                </a:solidFill>
+                <a:latin typeface="Helvetica"/>
+              </a:rPr>
+              <a:t>Luna Group VIP · Staff Training</a:t>
+            </a:r>
+          </a:p>
+        </p:txBody>
+      </p:sp>
+      <p:sp>
+        <p:nvSpPr>
+          <p:cNvPr id="7" name="TextBox 6"/>
+          <p:cNvSpPr txBox="1"/>
+          <p:nvPr/>
+        </p:nvSpPr>
+        <p:spPr>
+          <a:xfrm>
+            <a:off x="6858000" y="6446520"/>
+            <a:ext cx="4754880" cy="274320"/>
+          </a:xfrm>
+          <a:prstGeom prst="rect">
+            <a:avLst/>
+          </a:prstGeom>
+          <a:noFill/>
+        </p:spPr>
+        <p:txBody>
+          <a:bodyPr wrap="square" lIns="0" rIns="0" tIns="0" bIns="0">
+            <a:spAutoFit/>
+          </a:bodyPr>
+          <a:lstStyle/>
+          <a:p>
+            <a:pPr algn="r"/>
+            <a:r>
+              <a:rPr sz="900" b="0">
+                <a:solidFill>
+                  <a:srgbClr val="9A95B0"/>
+                </a:solidFill>
+                <a:latin typeface="Helvetica"/>
+              </a:rPr>
+              <a:t>Module 6.5 · Missions</a:t>
+            </a:r>
+          </a:p>
+        </p:txBody>
+      </p:sp>
     </p:spTree>
   </p:cSld>
   <p:clrMapOvr>
@@ -7930,6 +8198,146 @@
 </file>
 
 <file path=ppt/slides/slide21.xml><?xml version="1.0" encoding="utf-8"?>
+<p:sld xmlns:a="http://schemas.openxmlformats.org/drawingml/2006/main" xmlns:p="http://schemas.openxmlformats.org/presentationml/2006/main" xmlns:r="http://schemas.openxmlformats.org/officeDocument/2006/relationships">
+  <p:cSld>
+    <p:bg>
+      <p:bgPr>
+        <a:solidFill>
+          <a:srgbClr val="1A1530"/>
+        </a:solidFill>
+        <a:effectLst/>
+      </p:bgPr>
+    </p:bg>
+    <p:spTree>
+      <p:nvGrpSpPr>
+        <p:cNvPr id="1" name=""/>
+        <p:cNvGrpSpPr/>
+        <p:nvPr/>
+      </p:nvGrpSpPr>
+      <p:grpSpPr/>
+      <p:sp>
+        <p:nvSpPr>
+          <p:cNvPr id="2" name="TextBox 1"/>
+          <p:cNvSpPr txBox="1"/>
+          <p:nvPr/>
+        </p:nvSpPr>
+        <p:spPr>
+          <a:xfrm>
+            <a:off x="640080" y="2377440"/>
+            <a:ext cx="10972800" cy="548640"/>
+          </a:xfrm>
+          <a:prstGeom prst="rect">
+            <a:avLst/>
+          </a:prstGeom>
+          <a:noFill/>
+        </p:spPr>
+        <p:txBody>
+          <a:bodyPr wrap="square" lIns="0" rIns="0" tIns="0" bIns="0">
+            <a:spAutoFit/>
+          </a:bodyPr>
+          <a:lstStyle/>
+          <a:p>
+            <a:pPr algn="l"/>
+            <a:r>
+              <a:rPr sz="1800" b="1">
+                <a:solidFill>
+                  <a:srgbClr val="D4AF5A"/>
+                </a:solidFill>
+                <a:latin typeface="Helvetica"/>
+              </a:rPr>
+              <a:t>MODULE 7</a:t>
+            </a:r>
+          </a:p>
+        </p:txBody>
+      </p:sp>
+      <p:sp>
+        <p:nvSpPr>
+          <p:cNvPr id="3" name="TextBox 2"/>
+          <p:cNvSpPr txBox="1"/>
+          <p:nvPr/>
+        </p:nvSpPr>
+        <p:spPr>
+          <a:xfrm>
+            <a:off x="640080" y="2926080"/>
+            <a:ext cx="10972800" cy="1371600"/>
+          </a:xfrm>
+          <a:prstGeom prst="rect">
+            <a:avLst/>
+          </a:prstGeom>
+          <a:noFill/>
+        </p:spPr>
+        <p:txBody>
+          <a:bodyPr wrap="square" lIns="0" rIns="0" tIns="0" bIns="0">
+            <a:spAutoFit/>
+          </a:bodyPr>
+          <a:lstStyle/>
+          <a:p>
+            <a:pPr algn="l"/>
+            <a:r>
+              <a:rPr sz="4400" b="1">
+                <a:solidFill>
+                  <a:srgbClr val="FFFFFF"/>
+                </a:solidFill>
+                <a:latin typeface="Helvetica"/>
+              </a:rPr>
+              <a:t>Safety / SOS
+Workflow</a:t>
+            </a:r>
+          </a:p>
+        </p:txBody>
+      </p:sp>
+      <p:sp>
+        <p:nvSpPr>
+          <p:cNvPr id="4" name="Rectangle 3"/>
+          <p:cNvSpPr/>
+          <p:nvPr/>
+        </p:nvSpPr>
+        <p:spPr>
+          <a:xfrm>
+            <a:off x="640080" y="4480560"/>
+            <a:ext cx="1371600" cy="54864"/>
+          </a:xfrm>
+          <a:prstGeom prst="rect">
+            <a:avLst/>
+          </a:prstGeom>
+          <a:solidFill>
+            <a:srgbClr val="D4AF5A"/>
+          </a:solidFill>
+          <a:ln>
+            <a:noFill/>
+          </a:ln>
+        </p:spPr>
+        <p:style>
+          <a:lnRef idx="1">
+            <a:schemeClr val="accent1"/>
+          </a:lnRef>
+          <a:fillRef idx="3">
+            <a:schemeClr val="accent1"/>
+          </a:fillRef>
+          <a:effectRef idx="2">
+            <a:schemeClr val="accent1"/>
+          </a:effectRef>
+          <a:fontRef idx="minor">
+            <a:schemeClr val="lt1"/>
+          </a:fontRef>
+        </p:style>
+        <p:txBody>
+          <a:bodyPr rtlCol="0" anchor="ctr"/>
+          <a:lstStyle/>
+          <a:p>
+            <a:pPr algn="ctr"/>
+          </a:p>
+        </p:txBody>
+      </p:sp>
+    </p:spTree>
+  </p:cSld>
+  <p:clrMapOvr>
+    <a:masterClrMapping/>
+  </p:clrMapOvr>
+</p:sld>
+</file>
+
+<file path=ppt/slides/slide22.xml><?xml version="1.0" encoding="utf-8"?>
 <p:sld xmlns:a="http://schemas.openxmlformats.org/drawingml/2006/main" xmlns:p="http://schemas.openxmlformats.org/presentationml/2006/main" xmlns:r="http://schemas.openxmlformats.org/officeDocument/2006/relationships">
   <p:cSld>
     <p:bg>
@@ -8361,7 +8769,7 @@
 </p:sld>
 </file>
 
-<file path=ppt/slides/slide22.xml><?xml version="1.0" encoding="utf-8"?>
+<file path=ppt/slides/slide23.xml><?xml version="1.0" encoding="utf-8"?>
 <p:sld xmlns:a="http://schemas.openxmlformats.org/drawingml/2006/main" xmlns:p="http://schemas.openxmlformats.org/presentationml/2006/main" xmlns:r="http://schemas.openxmlformats.org/officeDocument/2006/relationships">
   <p:cSld>
     <p:bg>
@@ -8490,775 +8898,6 @@
           <a:lstStyle/>
           <a:p>
             <a:pPr algn="ctr"/>
-          </a:p>
-        </p:txBody>
-      </p:sp>
-    </p:spTree>
-  </p:cSld>
-  <p:clrMapOvr>
-    <a:masterClrMapping/>
-  </p:clrMapOvr>
-</p:sld>
-</file>
-
-<file path=ppt/slides/slide23.xml><?xml version="1.0" encoding="utf-8"?>
-<p:sld xmlns:a="http://schemas.openxmlformats.org/drawingml/2006/main" xmlns:p="http://schemas.openxmlformats.org/presentationml/2006/main" xmlns:r="http://schemas.openxmlformats.org/officeDocument/2006/relationships">
-  <p:cSld>
-    <p:bg>
-      <p:bgPr>
-        <a:solidFill>
-          <a:srgbClr val="08080E"/>
-        </a:solidFill>
-        <a:effectLst/>
-      </p:bgPr>
-    </p:bg>
-    <p:spTree>
-      <p:nvGrpSpPr>
-        <p:cNvPr id="1" name=""/>
-        <p:cNvGrpSpPr/>
-        <p:nvPr/>
-      </p:nvGrpSpPr>
-      <p:grpSpPr/>
-      <p:sp>
-        <p:nvSpPr>
-          <p:cNvPr id="2" name="TextBox 1"/>
-          <p:cNvSpPr txBox="1"/>
-          <p:nvPr/>
-        </p:nvSpPr>
-        <p:spPr>
-          <a:xfrm>
-            <a:off x="548640" y="457200"/>
-            <a:ext cx="10972800" cy="365760"/>
-          </a:xfrm>
-          <a:prstGeom prst="rect">
-            <a:avLst/>
-          </a:prstGeom>
-          <a:noFill/>
-        </p:spPr>
-        <p:txBody>
-          <a:bodyPr wrap="square" lIns="0" rIns="0" tIns="0" bIns="0">
-            <a:spAutoFit/>
-          </a:bodyPr>
-          <a:lstStyle/>
-          <a:p>
-            <a:pPr algn="l"/>
-            <a:r>
-              <a:rPr sz="1200" b="1">
-                <a:solidFill>
-                  <a:srgbClr val="D4AF5A"/>
-                </a:solidFill>
-                <a:latin typeface="Helvetica"/>
-              </a:rPr>
-              <a:t>MODULE 8</a:t>
-            </a:r>
-          </a:p>
-        </p:txBody>
-      </p:sp>
-      <p:sp>
-        <p:nvSpPr>
-          <p:cNvPr id="3" name="TextBox 2"/>
-          <p:cNvSpPr txBox="1"/>
-          <p:nvPr/>
-        </p:nvSpPr>
-        <p:spPr>
-          <a:xfrm>
-            <a:off x="548640" y="868680"/>
-            <a:ext cx="10972800" cy="914400"/>
-          </a:xfrm>
-          <a:prstGeom prst="rect">
-            <a:avLst/>
-          </a:prstGeom>
-          <a:noFill/>
-        </p:spPr>
-        <p:txBody>
-          <a:bodyPr wrap="square" lIns="0" rIns="0" tIns="0" bIns="0">
-            <a:spAutoFit/>
-          </a:bodyPr>
-          <a:lstStyle/>
-          <a:p>
-            <a:pPr algn="l"/>
-            <a:r>
-              <a:rPr sz="3200" b="1">
-                <a:solidFill>
-                  <a:srgbClr val="FFFFFF"/>
-                </a:solidFill>
-                <a:latin typeface="Helvetica"/>
-              </a:rPr>
-              <a:t>Top member questions — one-line scripts</a:t>
-            </a:r>
-          </a:p>
-        </p:txBody>
-      </p:sp>
-      <p:sp>
-        <p:nvSpPr>
-          <p:cNvPr id="4" name="Rectangle 3"/>
-          <p:cNvSpPr/>
-          <p:nvPr/>
-        </p:nvSpPr>
-        <p:spPr>
-          <a:xfrm>
-            <a:off x="548640" y="1691640"/>
-            <a:ext cx="914400" cy="45720"/>
-          </a:xfrm>
-          <a:prstGeom prst="rect">
-            <a:avLst/>
-          </a:prstGeom>
-          <a:solidFill>
-            <a:srgbClr val="D4AF5A"/>
-          </a:solidFill>
-          <a:ln>
-            <a:noFill/>
-          </a:ln>
-        </p:spPr>
-        <p:style>
-          <a:lnRef idx="1">
-            <a:schemeClr val="accent1"/>
-          </a:lnRef>
-          <a:fillRef idx="3">
-            <a:schemeClr val="accent1"/>
-          </a:fillRef>
-          <a:effectRef idx="2">
-            <a:schemeClr val="accent1"/>
-          </a:effectRef>
-          <a:fontRef idx="minor">
-            <a:schemeClr val="lt1"/>
-          </a:fontRef>
-        </p:style>
-        <p:txBody>
-          <a:bodyPr rtlCol="0" anchor="ctr"/>
-          <a:lstStyle/>
-          <a:p>
-            <a:pPr algn="ctr"/>
-          </a:p>
-        </p:txBody>
-      </p:sp>
-      <p:sp>
-        <p:nvSpPr>
-          <p:cNvPr id="5" name="TextBox 4"/>
-          <p:cNvSpPr txBox="1"/>
-          <p:nvPr/>
-        </p:nvSpPr>
-        <p:spPr>
-          <a:xfrm>
-            <a:off x="640080" y="2011680"/>
-            <a:ext cx="5029200" cy="365760"/>
-          </a:xfrm>
-          <a:prstGeom prst="rect">
-            <a:avLst/>
-          </a:prstGeom>
-          <a:noFill/>
-        </p:spPr>
-        <p:txBody>
-          <a:bodyPr wrap="square" lIns="0" rIns="0" tIns="0" bIns="0">
-            <a:spAutoFit/>
-          </a:bodyPr>
-          <a:lstStyle/>
-          <a:p>
-            <a:pPr algn="l"/>
-            <a:r>
-              <a:rPr sz="1300" b="1">
-                <a:solidFill>
-                  <a:srgbClr val="D4AF5A"/>
-                </a:solidFill>
-                <a:latin typeface="Helvetica"/>
-              </a:rPr>
-              <a:t>"How do I get my points?"</a:t>
-            </a:r>
-          </a:p>
-        </p:txBody>
-      </p:sp>
-      <p:sp>
-        <p:nvSpPr>
-          <p:cNvPr id="6" name="TextBox 5"/>
-          <p:cNvSpPr txBox="1"/>
-          <p:nvPr/>
-        </p:nvSpPr>
-        <p:spPr>
-          <a:xfrm>
-            <a:off x="5760720" y="2011680"/>
-            <a:ext cx="5943600" cy="365760"/>
-          </a:xfrm>
-          <a:prstGeom prst="rect">
-            <a:avLst/>
-          </a:prstGeom>
-          <a:noFill/>
-        </p:spPr>
-        <p:txBody>
-          <a:bodyPr wrap="square" lIns="0" rIns="0" tIns="0" bIns="0">
-            <a:spAutoFit/>
-          </a:bodyPr>
-          <a:lstStyle/>
-          <a:p>
-            <a:pPr algn="l"/>
-            <a:r>
-              <a:rPr sz="1300" b="0">
-                <a:solidFill>
-                  <a:srgbClr val="F0F0F8"/>
-                </a:solidFill>
-                <a:latin typeface="Helvetica"/>
-              </a:rPr>
-              <a:t>I'll scan your member QR and award them now.</a:t>
-            </a:r>
-          </a:p>
-        </p:txBody>
-      </p:sp>
-      <p:sp>
-        <p:nvSpPr>
-          <p:cNvPr id="7" name="TextBox 6"/>
-          <p:cNvSpPr txBox="1"/>
-          <p:nvPr/>
-        </p:nvSpPr>
-        <p:spPr>
-          <a:xfrm>
-            <a:off x="640080" y="2514600"/>
-            <a:ext cx="5029200" cy="365760"/>
-          </a:xfrm>
-          <a:prstGeom prst="rect">
-            <a:avLst/>
-          </a:prstGeom>
-          <a:noFill/>
-        </p:spPr>
-        <p:txBody>
-          <a:bodyPr wrap="square" lIns="0" rIns="0" tIns="0" bIns="0">
-            <a:spAutoFit/>
-          </a:bodyPr>
-          <a:lstStyle/>
-          <a:p>
-            <a:pPr algn="l"/>
-            <a:r>
-              <a:rPr sz="1300" b="1">
-                <a:solidFill>
-                  <a:srgbClr val="D4AF5A"/>
-                </a:solidFill>
-                <a:latin typeface="Helvetica"/>
-              </a:rPr>
-              <a:t>"Where's my member QR?"</a:t>
-            </a:r>
-          </a:p>
-        </p:txBody>
-      </p:sp>
-      <p:sp>
-        <p:nvSpPr>
-          <p:cNvPr id="8" name="TextBox 7"/>
-          <p:cNvSpPr txBox="1"/>
-          <p:nvPr/>
-        </p:nvSpPr>
-        <p:spPr>
-          <a:xfrm>
-            <a:off x="5760720" y="2514600"/>
-            <a:ext cx="5943600" cy="365760"/>
-          </a:xfrm>
-          <a:prstGeom prst="rect">
-            <a:avLst/>
-          </a:prstGeom>
-          <a:noFill/>
-        </p:spPr>
-        <p:txBody>
-          <a:bodyPr wrap="square" lIns="0" rIns="0" tIns="0" bIns="0">
-            <a:spAutoFit/>
-          </a:bodyPr>
-          <a:lstStyle/>
-          <a:p>
-            <a:pPr algn="l"/>
-            <a:r>
-              <a:rPr sz="1300" b="0">
-                <a:solidFill>
-                  <a:srgbClr val="F0F0F8"/>
-                </a:solidFill>
-                <a:latin typeface="Helvetica"/>
-              </a:rPr>
-              <a:t>Open the app → Wallet → Member Card.</a:t>
-            </a:r>
-          </a:p>
-        </p:txBody>
-      </p:sp>
-      <p:sp>
-        <p:nvSpPr>
-          <p:cNvPr id="9" name="TextBox 8"/>
-          <p:cNvSpPr txBox="1"/>
-          <p:nvPr/>
-        </p:nvSpPr>
-        <p:spPr>
-          <a:xfrm>
-            <a:off x="640080" y="3017520"/>
-            <a:ext cx="5029200" cy="365760"/>
-          </a:xfrm>
-          <a:prstGeom prst="rect">
-            <a:avLst/>
-          </a:prstGeom>
-          <a:noFill/>
-        </p:spPr>
-        <p:txBody>
-          <a:bodyPr wrap="square" lIns="0" rIns="0" tIns="0" bIns="0">
-            <a:spAutoFit/>
-          </a:bodyPr>
-          <a:lstStyle/>
-          <a:p>
-            <a:pPr algn="l"/>
-            <a:r>
-              <a:rPr sz="1300" b="1">
-                <a:solidFill>
-                  <a:srgbClr val="D4AF5A"/>
-                </a:solidFill>
-                <a:latin typeface="Helvetica"/>
-              </a:rPr>
-              <a:t>"I didn't get points from yesterday"</a:t>
-            </a:r>
-          </a:p>
-        </p:txBody>
-      </p:sp>
-      <p:sp>
-        <p:nvSpPr>
-          <p:cNvPr id="10" name="TextBox 9"/>
-          <p:cNvSpPr txBox="1"/>
-          <p:nvPr/>
-        </p:nvSpPr>
-        <p:spPr>
-          <a:xfrm>
-            <a:off x="5760720" y="3017520"/>
-            <a:ext cx="5943600" cy="365760"/>
-          </a:xfrm>
-          <a:prstGeom prst="rect">
-            <a:avLst/>
-          </a:prstGeom>
-          <a:noFill/>
-        </p:spPr>
-        <p:txBody>
-          <a:bodyPr wrap="square" lIns="0" rIns="0" tIns="0" bIns="0">
-            <a:spAutoFit/>
-          </a:bodyPr>
-          <a:lstStyle/>
-          <a:p>
-            <a:pPr algn="l"/>
-            <a:r>
-              <a:rPr sz="1300" b="0">
-                <a:solidFill>
-                  <a:srgbClr val="F0F0F8"/>
-                </a:solidFill>
-                <a:latin typeface="Helvetica"/>
-              </a:rPr>
-              <a:t>Let me check History — SwiftPOS can take a few minutes.</a:t>
-            </a:r>
-          </a:p>
-        </p:txBody>
-      </p:sp>
-      <p:sp>
-        <p:nvSpPr>
-          <p:cNvPr id="11" name="TextBox 10"/>
-          <p:cNvSpPr txBox="1"/>
-          <p:nvPr/>
-        </p:nvSpPr>
-        <p:spPr>
-          <a:xfrm>
-            <a:off x="640080" y="3520439"/>
-            <a:ext cx="5029200" cy="365760"/>
-          </a:xfrm>
-          <a:prstGeom prst="rect">
-            <a:avLst/>
-          </a:prstGeom>
-          <a:noFill/>
-        </p:spPr>
-        <p:txBody>
-          <a:bodyPr wrap="square" lIns="0" rIns="0" tIns="0" bIns="0">
-            <a:spAutoFit/>
-          </a:bodyPr>
-          <a:lstStyle/>
-          <a:p>
-            <a:pPr algn="l"/>
-            <a:r>
-              <a:rPr sz="1300" b="1">
-                <a:solidFill>
-                  <a:srgbClr val="D4AF5A"/>
-                </a:solidFill>
-                <a:latin typeface="Helvetica"/>
-              </a:rPr>
-              <a:t>"How do I get free entry?"</a:t>
-            </a:r>
-          </a:p>
-        </p:txBody>
-      </p:sp>
-      <p:sp>
-        <p:nvSpPr>
-          <p:cNvPr id="12" name="TextBox 11"/>
-          <p:cNvSpPr txBox="1"/>
-          <p:nvPr/>
-        </p:nvSpPr>
-        <p:spPr>
-          <a:xfrm>
-            <a:off x="5760720" y="3520439"/>
-            <a:ext cx="5943600" cy="365760"/>
-          </a:xfrm>
-          <a:prstGeom prst="rect">
-            <a:avLst/>
-          </a:prstGeom>
-          <a:noFill/>
-        </p:spPr>
-        <p:txBody>
-          <a:bodyPr wrap="square" lIns="0" rIns="0" tIns="0" bIns="0">
-            <a:spAutoFit/>
-          </a:bodyPr>
-          <a:lstStyle/>
-          <a:p>
-            <a:pPr algn="l"/>
-            <a:r>
-              <a:rPr sz="1300" b="0">
-                <a:solidFill>
-                  <a:srgbClr val="F0F0F8"/>
-                </a:solidFill>
-                <a:latin typeface="Helvetica"/>
-              </a:rPr>
-              <a:t>Lunar subscription gives monthly entries; tier may also unlock.</a:t>
-            </a:r>
-          </a:p>
-        </p:txBody>
-      </p:sp>
-      <p:sp>
-        <p:nvSpPr>
-          <p:cNvPr id="13" name="TextBox 12"/>
-          <p:cNvSpPr txBox="1"/>
-          <p:nvPr/>
-        </p:nvSpPr>
-        <p:spPr>
-          <a:xfrm>
-            <a:off x="640080" y="4023359"/>
-            <a:ext cx="5029200" cy="365760"/>
-          </a:xfrm>
-          <a:prstGeom prst="rect">
-            <a:avLst/>
-          </a:prstGeom>
-          <a:noFill/>
-        </p:spPr>
-        <p:txBody>
-          <a:bodyPr wrap="square" lIns="0" rIns="0" tIns="0" bIns="0">
-            <a:spAutoFit/>
-          </a:bodyPr>
-          <a:lstStyle/>
-          <a:p>
-            <a:pPr algn="l"/>
-            <a:r>
-              <a:rPr sz="1300" b="1">
-                <a:solidFill>
-                  <a:srgbClr val="D4AF5A"/>
-                </a:solidFill>
-                <a:latin typeface="Helvetica"/>
-              </a:rPr>
-              <a:t>"What's my tier?"</a:t>
-            </a:r>
-          </a:p>
-        </p:txBody>
-      </p:sp>
-      <p:sp>
-        <p:nvSpPr>
-          <p:cNvPr id="14" name="TextBox 13"/>
-          <p:cNvSpPr txBox="1"/>
-          <p:nvPr/>
-        </p:nvSpPr>
-        <p:spPr>
-          <a:xfrm>
-            <a:off x="5760720" y="4023359"/>
-            <a:ext cx="5943600" cy="365760"/>
-          </a:xfrm>
-          <a:prstGeom prst="rect">
-            <a:avLst/>
-          </a:prstGeom>
-          <a:noFill/>
-        </p:spPr>
-        <p:txBody>
-          <a:bodyPr wrap="square" lIns="0" rIns="0" tIns="0" bIns="0">
-            <a:spAutoFit/>
-          </a:bodyPr>
-          <a:lstStyle/>
-          <a:p>
-            <a:pPr algn="l"/>
-            <a:r>
-              <a:rPr sz="1300" b="0">
-                <a:solidFill>
-                  <a:srgbClr val="F0F0F8"/>
-                </a:solidFill>
-                <a:latin typeface="Helvetica"/>
-              </a:rPr>
-              <a:t>It's on your Profile screen — Bronze · Silver · Gold · Legend.</a:t>
-            </a:r>
-          </a:p>
-        </p:txBody>
-      </p:sp>
-      <p:sp>
-        <p:nvSpPr>
-          <p:cNvPr id="15" name="TextBox 14"/>
-          <p:cNvSpPr txBox="1"/>
-          <p:nvPr/>
-        </p:nvSpPr>
-        <p:spPr>
-          <a:xfrm>
-            <a:off x="640080" y="4526279"/>
-            <a:ext cx="5029200" cy="365760"/>
-          </a:xfrm>
-          <a:prstGeom prst="rect">
-            <a:avLst/>
-          </a:prstGeom>
-          <a:noFill/>
-        </p:spPr>
-        <p:txBody>
-          <a:bodyPr wrap="square" lIns="0" rIns="0" tIns="0" bIns="0">
-            <a:spAutoFit/>
-          </a:bodyPr>
-          <a:lstStyle/>
-          <a:p>
-            <a:pPr algn="l"/>
-            <a:r>
-              <a:rPr sz="1300" b="1">
-                <a:solidFill>
-                  <a:srgbClr val="D4AF5A"/>
-                </a:solidFill>
-                <a:latin typeface="Helvetica"/>
-              </a:rPr>
-              <a:t>"How do referrals work?"</a:t>
-            </a:r>
-          </a:p>
-        </p:txBody>
-      </p:sp>
-      <p:sp>
-        <p:nvSpPr>
-          <p:cNvPr id="16" name="TextBox 15"/>
-          <p:cNvSpPr txBox="1"/>
-          <p:nvPr/>
-        </p:nvSpPr>
-        <p:spPr>
-          <a:xfrm>
-            <a:off x="5760720" y="4526279"/>
-            <a:ext cx="5943600" cy="365760"/>
-          </a:xfrm>
-          <a:prstGeom prst="rect">
-            <a:avLst/>
-          </a:prstGeom>
-          <a:noFill/>
-        </p:spPr>
-        <p:txBody>
-          <a:bodyPr wrap="square" lIns="0" rIns="0" tIns="0" bIns="0">
-            <a:spAutoFit/>
-          </a:bodyPr>
-          <a:lstStyle/>
-          <a:p>
-            <a:pPr algn="l"/>
-            <a:r>
-              <a:rPr sz="1300" b="0">
-                <a:solidFill>
-                  <a:srgbClr val="F0F0F8"/>
-                </a:solidFill>
-                <a:latin typeface="Helvetica"/>
-              </a:rPr>
-              <a:t>Profile → Refer a Friend. You both get bonus points after their first visit.</a:t>
-            </a:r>
-          </a:p>
-        </p:txBody>
-      </p:sp>
-      <p:sp>
-        <p:nvSpPr>
-          <p:cNvPr id="17" name="TextBox 16"/>
-          <p:cNvSpPr txBox="1"/>
-          <p:nvPr/>
-        </p:nvSpPr>
-        <p:spPr>
-          <a:xfrm>
-            <a:off x="640080" y="5029199"/>
-            <a:ext cx="5029200" cy="365760"/>
-          </a:xfrm>
-          <a:prstGeom prst="rect">
-            <a:avLst/>
-          </a:prstGeom>
-          <a:noFill/>
-        </p:spPr>
-        <p:txBody>
-          <a:bodyPr wrap="square" lIns="0" rIns="0" tIns="0" bIns="0">
-            <a:spAutoFit/>
-          </a:bodyPr>
-          <a:lstStyle/>
-          <a:p>
-            <a:pPr algn="l"/>
-            <a:r>
-              <a:rPr sz="1300" b="1">
-                <a:solidFill>
-                  <a:srgbClr val="D4AF5A"/>
-                </a:solidFill>
-                <a:latin typeface="Helvetica"/>
-              </a:rPr>
-              <a:t>"I lost something"</a:t>
-            </a:r>
-          </a:p>
-        </p:txBody>
-      </p:sp>
-      <p:sp>
-        <p:nvSpPr>
-          <p:cNvPr id="18" name="TextBox 17"/>
-          <p:cNvSpPr txBox="1"/>
-          <p:nvPr/>
-        </p:nvSpPr>
-        <p:spPr>
-          <a:xfrm>
-            <a:off x="5760720" y="5029199"/>
-            <a:ext cx="5943600" cy="365760"/>
-          </a:xfrm>
-          <a:prstGeom prst="rect">
-            <a:avLst/>
-          </a:prstGeom>
-          <a:noFill/>
-        </p:spPr>
-        <p:txBody>
-          <a:bodyPr wrap="square" lIns="0" rIns="0" tIns="0" bIns="0">
-            <a:spAutoFit/>
-          </a:bodyPr>
-          <a:lstStyle/>
-          <a:p>
-            <a:pPr algn="l"/>
-            <a:r>
-              <a:rPr sz="1300" b="0">
-                <a:solidFill>
-                  <a:srgbClr val="F0F0F8"/>
-                </a:solidFill>
-                <a:latin typeface="Helvetica"/>
-              </a:rPr>
-              <a:t>App → Lost &amp; Found → Report Missing. We'll match it.</a:t>
-            </a:r>
-          </a:p>
-        </p:txBody>
-      </p:sp>
-      <p:sp>
-        <p:nvSpPr>
-          <p:cNvPr id="19" name="TextBox 18"/>
-          <p:cNvSpPr txBox="1"/>
-          <p:nvPr/>
-        </p:nvSpPr>
-        <p:spPr>
-          <a:xfrm>
-            <a:off x="640080" y="5532119"/>
-            <a:ext cx="5029200" cy="365760"/>
-          </a:xfrm>
-          <a:prstGeom prst="rect">
-            <a:avLst/>
-          </a:prstGeom>
-          <a:noFill/>
-        </p:spPr>
-        <p:txBody>
-          <a:bodyPr wrap="square" lIns="0" rIns="0" tIns="0" bIns="0">
-            <a:spAutoFit/>
-          </a:bodyPr>
-          <a:lstStyle/>
-          <a:p>
-            <a:pPr algn="l"/>
-            <a:r>
-              <a:rPr sz="1300" b="1">
-                <a:solidFill>
-                  <a:srgbClr val="D4AF5A"/>
-                </a:solidFill>
-                <a:latin typeface="Helvetica"/>
-              </a:rPr>
-              <a:t>"Cancel my subscription?"</a:t>
-            </a:r>
-          </a:p>
-        </p:txBody>
-      </p:sp>
-      <p:sp>
-        <p:nvSpPr>
-          <p:cNvPr id="20" name="TextBox 19"/>
-          <p:cNvSpPr txBox="1"/>
-          <p:nvPr/>
-        </p:nvSpPr>
-        <p:spPr>
-          <a:xfrm>
-            <a:off x="5760720" y="5532119"/>
-            <a:ext cx="5943600" cy="365760"/>
-          </a:xfrm>
-          <a:prstGeom prst="rect">
-            <a:avLst/>
-          </a:prstGeom>
-          <a:noFill/>
-        </p:spPr>
-        <p:txBody>
-          <a:bodyPr wrap="square" lIns="0" rIns="0" tIns="0" bIns="0">
-            <a:spAutoFit/>
-          </a:bodyPr>
-          <a:lstStyle/>
-          <a:p>
-            <a:pPr algn="l"/>
-            <a:r>
-              <a:rPr sz="1300" b="0">
-                <a:solidFill>
-                  <a:srgbClr val="F0F0F8"/>
-                </a:solidFill>
-                <a:latin typeface="Helvetica"/>
-              </a:rPr>
-              <a:t>Profile → Subscriptions → Manage. Stripe handles it; access until period-end.</a:t>
-            </a:r>
-          </a:p>
-        </p:txBody>
-      </p:sp>
-      <p:sp>
-        <p:nvSpPr>
-          <p:cNvPr id="21" name="TextBox 20"/>
-          <p:cNvSpPr txBox="1"/>
-          <p:nvPr/>
-        </p:nvSpPr>
-        <p:spPr>
-          <a:xfrm>
-            <a:off x="548640" y="6446520"/>
-            <a:ext cx="5486400" cy="274320"/>
-          </a:xfrm>
-          <a:prstGeom prst="rect">
-            <a:avLst/>
-          </a:prstGeom>
-          <a:noFill/>
-        </p:spPr>
-        <p:txBody>
-          <a:bodyPr wrap="square" lIns="0" rIns="0" tIns="0" bIns="0">
-            <a:spAutoFit/>
-          </a:bodyPr>
-          <a:lstStyle/>
-          <a:p>
-            <a:pPr algn="l"/>
-            <a:r>
-              <a:rPr sz="900" b="0">
-                <a:solidFill>
-                  <a:srgbClr val="9A95B0"/>
-                </a:solidFill>
-                <a:latin typeface="Helvetica"/>
-              </a:rPr>
-              <a:t>Luna Group VIP · Staff Training</a:t>
-            </a:r>
-          </a:p>
-        </p:txBody>
-      </p:sp>
-      <p:sp>
-        <p:nvSpPr>
-          <p:cNvPr id="22" name="TextBox 21"/>
-          <p:cNvSpPr txBox="1"/>
-          <p:nvPr/>
-        </p:nvSpPr>
-        <p:spPr>
-          <a:xfrm>
-            <a:off x="6858000" y="6446520"/>
-            <a:ext cx="4754880" cy="274320"/>
-          </a:xfrm>
-          <a:prstGeom prst="rect">
-            <a:avLst/>
-          </a:prstGeom>
-          <a:noFill/>
-        </p:spPr>
-        <p:txBody>
-          <a:bodyPr wrap="square" lIns="0" rIns="0" tIns="0" bIns="0">
-            <a:spAutoFit/>
-          </a:bodyPr>
-          <a:lstStyle/>
-          <a:p>
-            <a:pPr algn="r"/>
-            <a:r>
-              <a:rPr sz="900" b="0">
-                <a:solidFill>
-                  <a:srgbClr val="9A95B0"/>
-                </a:solidFill>
-                <a:latin typeface="Helvetica"/>
-              </a:rPr>
-              <a:t>Module 8 · Cheat sheet</a:t>
-            </a:r>
           </a:p>
         </p:txBody>
       </p:sp>
@@ -9353,7 +8992,7 @@
                 </a:solidFill>
                 <a:latin typeface="Helvetica"/>
               </a:rPr>
-              <a:t>Troubleshooting playbook</a:t>
+              <a:t>Top member questions — one-line scripts</a:t>
             </a:r>
           </a:p>
         </p:txBody>
@@ -9410,7 +9049,7 @@
         <p:spPr>
           <a:xfrm>
             <a:off x="640080" y="2011680"/>
-            <a:ext cx="10972800" cy="4572000"/>
+            <a:ext cx="5029200" cy="365760"/>
           </a:xfrm>
           <a:prstGeom prst="rect">
             <a:avLst/>
@@ -9418,133 +9057,20 @@
           <a:noFill/>
         </p:spPr>
         <p:txBody>
-          <a:bodyPr wrap="square">
+          <a:bodyPr wrap="square" lIns="0" rIns="0" tIns="0" bIns="0">
             <a:spAutoFit/>
           </a:bodyPr>
           <a:lstStyle/>
           <a:p>
-            <a:pPr algn="l">
-              <a:spcAft>
-                <a:spcPts val="800"/>
-              </a:spcAft>
-            </a:pPr>
-            <a:r>
-              <a:rPr sz="1800" b="1">
+            <a:pPr algn="l"/>
+            <a:r>
+              <a:rPr sz="1300" b="1">
                 <a:solidFill>
                   <a:srgbClr val="D4AF5A"/>
                 </a:solidFill>
                 <a:latin typeface="Helvetica"/>
               </a:rPr>
-              <a:t>•   </a:t>
-            </a:r>
-            <a:r>
-              <a:rPr sz="1800">
-                <a:solidFill>
-                  <a:srgbClr val="F0F0F8"/>
-                </a:solidFill>
-                <a:latin typeface="Helvetica"/>
-              </a:rPr>
-              <a:t>Points not showing  →  check History; if absent, re-award + flag manager</a:t>
-            </a:r>
-          </a:p>
-          <a:p>
-            <a:pPr algn="l">
-              <a:spcAft>
-                <a:spcPts val="800"/>
-              </a:spcAft>
-            </a:pPr>
-            <a:r>
-              <a:rPr sz="1800" b="1">
-                <a:solidFill>
-                  <a:srgbClr val="D4AF5A"/>
-                </a:solidFill>
-                <a:latin typeface="Helvetica"/>
-              </a:rPr>
-              <a:t>•   </a:t>
-            </a:r>
-            <a:r>
-              <a:rPr sz="1800">
-                <a:solidFill>
-                  <a:srgbClr val="F0F0F8"/>
-                </a:solidFill>
-                <a:latin typeface="Helvetica"/>
-              </a:rPr>
-              <a:t>QR won't scan  →  brightness up · full-screen Member Card · or search by email</a:t>
-            </a:r>
-          </a:p>
-          <a:p>
-            <a:pPr algn="l">
-              <a:spcAft>
-                <a:spcPts val="800"/>
-              </a:spcAft>
-            </a:pPr>
-            <a:r>
-              <a:rPr sz="1800" b="1">
-                <a:solidFill>
-                  <a:srgbClr val="D4AF5A"/>
-                </a:solidFill>
-                <a:latin typeface="Helvetica"/>
-              </a:rPr>
-              <a:t>•   </a:t>
-            </a:r>
-            <a:r>
-              <a:rPr sz="1800">
-                <a:solidFill>
-                  <a:srgbClr val="F0F0F8"/>
-                </a:solidFill>
-                <a:latin typeface="Helvetica"/>
-              </a:rPr>
-              <a:t>App crashing  →  force close · update · capture screenshot for support</a:t>
-            </a:r>
-          </a:p>
-          <a:p>
-            <a:pPr algn="l">
-              <a:spcAft>
-                <a:spcPts val="800"/>
-              </a:spcAft>
-            </a:pPr>
-            <a:r>
-              <a:rPr sz="1800" b="1">
-                <a:solidFill>
-                  <a:srgbClr val="D4AF5A"/>
-                </a:solidFill>
-                <a:latin typeface="Helvetica"/>
-              </a:rPr>
-              <a:t>•   </a:t>
-            </a:r>
-            <a:r>
-              <a:rPr sz="1800">
-                <a:solidFill>
-                  <a:srgbClr val="F0F0F8"/>
-                </a:solidFill>
-                <a:latin typeface="Helvetica"/>
-              </a:rPr>
-              <a:t>Wrong venue on receipt  →  do NOT reverse · call manager · they fix in Lovable</a:t>
-            </a:r>
-          </a:p>
-          <a:p>
-            <a:pPr algn="l">
-              <a:spcAft>
-                <a:spcPts val="800"/>
-              </a:spcAft>
-            </a:pPr>
-            <a:r>
-              <a:rPr sz="1800" b="1">
-                <a:solidFill>
-                  <a:srgbClr val="D4AF5A"/>
-                </a:solidFill>
-                <a:latin typeface="Helvetica"/>
-              </a:rPr>
-              <a:t>•   </a:t>
-            </a:r>
-            <a:r>
-              <a:rPr sz="1800">
-                <a:solidFill>
-                  <a:srgbClr val="F0F0F8"/>
-                </a:solidFill>
-                <a:latin typeface="Helvetica"/>
-              </a:rPr>
-              <a:t>Duplicate award  →  manager reverses one in Lovable Admin Portal</a:t>
+              <a:t>"How do I get my points?"</a:t>
             </a:r>
           </a:p>
         </p:txBody>
@@ -9557,6 +9083,531 @@
         </p:nvSpPr>
         <p:spPr>
           <a:xfrm>
+            <a:off x="5760720" y="2011680"/>
+            <a:ext cx="5943600" cy="365760"/>
+          </a:xfrm>
+          <a:prstGeom prst="rect">
+            <a:avLst/>
+          </a:prstGeom>
+          <a:noFill/>
+        </p:spPr>
+        <p:txBody>
+          <a:bodyPr wrap="square" lIns="0" rIns="0" tIns="0" bIns="0">
+            <a:spAutoFit/>
+          </a:bodyPr>
+          <a:lstStyle/>
+          <a:p>
+            <a:pPr algn="l"/>
+            <a:r>
+              <a:rPr sz="1300" b="0">
+                <a:solidFill>
+                  <a:srgbClr val="F0F0F8"/>
+                </a:solidFill>
+                <a:latin typeface="Helvetica"/>
+              </a:rPr>
+              <a:t>I'll scan your member QR and award them now.</a:t>
+            </a:r>
+          </a:p>
+        </p:txBody>
+      </p:sp>
+      <p:sp>
+        <p:nvSpPr>
+          <p:cNvPr id="7" name="TextBox 6"/>
+          <p:cNvSpPr txBox="1"/>
+          <p:nvPr/>
+        </p:nvSpPr>
+        <p:spPr>
+          <a:xfrm>
+            <a:off x="640080" y="2514600"/>
+            <a:ext cx="5029200" cy="365760"/>
+          </a:xfrm>
+          <a:prstGeom prst="rect">
+            <a:avLst/>
+          </a:prstGeom>
+          <a:noFill/>
+        </p:spPr>
+        <p:txBody>
+          <a:bodyPr wrap="square" lIns="0" rIns="0" tIns="0" bIns="0">
+            <a:spAutoFit/>
+          </a:bodyPr>
+          <a:lstStyle/>
+          <a:p>
+            <a:pPr algn="l"/>
+            <a:r>
+              <a:rPr sz="1300" b="1">
+                <a:solidFill>
+                  <a:srgbClr val="D4AF5A"/>
+                </a:solidFill>
+                <a:latin typeface="Helvetica"/>
+              </a:rPr>
+              <a:t>"Where's my member QR?"</a:t>
+            </a:r>
+          </a:p>
+        </p:txBody>
+      </p:sp>
+      <p:sp>
+        <p:nvSpPr>
+          <p:cNvPr id="8" name="TextBox 7"/>
+          <p:cNvSpPr txBox="1"/>
+          <p:nvPr/>
+        </p:nvSpPr>
+        <p:spPr>
+          <a:xfrm>
+            <a:off x="5760720" y="2514600"/>
+            <a:ext cx="5943600" cy="365760"/>
+          </a:xfrm>
+          <a:prstGeom prst="rect">
+            <a:avLst/>
+          </a:prstGeom>
+          <a:noFill/>
+        </p:spPr>
+        <p:txBody>
+          <a:bodyPr wrap="square" lIns="0" rIns="0" tIns="0" bIns="0">
+            <a:spAutoFit/>
+          </a:bodyPr>
+          <a:lstStyle/>
+          <a:p>
+            <a:pPr algn="l"/>
+            <a:r>
+              <a:rPr sz="1300" b="0">
+                <a:solidFill>
+                  <a:srgbClr val="F0F0F8"/>
+                </a:solidFill>
+                <a:latin typeface="Helvetica"/>
+              </a:rPr>
+              <a:t>Open the app → Wallet → Member Card.</a:t>
+            </a:r>
+          </a:p>
+        </p:txBody>
+      </p:sp>
+      <p:sp>
+        <p:nvSpPr>
+          <p:cNvPr id="9" name="TextBox 8"/>
+          <p:cNvSpPr txBox="1"/>
+          <p:nvPr/>
+        </p:nvSpPr>
+        <p:spPr>
+          <a:xfrm>
+            <a:off x="640080" y="3017520"/>
+            <a:ext cx="5029200" cy="365760"/>
+          </a:xfrm>
+          <a:prstGeom prst="rect">
+            <a:avLst/>
+          </a:prstGeom>
+          <a:noFill/>
+        </p:spPr>
+        <p:txBody>
+          <a:bodyPr wrap="square" lIns="0" rIns="0" tIns="0" bIns="0">
+            <a:spAutoFit/>
+          </a:bodyPr>
+          <a:lstStyle/>
+          <a:p>
+            <a:pPr algn="l"/>
+            <a:r>
+              <a:rPr sz="1300" b="1">
+                <a:solidFill>
+                  <a:srgbClr val="D4AF5A"/>
+                </a:solidFill>
+                <a:latin typeface="Helvetica"/>
+              </a:rPr>
+              <a:t>"I didn't get points from yesterday"</a:t>
+            </a:r>
+          </a:p>
+        </p:txBody>
+      </p:sp>
+      <p:sp>
+        <p:nvSpPr>
+          <p:cNvPr id="10" name="TextBox 9"/>
+          <p:cNvSpPr txBox="1"/>
+          <p:nvPr/>
+        </p:nvSpPr>
+        <p:spPr>
+          <a:xfrm>
+            <a:off x="5760720" y="3017520"/>
+            <a:ext cx="5943600" cy="365760"/>
+          </a:xfrm>
+          <a:prstGeom prst="rect">
+            <a:avLst/>
+          </a:prstGeom>
+          <a:noFill/>
+        </p:spPr>
+        <p:txBody>
+          <a:bodyPr wrap="square" lIns="0" rIns="0" tIns="0" bIns="0">
+            <a:spAutoFit/>
+          </a:bodyPr>
+          <a:lstStyle/>
+          <a:p>
+            <a:pPr algn="l"/>
+            <a:r>
+              <a:rPr sz="1300" b="0">
+                <a:solidFill>
+                  <a:srgbClr val="F0F0F8"/>
+                </a:solidFill>
+                <a:latin typeface="Helvetica"/>
+              </a:rPr>
+              <a:t>Let me check History — SwiftPOS can take a few minutes.</a:t>
+            </a:r>
+          </a:p>
+        </p:txBody>
+      </p:sp>
+      <p:sp>
+        <p:nvSpPr>
+          <p:cNvPr id="11" name="TextBox 10"/>
+          <p:cNvSpPr txBox="1"/>
+          <p:nvPr/>
+        </p:nvSpPr>
+        <p:spPr>
+          <a:xfrm>
+            <a:off x="640080" y="3520439"/>
+            <a:ext cx="5029200" cy="365760"/>
+          </a:xfrm>
+          <a:prstGeom prst="rect">
+            <a:avLst/>
+          </a:prstGeom>
+          <a:noFill/>
+        </p:spPr>
+        <p:txBody>
+          <a:bodyPr wrap="square" lIns="0" rIns="0" tIns="0" bIns="0">
+            <a:spAutoFit/>
+          </a:bodyPr>
+          <a:lstStyle/>
+          <a:p>
+            <a:pPr algn="l"/>
+            <a:r>
+              <a:rPr sz="1300" b="1">
+                <a:solidFill>
+                  <a:srgbClr val="D4AF5A"/>
+                </a:solidFill>
+                <a:latin typeface="Helvetica"/>
+              </a:rPr>
+              <a:t>"How do I get free entry?"</a:t>
+            </a:r>
+          </a:p>
+        </p:txBody>
+      </p:sp>
+      <p:sp>
+        <p:nvSpPr>
+          <p:cNvPr id="12" name="TextBox 11"/>
+          <p:cNvSpPr txBox="1"/>
+          <p:nvPr/>
+        </p:nvSpPr>
+        <p:spPr>
+          <a:xfrm>
+            <a:off x="5760720" y="3520439"/>
+            <a:ext cx="5943600" cy="365760"/>
+          </a:xfrm>
+          <a:prstGeom prst="rect">
+            <a:avLst/>
+          </a:prstGeom>
+          <a:noFill/>
+        </p:spPr>
+        <p:txBody>
+          <a:bodyPr wrap="square" lIns="0" rIns="0" tIns="0" bIns="0">
+            <a:spAutoFit/>
+          </a:bodyPr>
+          <a:lstStyle/>
+          <a:p>
+            <a:pPr algn="l"/>
+            <a:r>
+              <a:rPr sz="1300" b="0">
+                <a:solidFill>
+                  <a:srgbClr val="F0F0F8"/>
+                </a:solidFill>
+                <a:latin typeface="Helvetica"/>
+              </a:rPr>
+              <a:t>Lunar subscription gives monthly entries; tier may also unlock.</a:t>
+            </a:r>
+          </a:p>
+        </p:txBody>
+      </p:sp>
+      <p:sp>
+        <p:nvSpPr>
+          <p:cNvPr id="13" name="TextBox 12"/>
+          <p:cNvSpPr txBox="1"/>
+          <p:nvPr/>
+        </p:nvSpPr>
+        <p:spPr>
+          <a:xfrm>
+            <a:off x="640080" y="4023359"/>
+            <a:ext cx="5029200" cy="365760"/>
+          </a:xfrm>
+          <a:prstGeom prst="rect">
+            <a:avLst/>
+          </a:prstGeom>
+          <a:noFill/>
+        </p:spPr>
+        <p:txBody>
+          <a:bodyPr wrap="square" lIns="0" rIns="0" tIns="0" bIns="0">
+            <a:spAutoFit/>
+          </a:bodyPr>
+          <a:lstStyle/>
+          <a:p>
+            <a:pPr algn="l"/>
+            <a:r>
+              <a:rPr sz="1300" b="1">
+                <a:solidFill>
+                  <a:srgbClr val="D4AF5A"/>
+                </a:solidFill>
+                <a:latin typeface="Helvetica"/>
+              </a:rPr>
+              <a:t>"What's my tier?"</a:t>
+            </a:r>
+          </a:p>
+        </p:txBody>
+      </p:sp>
+      <p:sp>
+        <p:nvSpPr>
+          <p:cNvPr id="14" name="TextBox 13"/>
+          <p:cNvSpPr txBox="1"/>
+          <p:nvPr/>
+        </p:nvSpPr>
+        <p:spPr>
+          <a:xfrm>
+            <a:off x="5760720" y="4023359"/>
+            <a:ext cx="5943600" cy="365760"/>
+          </a:xfrm>
+          <a:prstGeom prst="rect">
+            <a:avLst/>
+          </a:prstGeom>
+          <a:noFill/>
+        </p:spPr>
+        <p:txBody>
+          <a:bodyPr wrap="square" lIns="0" rIns="0" tIns="0" bIns="0">
+            <a:spAutoFit/>
+          </a:bodyPr>
+          <a:lstStyle/>
+          <a:p>
+            <a:pPr algn="l"/>
+            <a:r>
+              <a:rPr sz="1300" b="0">
+                <a:solidFill>
+                  <a:srgbClr val="F0F0F8"/>
+                </a:solidFill>
+                <a:latin typeface="Helvetica"/>
+              </a:rPr>
+              <a:t>It's on your Profile screen — Bronze · Silver · Gold · Legend.</a:t>
+            </a:r>
+          </a:p>
+        </p:txBody>
+      </p:sp>
+      <p:sp>
+        <p:nvSpPr>
+          <p:cNvPr id="15" name="TextBox 14"/>
+          <p:cNvSpPr txBox="1"/>
+          <p:nvPr/>
+        </p:nvSpPr>
+        <p:spPr>
+          <a:xfrm>
+            <a:off x="640080" y="4526279"/>
+            <a:ext cx="5029200" cy="365760"/>
+          </a:xfrm>
+          <a:prstGeom prst="rect">
+            <a:avLst/>
+          </a:prstGeom>
+          <a:noFill/>
+        </p:spPr>
+        <p:txBody>
+          <a:bodyPr wrap="square" lIns="0" rIns="0" tIns="0" bIns="0">
+            <a:spAutoFit/>
+          </a:bodyPr>
+          <a:lstStyle/>
+          <a:p>
+            <a:pPr algn="l"/>
+            <a:r>
+              <a:rPr sz="1300" b="1">
+                <a:solidFill>
+                  <a:srgbClr val="D4AF5A"/>
+                </a:solidFill>
+                <a:latin typeface="Helvetica"/>
+              </a:rPr>
+              <a:t>"How do referrals work?"</a:t>
+            </a:r>
+          </a:p>
+        </p:txBody>
+      </p:sp>
+      <p:sp>
+        <p:nvSpPr>
+          <p:cNvPr id="16" name="TextBox 15"/>
+          <p:cNvSpPr txBox="1"/>
+          <p:nvPr/>
+        </p:nvSpPr>
+        <p:spPr>
+          <a:xfrm>
+            <a:off x="5760720" y="4526279"/>
+            <a:ext cx="5943600" cy="365760"/>
+          </a:xfrm>
+          <a:prstGeom prst="rect">
+            <a:avLst/>
+          </a:prstGeom>
+          <a:noFill/>
+        </p:spPr>
+        <p:txBody>
+          <a:bodyPr wrap="square" lIns="0" rIns="0" tIns="0" bIns="0">
+            <a:spAutoFit/>
+          </a:bodyPr>
+          <a:lstStyle/>
+          <a:p>
+            <a:pPr algn="l"/>
+            <a:r>
+              <a:rPr sz="1300" b="0">
+                <a:solidFill>
+                  <a:srgbClr val="F0F0F8"/>
+                </a:solidFill>
+                <a:latin typeface="Helvetica"/>
+              </a:rPr>
+              <a:t>Profile → Refer a Friend. You both get bonus points after their first visit.</a:t>
+            </a:r>
+          </a:p>
+        </p:txBody>
+      </p:sp>
+      <p:sp>
+        <p:nvSpPr>
+          <p:cNvPr id="17" name="TextBox 16"/>
+          <p:cNvSpPr txBox="1"/>
+          <p:nvPr/>
+        </p:nvSpPr>
+        <p:spPr>
+          <a:xfrm>
+            <a:off x="640080" y="5029199"/>
+            <a:ext cx="5029200" cy="365760"/>
+          </a:xfrm>
+          <a:prstGeom prst="rect">
+            <a:avLst/>
+          </a:prstGeom>
+          <a:noFill/>
+        </p:spPr>
+        <p:txBody>
+          <a:bodyPr wrap="square" lIns="0" rIns="0" tIns="0" bIns="0">
+            <a:spAutoFit/>
+          </a:bodyPr>
+          <a:lstStyle/>
+          <a:p>
+            <a:pPr algn="l"/>
+            <a:r>
+              <a:rPr sz="1300" b="1">
+                <a:solidFill>
+                  <a:srgbClr val="D4AF5A"/>
+                </a:solidFill>
+                <a:latin typeface="Helvetica"/>
+              </a:rPr>
+              <a:t>"I lost something"</a:t>
+            </a:r>
+          </a:p>
+        </p:txBody>
+      </p:sp>
+      <p:sp>
+        <p:nvSpPr>
+          <p:cNvPr id="18" name="TextBox 17"/>
+          <p:cNvSpPr txBox="1"/>
+          <p:nvPr/>
+        </p:nvSpPr>
+        <p:spPr>
+          <a:xfrm>
+            <a:off x="5760720" y="5029199"/>
+            <a:ext cx="5943600" cy="365760"/>
+          </a:xfrm>
+          <a:prstGeom prst="rect">
+            <a:avLst/>
+          </a:prstGeom>
+          <a:noFill/>
+        </p:spPr>
+        <p:txBody>
+          <a:bodyPr wrap="square" lIns="0" rIns="0" tIns="0" bIns="0">
+            <a:spAutoFit/>
+          </a:bodyPr>
+          <a:lstStyle/>
+          <a:p>
+            <a:pPr algn="l"/>
+            <a:r>
+              <a:rPr sz="1300" b="0">
+                <a:solidFill>
+                  <a:srgbClr val="F0F0F8"/>
+                </a:solidFill>
+                <a:latin typeface="Helvetica"/>
+              </a:rPr>
+              <a:t>App → Lost &amp; Found → Report Missing. We'll match it.</a:t>
+            </a:r>
+          </a:p>
+        </p:txBody>
+      </p:sp>
+      <p:sp>
+        <p:nvSpPr>
+          <p:cNvPr id="19" name="TextBox 18"/>
+          <p:cNvSpPr txBox="1"/>
+          <p:nvPr/>
+        </p:nvSpPr>
+        <p:spPr>
+          <a:xfrm>
+            <a:off x="640080" y="5532119"/>
+            <a:ext cx="5029200" cy="365760"/>
+          </a:xfrm>
+          <a:prstGeom prst="rect">
+            <a:avLst/>
+          </a:prstGeom>
+          <a:noFill/>
+        </p:spPr>
+        <p:txBody>
+          <a:bodyPr wrap="square" lIns="0" rIns="0" tIns="0" bIns="0">
+            <a:spAutoFit/>
+          </a:bodyPr>
+          <a:lstStyle/>
+          <a:p>
+            <a:pPr algn="l"/>
+            <a:r>
+              <a:rPr sz="1300" b="1">
+                <a:solidFill>
+                  <a:srgbClr val="D4AF5A"/>
+                </a:solidFill>
+                <a:latin typeface="Helvetica"/>
+              </a:rPr>
+              <a:t>"Cancel my subscription?"</a:t>
+            </a:r>
+          </a:p>
+        </p:txBody>
+      </p:sp>
+      <p:sp>
+        <p:nvSpPr>
+          <p:cNvPr id="20" name="TextBox 19"/>
+          <p:cNvSpPr txBox="1"/>
+          <p:nvPr/>
+        </p:nvSpPr>
+        <p:spPr>
+          <a:xfrm>
+            <a:off x="5760720" y="5532119"/>
+            <a:ext cx="5943600" cy="365760"/>
+          </a:xfrm>
+          <a:prstGeom prst="rect">
+            <a:avLst/>
+          </a:prstGeom>
+          <a:noFill/>
+        </p:spPr>
+        <p:txBody>
+          <a:bodyPr wrap="square" lIns="0" rIns="0" tIns="0" bIns="0">
+            <a:spAutoFit/>
+          </a:bodyPr>
+          <a:lstStyle/>
+          <a:p>
+            <a:pPr algn="l"/>
+            <a:r>
+              <a:rPr sz="1300" b="0">
+                <a:solidFill>
+                  <a:srgbClr val="F0F0F8"/>
+                </a:solidFill>
+                <a:latin typeface="Helvetica"/>
+              </a:rPr>
+              <a:t>Profile → Subscriptions → Manage. Stripe handles it; access until period-end.</a:t>
+            </a:r>
+          </a:p>
+        </p:txBody>
+      </p:sp>
+      <p:sp>
+        <p:nvSpPr>
+          <p:cNvPr id="21" name="TextBox 20"/>
+          <p:cNvSpPr txBox="1"/>
+          <p:nvPr/>
+        </p:nvSpPr>
+        <p:spPr>
+          <a:xfrm>
             <a:off x="548640" y="6446520"/>
             <a:ext cx="5486400" cy="274320"/>
           </a:xfrm>
@@ -9586,7 +9637,7 @@
       </p:sp>
       <p:sp>
         <p:nvSpPr>
-          <p:cNvPr id="7" name="TextBox 6"/>
+          <p:cNvPr id="22" name="TextBox 21"/>
           <p:cNvSpPr txBox="1"/>
           <p:nvPr/>
         </p:nvSpPr>
@@ -9614,7 +9665,7 @@
                 </a:solidFill>
                 <a:latin typeface="Helvetica"/>
               </a:rPr>
-              <a:t>Module 8 · Troubleshooting</a:t>
+              <a:t>Module 8 · Cheat sheet</a:t>
             </a:r>
           </a:p>
         </p:txBody>
@@ -9628,6 +9679,363 @@
 </file>
 
 <file path=ppt/slides/slide25.xml><?xml version="1.0" encoding="utf-8"?>
+<p:sld xmlns:a="http://schemas.openxmlformats.org/drawingml/2006/main" xmlns:p="http://schemas.openxmlformats.org/presentationml/2006/main" xmlns:r="http://schemas.openxmlformats.org/officeDocument/2006/relationships">
+  <p:cSld>
+    <p:bg>
+      <p:bgPr>
+        <a:solidFill>
+          <a:srgbClr val="08080E"/>
+        </a:solidFill>
+        <a:effectLst/>
+      </p:bgPr>
+    </p:bg>
+    <p:spTree>
+      <p:nvGrpSpPr>
+        <p:cNvPr id="1" name=""/>
+        <p:cNvGrpSpPr/>
+        <p:nvPr/>
+      </p:nvGrpSpPr>
+      <p:grpSpPr/>
+      <p:sp>
+        <p:nvSpPr>
+          <p:cNvPr id="2" name="TextBox 1"/>
+          <p:cNvSpPr txBox="1"/>
+          <p:nvPr/>
+        </p:nvSpPr>
+        <p:spPr>
+          <a:xfrm>
+            <a:off x="548640" y="457200"/>
+            <a:ext cx="10972800" cy="365760"/>
+          </a:xfrm>
+          <a:prstGeom prst="rect">
+            <a:avLst/>
+          </a:prstGeom>
+          <a:noFill/>
+        </p:spPr>
+        <p:txBody>
+          <a:bodyPr wrap="square" lIns="0" rIns="0" tIns="0" bIns="0">
+            <a:spAutoFit/>
+          </a:bodyPr>
+          <a:lstStyle/>
+          <a:p>
+            <a:pPr algn="l"/>
+            <a:r>
+              <a:rPr sz="1200" b="1">
+                <a:solidFill>
+                  <a:srgbClr val="D4AF5A"/>
+                </a:solidFill>
+                <a:latin typeface="Helvetica"/>
+              </a:rPr>
+              <a:t>MODULE 8</a:t>
+            </a:r>
+          </a:p>
+        </p:txBody>
+      </p:sp>
+      <p:sp>
+        <p:nvSpPr>
+          <p:cNvPr id="3" name="TextBox 2"/>
+          <p:cNvSpPr txBox="1"/>
+          <p:nvPr/>
+        </p:nvSpPr>
+        <p:spPr>
+          <a:xfrm>
+            <a:off x="548640" y="868680"/>
+            <a:ext cx="10972800" cy="914400"/>
+          </a:xfrm>
+          <a:prstGeom prst="rect">
+            <a:avLst/>
+          </a:prstGeom>
+          <a:noFill/>
+        </p:spPr>
+        <p:txBody>
+          <a:bodyPr wrap="square" lIns="0" rIns="0" tIns="0" bIns="0">
+            <a:spAutoFit/>
+          </a:bodyPr>
+          <a:lstStyle/>
+          <a:p>
+            <a:pPr algn="l"/>
+            <a:r>
+              <a:rPr sz="3200" b="1">
+                <a:solidFill>
+                  <a:srgbClr val="FFFFFF"/>
+                </a:solidFill>
+                <a:latin typeface="Helvetica"/>
+              </a:rPr>
+              <a:t>Troubleshooting playbook</a:t>
+            </a:r>
+          </a:p>
+        </p:txBody>
+      </p:sp>
+      <p:sp>
+        <p:nvSpPr>
+          <p:cNvPr id="4" name="Rectangle 3"/>
+          <p:cNvSpPr/>
+          <p:nvPr/>
+        </p:nvSpPr>
+        <p:spPr>
+          <a:xfrm>
+            <a:off x="548640" y="1691640"/>
+            <a:ext cx="914400" cy="45720"/>
+          </a:xfrm>
+          <a:prstGeom prst="rect">
+            <a:avLst/>
+          </a:prstGeom>
+          <a:solidFill>
+            <a:srgbClr val="D4AF5A"/>
+          </a:solidFill>
+          <a:ln>
+            <a:noFill/>
+          </a:ln>
+        </p:spPr>
+        <p:style>
+          <a:lnRef idx="1">
+            <a:schemeClr val="accent1"/>
+          </a:lnRef>
+          <a:fillRef idx="3">
+            <a:schemeClr val="accent1"/>
+          </a:fillRef>
+          <a:effectRef idx="2">
+            <a:schemeClr val="accent1"/>
+          </a:effectRef>
+          <a:fontRef idx="minor">
+            <a:schemeClr val="lt1"/>
+          </a:fontRef>
+        </p:style>
+        <p:txBody>
+          <a:bodyPr rtlCol="0" anchor="ctr"/>
+          <a:lstStyle/>
+          <a:p>
+            <a:pPr algn="ctr"/>
+          </a:p>
+        </p:txBody>
+      </p:sp>
+      <p:sp>
+        <p:nvSpPr>
+          <p:cNvPr id="5" name="TextBox 4"/>
+          <p:cNvSpPr txBox="1"/>
+          <p:nvPr/>
+        </p:nvSpPr>
+        <p:spPr>
+          <a:xfrm>
+            <a:off x="640080" y="2011680"/>
+            <a:ext cx="10972800" cy="4572000"/>
+          </a:xfrm>
+          <a:prstGeom prst="rect">
+            <a:avLst/>
+          </a:prstGeom>
+          <a:noFill/>
+        </p:spPr>
+        <p:txBody>
+          <a:bodyPr wrap="square">
+            <a:spAutoFit/>
+          </a:bodyPr>
+          <a:lstStyle/>
+          <a:p>
+            <a:pPr algn="l">
+              <a:spcAft>
+                <a:spcPts val="800"/>
+              </a:spcAft>
+            </a:pPr>
+            <a:r>
+              <a:rPr sz="1800" b="1">
+                <a:solidFill>
+                  <a:srgbClr val="D4AF5A"/>
+                </a:solidFill>
+                <a:latin typeface="Helvetica"/>
+              </a:rPr>
+              <a:t>•   </a:t>
+            </a:r>
+            <a:r>
+              <a:rPr sz="1800">
+                <a:solidFill>
+                  <a:srgbClr val="F0F0F8"/>
+                </a:solidFill>
+                <a:latin typeface="Helvetica"/>
+              </a:rPr>
+              <a:t>Points not showing  →  check History; if absent, re-award + flag manager</a:t>
+            </a:r>
+          </a:p>
+          <a:p>
+            <a:pPr algn="l">
+              <a:spcAft>
+                <a:spcPts val="800"/>
+              </a:spcAft>
+            </a:pPr>
+            <a:r>
+              <a:rPr sz="1800" b="1">
+                <a:solidFill>
+                  <a:srgbClr val="D4AF5A"/>
+                </a:solidFill>
+                <a:latin typeface="Helvetica"/>
+              </a:rPr>
+              <a:t>•   </a:t>
+            </a:r>
+            <a:r>
+              <a:rPr sz="1800">
+                <a:solidFill>
+                  <a:srgbClr val="F0F0F8"/>
+                </a:solidFill>
+                <a:latin typeface="Helvetica"/>
+              </a:rPr>
+              <a:t>QR won't scan  →  brightness up · full-screen Member Card · or search by email</a:t>
+            </a:r>
+          </a:p>
+          <a:p>
+            <a:pPr algn="l">
+              <a:spcAft>
+                <a:spcPts val="800"/>
+              </a:spcAft>
+            </a:pPr>
+            <a:r>
+              <a:rPr sz="1800" b="1">
+                <a:solidFill>
+                  <a:srgbClr val="D4AF5A"/>
+                </a:solidFill>
+                <a:latin typeface="Helvetica"/>
+              </a:rPr>
+              <a:t>•   </a:t>
+            </a:r>
+            <a:r>
+              <a:rPr sz="1800">
+                <a:solidFill>
+                  <a:srgbClr val="F0F0F8"/>
+                </a:solidFill>
+                <a:latin typeface="Helvetica"/>
+              </a:rPr>
+              <a:t>App crashing  →  force close · update · capture screenshot for support</a:t>
+            </a:r>
+          </a:p>
+          <a:p>
+            <a:pPr algn="l">
+              <a:spcAft>
+                <a:spcPts val="800"/>
+              </a:spcAft>
+            </a:pPr>
+            <a:r>
+              <a:rPr sz="1800" b="1">
+                <a:solidFill>
+                  <a:srgbClr val="D4AF5A"/>
+                </a:solidFill>
+                <a:latin typeface="Helvetica"/>
+              </a:rPr>
+              <a:t>•   </a:t>
+            </a:r>
+            <a:r>
+              <a:rPr sz="1800">
+                <a:solidFill>
+                  <a:srgbClr val="F0F0F8"/>
+                </a:solidFill>
+                <a:latin typeface="Helvetica"/>
+              </a:rPr>
+              <a:t>Wrong venue on receipt  →  do NOT reverse · call manager · they fix in Lovable</a:t>
+            </a:r>
+          </a:p>
+          <a:p>
+            <a:pPr algn="l">
+              <a:spcAft>
+                <a:spcPts val="800"/>
+              </a:spcAft>
+            </a:pPr>
+            <a:r>
+              <a:rPr sz="1800" b="1">
+                <a:solidFill>
+                  <a:srgbClr val="D4AF5A"/>
+                </a:solidFill>
+                <a:latin typeface="Helvetica"/>
+              </a:rPr>
+              <a:t>•   </a:t>
+            </a:r>
+            <a:r>
+              <a:rPr sz="1800">
+                <a:solidFill>
+                  <a:srgbClr val="F0F0F8"/>
+                </a:solidFill>
+                <a:latin typeface="Helvetica"/>
+              </a:rPr>
+              <a:t>Duplicate award  →  manager reverses one in Lovable Admin Portal</a:t>
+            </a:r>
+          </a:p>
+        </p:txBody>
+      </p:sp>
+      <p:sp>
+        <p:nvSpPr>
+          <p:cNvPr id="6" name="TextBox 5"/>
+          <p:cNvSpPr txBox="1"/>
+          <p:nvPr/>
+        </p:nvSpPr>
+        <p:spPr>
+          <a:xfrm>
+            <a:off x="548640" y="6446520"/>
+            <a:ext cx="5486400" cy="274320"/>
+          </a:xfrm>
+          <a:prstGeom prst="rect">
+            <a:avLst/>
+          </a:prstGeom>
+          <a:noFill/>
+        </p:spPr>
+        <p:txBody>
+          <a:bodyPr wrap="square" lIns="0" rIns="0" tIns="0" bIns="0">
+            <a:spAutoFit/>
+          </a:bodyPr>
+          <a:lstStyle/>
+          <a:p>
+            <a:pPr algn="l"/>
+            <a:r>
+              <a:rPr sz="900" b="0">
+                <a:solidFill>
+                  <a:srgbClr val="9A95B0"/>
+                </a:solidFill>
+                <a:latin typeface="Helvetica"/>
+              </a:rPr>
+              <a:t>Luna Group VIP · Staff Training</a:t>
+            </a:r>
+          </a:p>
+        </p:txBody>
+      </p:sp>
+      <p:sp>
+        <p:nvSpPr>
+          <p:cNvPr id="7" name="TextBox 6"/>
+          <p:cNvSpPr txBox="1"/>
+          <p:nvPr/>
+        </p:nvSpPr>
+        <p:spPr>
+          <a:xfrm>
+            <a:off x="6858000" y="6446520"/>
+            <a:ext cx="4754880" cy="274320"/>
+          </a:xfrm>
+          <a:prstGeom prst="rect">
+            <a:avLst/>
+          </a:prstGeom>
+          <a:noFill/>
+        </p:spPr>
+        <p:txBody>
+          <a:bodyPr wrap="square" lIns="0" rIns="0" tIns="0" bIns="0">
+            <a:spAutoFit/>
+          </a:bodyPr>
+          <a:lstStyle/>
+          <a:p>
+            <a:pPr algn="r"/>
+            <a:r>
+              <a:rPr sz="900" b="0">
+                <a:solidFill>
+                  <a:srgbClr val="9A95B0"/>
+                </a:solidFill>
+                <a:latin typeface="Helvetica"/>
+              </a:rPr>
+              <a:t>Module 8 · Troubleshooting</a:t>
+            </a:r>
+          </a:p>
+        </p:txBody>
+      </p:sp>
+    </p:spTree>
+  </p:cSld>
+  <p:clrMapOvr>
+    <a:masterClrMapping/>
+  </p:clrMapOvr>
+</p:sld>
+</file>
+
+<file path=ppt/slides/slide26.xml><?xml version="1.0" encoding="utf-8"?>
 <p:sld xmlns:a="http://schemas.openxmlformats.org/drawingml/2006/main" xmlns:p="http://schemas.openxmlformats.org/presentationml/2006/main" xmlns:r="http://schemas.openxmlformats.org/officeDocument/2006/relationships">
   <p:cSld>
     <p:bg>
@@ -9756,388 +10164,6 @@
           <a:lstStyle/>
           <a:p>
             <a:pPr algn="ctr"/>
-          </a:p>
-        </p:txBody>
-      </p:sp>
-    </p:spTree>
-  </p:cSld>
-  <p:clrMapOvr>
-    <a:masterClrMapping/>
-  </p:clrMapOvr>
-</p:sld>
-</file>
-
-<file path=ppt/slides/slide26.xml><?xml version="1.0" encoding="utf-8"?>
-<p:sld xmlns:a="http://schemas.openxmlformats.org/drawingml/2006/main" xmlns:p="http://schemas.openxmlformats.org/presentationml/2006/main" xmlns:r="http://schemas.openxmlformats.org/officeDocument/2006/relationships">
-  <p:cSld>
-    <p:bg>
-      <p:bgPr>
-        <a:solidFill>
-          <a:srgbClr val="08080E"/>
-        </a:solidFill>
-        <a:effectLst/>
-      </p:bgPr>
-    </p:bg>
-    <p:spTree>
-      <p:nvGrpSpPr>
-        <p:cNvPr id="1" name=""/>
-        <p:cNvGrpSpPr/>
-        <p:nvPr/>
-      </p:nvGrpSpPr>
-      <p:grpSpPr/>
-      <p:sp>
-        <p:nvSpPr>
-          <p:cNvPr id="2" name="TextBox 1"/>
-          <p:cNvSpPr txBox="1"/>
-          <p:nvPr/>
-        </p:nvSpPr>
-        <p:spPr>
-          <a:xfrm>
-            <a:off x="548640" y="457200"/>
-            <a:ext cx="10972800" cy="365760"/>
-          </a:xfrm>
-          <a:prstGeom prst="rect">
-            <a:avLst/>
-          </a:prstGeom>
-          <a:noFill/>
-        </p:spPr>
-        <p:txBody>
-          <a:bodyPr wrap="square" lIns="0" rIns="0" tIns="0" bIns="0">
-            <a:spAutoFit/>
-          </a:bodyPr>
-          <a:lstStyle/>
-          <a:p>
-            <a:pPr algn="l"/>
-            <a:r>
-              <a:rPr sz="1200" b="1">
-                <a:solidFill>
-                  <a:srgbClr val="D4AF5A"/>
-                </a:solidFill>
-                <a:latin typeface="Helvetica"/>
-              </a:rPr>
-              <a:t>MODULE 9</a:t>
-            </a:r>
-          </a:p>
-        </p:txBody>
-      </p:sp>
-      <p:sp>
-        <p:nvSpPr>
-          <p:cNvPr id="3" name="TextBox 2"/>
-          <p:cNvSpPr txBox="1"/>
-          <p:nvPr/>
-        </p:nvSpPr>
-        <p:spPr>
-          <a:xfrm>
-            <a:off x="548640" y="868680"/>
-            <a:ext cx="10972800" cy="914400"/>
-          </a:xfrm>
-          <a:prstGeom prst="rect">
-            <a:avLst/>
-          </a:prstGeom>
-          <a:noFill/>
-        </p:spPr>
-        <p:txBody>
-          <a:bodyPr wrap="square" lIns="0" rIns="0" tIns="0" bIns="0">
-            <a:spAutoFit/>
-          </a:bodyPr>
-          <a:lstStyle/>
-          <a:p>
-            <a:pPr algn="l"/>
-            <a:r>
-              <a:rPr sz="3200" b="1">
-                <a:solidFill>
-                  <a:srgbClr val="FFFFFF"/>
-                </a:solidFill>
-                <a:latin typeface="Helvetica"/>
-              </a:rPr>
-              <a:t>Drills — pair up and demonstrate</a:t>
-            </a:r>
-          </a:p>
-        </p:txBody>
-      </p:sp>
-      <p:sp>
-        <p:nvSpPr>
-          <p:cNvPr id="4" name="Rectangle 3"/>
-          <p:cNvSpPr/>
-          <p:nvPr/>
-        </p:nvSpPr>
-        <p:spPr>
-          <a:xfrm>
-            <a:off x="548640" y="1691640"/>
-            <a:ext cx="914400" cy="45720"/>
-          </a:xfrm>
-          <a:prstGeom prst="rect">
-            <a:avLst/>
-          </a:prstGeom>
-          <a:solidFill>
-            <a:srgbClr val="D4AF5A"/>
-          </a:solidFill>
-          <a:ln>
-            <a:noFill/>
-          </a:ln>
-        </p:spPr>
-        <p:style>
-          <a:lnRef idx="1">
-            <a:schemeClr val="accent1"/>
-          </a:lnRef>
-          <a:fillRef idx="3">
-            <a:schemeClr val="accent1"/>
-          </a:fillRef>
-          <a:effectRef idx="2">
-            <a:schemeClr val="accent1"/>
-          </a:effectRef>
-          <a:fontRef idx="minor">
-            <a:schemeClr val="lt1"/>
-          </a:fontRef>
-        </p:style>
-        <p:txBody>
-          <a:bodyPr rtlCol="0" anchor="ctr"/>
-          <a:lstStyle/>
-          <a:p>
-            <a:pPr algn="ctr"/>
-          </a:p>
-        </p:txBody>
-      </p:sp>
-      <p:sp>
-        <p:nvSpPr>
-          <p:cNvPr id="5" name="TextBox 4"/>
-          <p:cNvSpPr txBox="1"/>
-          <p:nvPr/>
-        </p:nvSpPr>
-        <p:spPr>
-          <a:xfrm>
-            <a:off x="640080" y="2011680"/>
-            <a:ext cx="10972800" cy="4572000"/>
-          </a:xfrm>
-          <a:prstGeom prst="rect">
-            <a:avLst/>
-          </a:prstGeom>
-          <a:noFill/>
-        </p:spPr>
-        <p:txBody>
-          <a:bodyPr wrap="square">
-            <a:spAutoFit/>
-          </a:bodyPr>
-          <a:lstStyle/>
-          <a:p>
-            <a:pPr algn="l">
-              <a:spcAft>
-                <a:spcPts val="800"/>
-              </a:spcAft>
-            </a:pPr>
-            <a:r>
-              <a:rPr sz="1800" b="1">
-                <a:solidFill>
-                  <a:srgbClr val="D4AF5A"/>
-                </a:solidFill>
-                <a:latin typeface="Helvetica"/>
-              </a:rPr>
-              <a:t>•   </a:t>
-            </a:r>
-            <a:r>
-              <a:rPr sz="1800">
-                <a:solidFill>
-                  <a:srgbClr val="F0F0F8"/>
-                </a:solidFill>
-                <a:latin typeface="Helvetica"/>
-              </a:rPr>
-              <a:t>DRILL 1 · Award $85 of drinks at Eclipse with receipt ref</a:t>
-            </a:r>
-          </a:p>
-          <a:p>
-            <a:pPr algn="l">
-              <a:spcAft>
-                <a:spcPts val="800"/>
-              </a:spcAft>
-            </a:pPr>
-            <a:r>
-              <a:rPr sz="1800" b="1">
-                <a:solidFill>
-                  <a:srgbClr val="D4AF5A"/>
-                </a:solidFill>
-                <a:latin typeface="Helvetica"/>
-              </a:rPr>
-              <a:t>•   </a:t>
-            </a:r>
-            <a:r>
-              <a:rPr sz="1800">
-                <a:solidFill>
-                  <a:srgbClr val="F0F0F8"/>
-                </a:solidFill>
-                <a:latin typeface="Helvetica"/>
-              </a:rPr>
-              <a:t>DRILL 2 · Validate a LUNA-DRINK- QR at the bar</a:t>
-            </a:r>
-          </a:p>
-          <a:p>
-            <a:pPr algn="l">
-              <a:spcAft>
-                <a:spcPts val="800"/>
-              </a:spcAft>
-            </a:pPr>
-            <a:r>
-              <a:rPr sz="1800" b="1">
-                <a:solidFill>
-                  <a:srgbClr val="D4AF5A"/>
-                </a:solidFill>
-                <a:latin typeface="Helvetica"/>
-              </a:rPr>
-              <a:t>•   </a:t>
-            </a:r>
-            <a:r>
-              <a:rPr sz="1800">
-                <a:solidFill>
-                  <a:srgbClr val="F0F0F8"/>
-                </a:solidFill>
-                <a:latin typeface="Helvetica"/>
-              </a:rPr>
-              <a:t>DRILL 3 · Validate a LUNA-ENT- QR at the door (wrong venue first → see error)</a:t>
-            </a:r>
-          </a:p>
-          <a:p>
-            <a:pPr algn="l">
-              <a:spcAft>
-                <a:spcPts val="800"/>
-              </a:spcAft>
-            </a:pPr>
-            <a:r>
-              <a:rPr sz="1800" b="1">
-                <a:solidFill>
-                  <a:srgbClr val="D4AF5A"/>
-                </a:solidFill>
-                <a:latin typeface="Helvetica"/>
-              </a:rPr>
-              <a:t>•   </a:t>
-            </a:r>
-            <a:r>
-              <a:rPr sz="1800">
-                <a:solidFill>
-                  <a:srgbClr val="F0F0F8"/>
-                </a:solidFill>
-                <a:latin typeface="Helvetica"/>
-              </a:rPr>
-              <a:t>DRILL 4 · Search a member by phone, then by QR scan</a:t>
-            </a:r>
-          </a:p>
-          <a:p>
-            <a:pPr algn="l">
-              <a:spcAft>
-                <a:spcPts val="800"/>
-              </a:spcAft>
-            </a:pPr>
-            <a:r>
-              <a:rPr sz="1800" b="1">
-                <a:solidFill>
-                  <a:srgbClr val="D4AF5A"/>
-                </a:solidFill>
-                <a:latin typeface="Helvetica"/>
-              </a:rPr>
-              <a:t>•   </a:t>
-            </a:r>
-            <a:r>
-              <a:rPr sz="1800">
-                <a:solidFill>
-                  <a:srgbClr val="F0F0F8"/>
-                </a:solidFill>
-                <a:latin typeface="Helvetica"/>
-              </a:rPr>
-              <a:t>DRILL 5 · Investigate a fake "missing points" complaint via History</a:t>
-            </a:r>
-          </a:p>
-          <a:p>
-            <a:pPr algn="l">
-              <a:spcAft>
-                <a:spcPts val="800"/>
-              </a:spcAft>
-            </a:pPr>
-            <a:r>
-              <a:rPr sz="1800" b="1">
-                <a:solidFill>
-                  <a:srgbClr val="D4AF5A"/>
-                </a:solidFill>
-                <a:latin typeface="Helvetica"/>
-              </a:rPr>
-              <a:t>•   </a:t>
-            </a:r>
-            <a:r>
-              <a:rPr sz="1800">
-                <a:solidFill>
-                  <a:srgbClr val="F0F0F8"/>
-                </a:solidFill>
-                <a:latin typeface="Helvetica"/>
-              </a:rPr>
-              <a:t>DRILL 6 · Manager only: issue a Gift-Points override with a written reason</a:t>
-            </a:r>
-          </a:p>
-        </p:txBody>
-      </p:sp>
-      <p:sp>
-        <p:nvSpPr>
-          <p:cNvPr id="6" name="TextBox 5"/>
-          <p:cNvSpPr txBox="1"/>
-          <p:nvPr/>
-        </p:nvSpPr>
-        <p:spPr>
-          <a:xfrm>
-            <a:off x="548640" y="6446520"/>
-            <a:ext cx="5486400" cy="274320"/>
-          </a:xfrm>
-          <a:prstGeom prst="rect">
-            <a:avLst/>
-          </a:prstGeom>
-          <a:noFill/>
-        </p:spPr>
-        <p:txBody>
-          <a:bodyPr wrap="square" lIns="0" rIns="0" tIns="0" bIns="0">
-            <a:spAutoFit/>
-          </a:bodyPr>
-          <a:lstStyle/>
-          <a:p>
-            <a:pPr algn="l"/>
-            <a:r>
-              <a:rPr sz="900" b="0">
-                <a:solidFill>
-                  <a:srgbClr val="9A95B0"/>
-                </a:solidFill>
-                <a:latin typeface="Helvetica"/>
-              </a:rPr>
-              <a:t>Luna Group VIP · Staff Training</a:t>
-            </a:r>
-          </a:p>
-        </p:txBody>
-      </p:sp>
-      <p:sp>
-        <p:nvSpPr>
-          <p:cNvPr id="7" name="TextBox 6"/>
-          <p:cNvSpPr txBox="1"/>
-          <p:nvPr/>
-        </p:nvSpPr>
-        <p:spPr>
-          <a:xfrm>
-            <a:off x="6858000" y="6446520"/>
-            <a:ext cx="4754880" cy="274320"/>
-          </a:xfrm>
-          <a:prstGeom prst="rect">
-            <a:avLst/>
-          </a:prstGeom>
-          <a:noFill/>
-        </p:spPr>
-        <p:txBody>
-          <a:bodyPr wrap="square" lIns="0" rIns="0" tIns="0" bIns="0">
-            <a:spAutoFit/>
-          </a:bodyPr>
-          <a:lstStyle/>
-          <a:p>
-            <a:pPr algn="r"/>
-            <a:r>
-              <a:rPr sz="900" b="0">
-                <a:solidFill>
-                  <a:srgbClr val="9A95B0"/>
-                </a:solidFill>
-                <a:latin typeface="Helvetica"/>
-              </a:rPr>
-              <a:t>Module 9 · Drills</a:t>
-            </a:r>
           </a:p>
         </p:txBody>
       </p:sp>
@@ -10232,7 +10258,7 @@
                 </a:solidFill>
                 <a:latin typeface="Helvetica"/>
               </a:rPr>
-              <a:t>Sign-off — each trainee must demonstrate</a:t>
+              <a:t>Drills — pair up and demonstrate</a:t>
             </a:r>
           </a:p>
         </p:txBody>
@@ -10308,7 +10334,7 @@
               </a:spcAft>
             </a:pPr>
             <a:r>
-              <a:rPr sz="1700" b="1">
+              <a:rPr sz="1800" b="1">
                 <a:solidFill>
                   <a:srgbClr val="D4AF5A"/>
                 </a:solidFill>
@@ -10317,13 +10343,13 @@
               <a:t>•   </a:t>
             </a:r>
             <a:r>
-              <a:rPr sz="1700">
+              <a:rPr sz="1800">
                 <a:solidFill>
                   <a:srgbClr val="F0F0F8"/>
                 </a:solidFill>
                 <a:latin typeface="Helvetica"/>
               </a:rPr>
-              <a:t>✓ Log in and select correct venue</a:t>
+              <a:t>DRILL 1 · Award $85 of drinks at Eclipse with receipt ref</a:t>
             </a:r>
           </a:p>
           <a:p>
@@ -10333,7 +10359,7 @@
               </a:spcAft>
             </a:pPr>
             <a:r>
-              <a:rPr sz="1700" b="1">
+              <a:rPr sz="1800" b="1">
                 <a:solidFill>
                   <a:srgbClr val="D4AF5A"/>
                 </a:solidFill>
@@ -10342,13 +10368,13 @@
               <a:t>•   </a:t>
             </a:r>
             <a:r>
-              <a:rPr sz="1700">
+              <a:rPr sz="1800">
                 <a:solidFill>
                   <a:srgbClr val="F0F0F8"/>
                 </a:solidFill>
                 <a:latin typeface="Helvetica"/>
               </a:rPr>
-              <a:t>✓ Search by name · email · QR scan (all three)</a:t>
+              <a:t>DRILL 2 · Validate a LUNA-DRINK- QR at the bar</a:t>
             </a:r>
           </a:p>
           <a:p>
@@ -10358,7 +10384,7 @@
               </a:spcAft>
             </a:pPr>
             <a:r>
-              <a:rPr sz="1700" b="1">
+              <a:rPr sz="1800" b="1">
                 <a:solidFill>
                   <a:srgbClr val="D4AF5A"/>
                 </a:solidFill>
@@ -10367,13 +10393,13 @@
               <a:t>•   </a:t>
             </a:r>
             <a:r>
-              <a:rPr sz="1700">
+              <a:rPr sz="1800">
                 <a:solidFill>
                   <a:srgbClr val="F0F0F8"/>
                 </a:solidFill>
                 <a:latin typeface="Helvetica"/>
               </a:rPr>
-              <a:t>✓ Quick-award with category + receipt ref</a:t>
+              <a:t>DRILL 3 · Validate a LUNA-ENT- QR at the door (wrong venue first → see error)</a:t>
             </a:r>
           </a:p>
           <a:p>
@@ -10383,7 +10409,7 @@
               </a:spcAft>
             </a:pPr>
             <a:r>
-              <a:rPr sz="1700" b="1">
+              <a:rPr sz="1800" b="1">
                 <a:solidFill>
                   <a:srgbClr val="D4AF5A"/>
                 </a:solidFill>
@@ -10392,13 +10418,13 @@
               <a:t>•   </a:t>
             </a:r>
             <a:r>
-              <a:rPr sz="1700">
+              <a:rPr sz="1800">
                 <a:solidFill>
                   <a:srgbClr val="F0F0F8"/>
                 </a:solidFill>
                 <a:latin typeface="Helvetica"/>
               </a:rPr>
-              <a:t>✓ Validate every QR type (MEMBER · ENT · TKT · DRINK · BDAY · generic)</a:t>
+              <a:t>DRILL 4 · Search a member by phone, then by QR scan</a:t>
             </a:r>
           </a:p>
           <a:p>
@@ -10408,7 +10434,7 @@
               </a:spcAft>
             </a:pPr>
             <a:r>
-              <a:rPr sz="1700" b="1">
+              <a:rPr sz="1800" b="1">
                 <a:solidFill>
                   <a:srgbClr val="D4AF5A"/>
                 </a:solidFill>
@@ -10417,13 +10443,13 @@
               <a:t>•   </a:t>
             </a:r>
             <a:r>
-              <a:rPr sz="1700">
+              <a:rPr sz="1800">
                 <a:solidFill>
                   <a:srgbClr val="F0F0F8"/>
                 </a:solidFill>
                 <a:latin typeface="Helvetica"/>
               </a:rPr>
-              <a:t>✓ Explain base tier vs subscription tier</a:t>
+              <a:t>DRILL 5 · Investigate a fake "missing points" complaint via History</a:t>
             </a:r>
           </a:p>
           <a:p>
@@ -10433,7 +10459,7 @@
               </a:spcAft>
             </a:pPr>
             <a:r>
-              <a:rPr sz="1700" b="1">
+              <a:rPr sz="1800" b="1">
                 <a:solidFill>
                   <a:srgbClr val="D4AF5A"/>
                 </a:solidFill>
@@ -10442,88 +10468,13 @@
               <a:t>•   </a:t>
             </a:r>
             <a:r>
-              <a:rPr sz="1700">
+              <a:rPr sz="1800">
                 <a:solidFill>
                   <a:srgbClr val="F0F0F8"/>
                 </a:solidFill>
                 <a:latin typeface="Helvetica"/>
               </a:rPr>
-              <a:t>✓ Walk a member to their Member Card</a:t>
-            </a:r>
-          </a:p>
-          <a:p>
-            <a:pPr algn="l">
-              <a:spcAft>
-                <a:spcPts val="800"/>
-              </a:spcAft>
-            </a:pPr>
-            <a:r>
-              <a:rPr sz="1700" b="1">
-                <a:solidFill>
-                  <a:srgbClr val="D4AF5A"/>
-                </a:solidFill>
-                <a:latin typeface="Helvetica"/>
-              </a:rPr>
-              <a:t>•   </a:t>
-            </a:r>
-            <a:r>
-              <a:rPr sz="1700">
-                <a:solidFill>
-                  <a:srgbClr val="F0F0F8"/>
-                </a:solidFill>
-                <a:latin typeface="Helvetica"/>
-              </a:rPr>
-              <a:t>✓ Triage a missing-points complaint</a:t>
-            </a:r>
-          </a:p>
-          <a:p>
-            <a:pPr algn="l">
-              <a:spcAft>
-                <a:spcPts val="800"/>
-              </a:spcAft>
-            </a:pPr>
-            <a:r>
-              <a:rPr sz="1700" b="1">
-                <a:solidFill>
-                  <a:srgbClr val="D4AF5A"/>
-                </a:solidFill>
-                <a:latin typeface="Helvetica"/>
-              </a:rPr>
-              <a:t>•   </a:t>
-            </a:r>
-            <a:r>
-              <a:rPr sz="1700">
-                <a:solidFill>
-                  <a:srgbClr val="F0F0F8"/>
-                </a:solidFill>
-                <a:latin typeface="Helvetica"/>
-              </a:rPr>
-              <a:t>✓ Explain (don't fire) the SOS workflow</a:t>
-            </a:r>
-          </a:p>
-          <a:p>
-            <a:pPr algn="l">
-              <a:spcAft>
-                <a:spcPts val="800"/>
-              </a:spcAft>
-            </a:pPr>
-            <a:r>
-              <a:rPr sz="1700" b="1">
-                <a:solidFill>
-                  <a:srgbClr val="D4AF5A"/>
-                </a:solidFill>
-                <a:latin typeface="Helvetica"/>
-              </a:rPr>
-              <a:t>•   </a:t>
-            </a:r>
-            <a:r>
-              <a:rPr sz="1700">
-                <a:solidFill>
-                  <a:srgbClr val="F0F0F8"/>
-                </a:solidFill>
-                <a:latin typeface="Helvetica"/>
-              </a:rPr>
-              <a:t>✓ Identify when to escalate to manager / Luna Hub</a:t>
+              <a:t>DRILL 6 · Manager only: issue a Gift-Points override with a written reason</a:t>
             </a:r>
           </a:p>
         </p:txBody>
@@ -10593,7 +10544,7 @@
                 </a:solidFill>
                 <a:latin typeface="Helvetica"/>
               </a:rPr>
-              <a:t>Module 9 · Sign-off</a:t>
+              <a:t>Module 9 · Drills</a:t>
             </a:r>
           </a:p>
         </p:txBody>
@@ -10607,6 +10558,463 @@
 </file>
 
 <file path=ppt/slides/slide28.xml><?xml version="1.0" encoding="utf-8"?>
+<p:sld xmlns:a="http://schemas.openxmlformats.org/drawingml/2006/main" xmlns:p="http://schemas.openxmlformats.org/presentationml/2006/main" xmlns:r="http://schemas.openxmlformats.org/officeDocument/2006/relationships">
+  <p:cSld>
+    <p:bg>
+      <p:bgPr>
+        <a:solidFill>
+          <a:srgbClr val="08080E"/>
+        </a:solidFill>
+        <a:effectLst/>
+      </p:bgPr>
+    </p:bg>
+    <p:spTree>
+      <p:nvGrpSpPr>
+        <p:cNvPr id="1" name=""/>
+        <p:cNvGrpSpPr/>
+        <p:nvPr/>
+      </p:nvGrpSpPr>
+      <p:grpSpPr/>
+      <p:sp>
+        <p:nvSpPr>
+          <p:cNvPr id="2" name="TextBox 1"/>
+          <p:cNvSpPr txBox="1"/>
+          <p:nvPr/>
+        </p:nvSpPr>
+        <p:spPr>
+          <a:xfrm>
+            <a:off x="548640" y="457200"/>
+            <a:ext cx="10972800" cy="365760"/>
+          </a:xfrm>
+          <a:prstGeom prst="rect">
+            <a:avLst/>
+          </a:prstGeom>
+          <a:noFill/>
+        </p:spPr>
+        <p:txBody>
+          <a:bodyPr wrap="square" lIns="0" rIns="0" tIns="0" bIns="0">
+            <a:spAutoFit/>
+          </a:bodyPr>
+          <a:lstStyle/>
+          <a:p>
+            <a:pPr algn="l"/>
+            <a:r>
+              <a:rPr sz="1200" b="1">
+                <a:solidFill>
+                  <a:srgbClr val="D4AF5A"/>
+                </a:solidFill>
+                <a:latin typeface="Helvetica"/>
+              </a:rPr>
+              <a:t>MODULE 9</a:t>
+            </a:r>
+          </a:p>
+        </p:txBody>
+      </p:sp>
+      <p:sp>
+        <p:nvSpPr>
+          <p:cNvPr id="3" name="TextBox 2"/>
+          <p:cNvSpPr txBox="1"/>
+          <p:nvPr/>
+        </p:nvSpPr>
+        <p:spPr>
+          <a:xfrm>
+            <a:off x="548640" y="868680"/>
+            <a:ext cx="10972800" cy="914400"/>
+          </a:xfrm>
+          <a:prstGeom prst="rect">
+            <a:avLst/>
+          </a:prstGeom>
+          <a:noFill/>
+        </p:spPr>
+        <p:txBody>
+          <a:bodyPr wrap="square" lIns="0" rIns="0" tIns="0" bIns="0">
+            <a:spAutoFit/>
+          </a:bodyPr>
+          <a:lstStyle/>
+          <a:p>
+            <a:pPr algn="l"/>
+            <a:r>
+              <a:rPr sz="3200" b="1">
+                <a:solidFill>
+                  <a:srgbClr val="FFFFFF"/>
+                </a:solidFill>
+                <a:latin typeface="Helvetica"/>
+              </a:rPr>
+              <a:t>Sign-off — each trainee must demonstrate</a:t>
+            </a:r>
+          </a:p>
+        </p:txBody>
+      </p:sp>
+      <p:sp>
+        <p:nvSpPr>
+          <p:cNvPr id="4" name="Rectangle 3"/>
+          <p:cNvSpPr/>
+          <p:nvPr/>
+        </p:nvSpPr>
+        <p:spPr>
+          <a:xfrm>
+            <a:off x="548640" y="1691640"/>
+            <a:ext cx="914400" cy="45720"/>
+          </a:xfrm>
+          <a:prstGeom prst="rect">
+            <a:avLst/>
+          </a:prstGeom>
+          <a:solidFill>
+            <a:srgbClr val="D4AF5A"/>
+          </a:solidFill>
+          <a:ln>
+            <a:noFill/>
+          </a:ln>
+        </p:spPr>
+        <p:style>
+          <a:lnRef idx="1">
+            <a:schemeClr val="accent1"/>
+          </a:lnRef>
+          <a:fillRef idx="3">
+            <a:schemeClr val="accent1"/>
+          </a:fillRef>
+          <a:effectRef idx="2">
+            <a:schemeClr val="accent1"/>
+          </a:effectRef>
+          <a:fontRef idx="minor">
+            <a:schemeClr val="lt1"/>
+          </a:fontRef>
+        </p:style>
+        <p:txBody>
+          <a:bodyPr rtlCol="0" anchor="ctr"/>
+          <a:lstStyle/>
+          <a:p>
+            <a:pPr algn="ctr"/>
+          </a:p>
+        </p:txBody>
+      </p:sp>
+      <p:sp>
+        <p:nvSpPr>
+          <p:cNvPr id="5" name="TextBox 4"/>
+          <p:cNvSpPr txBox="1"/>
+          <p:nvPr/>
+        </p:nvSpPr>
+        <p:spPr>
+          <a:xfrm>
+            <a:off x="640080" y="2011680"/>
+            <a:ext cx="10972800" cy="4572000"/>
+          </a:xfrm>
+          <a:prstGeom prst="rect">
+            <a:avLst/>
+          </a:prstGeom>
+          <a:noFill/>
+        </p:spPr>
+        <p:txBody>
+          <a:bodyPr wrap="square">
+            <a:spAutoFit/>
+          </a:bodyPr>
+          <a:lstStyle/>
+          <a:p>
+            <a:pPr algn="l">
+              <a:spcAft>
+                <a:spcPts val="800"/>
+              </a:spcAft>
+            </a:pPr>
+            <a:r>
+              <a:rPr sz="1700" b="1">
+                <a:solidFill>
+                  <a:srgbClr val="D4AF5A"/>
+                </a:solidFill>
+                <a:latin typeface="Helvetica"/>
+              </a:rPr>
+              <a:t>•   </a:t>
+            </a:r>
+            <a:r>
+              <a:rPr sz="1700">
+                <a:solidFill>
+                  <a:srgbClr val="F0F0F8"/>
+                </a:solidFill>
+                <a:latin typeface="Helvetica"/>
+              </a:rPr>
+              <a:t>✓ Log in and select correct venue</a:t>
+            </a:r>
+          </a:p>
+          <a:p>
+            <a:pPr algn="l">
+              <a:spcAft>
+                <a:spcPts val="800"/>
+              </a:spcAft>
+            </a:pPr>
+            <a:r>
+              <a:rPr sz="1700" b="1">
+                <a:solidFill>
+                  <a:srgbClr val="D4AF5A"/>
+                </a:solidFill>
+                <a:latin typeface="Helvetica"/>
+              </a:rPr>
+              <a:t>•   </a:t>
+            </a:r>
+            <a:r>
+              <a:rPr sz="1700">
+                <a:solidFill>
+                  <a:srgbClr val="F0F0F8"/>
+                </a:solidFill>
+                <a:latin typeface="Helvetica"/>
+              </a:rPr>
+              <a:t>✓ Search by name · email · QR scan (all three)</a:t>
+            </a:r>
+          </a:p>
+          <a:p>
+            <a:pPr algn="l">
+              <a:spcAft>
+                <a:spcPts val="800"/>
+              </a:spcAft>
+            </a:pPr>
+            <a:r>
+              <a:rPr sz="1700" b="1">
+                <a:solidFill>
+                  <a:srgbClr val="D4AF5A"/>
+                </a:solidFill>
+                <a:latin typeface="Helvetica"/>
+              </a:rPr>
+              <a:t>•   </a:t>
+            </a:r>
+            <a:r>
+              <a:rPr sz="1700">
+                <a:solidFill>
+                  <a:srgbClr val="F0F0F8"/>
+                </a:solidFill>
+                <a:latin typeface="Helvetica"/>
+              </a:rPr>
+              <a:t>✓ Quick-award with category + receipt ref</a:t>
+            </a:r>
+          </a:p>
+          <a:p>
+            <a:pPr algn="l">
+              <a:spcAft>
+                <a:spcPts val="800"/>
+              </a:spcAft>
+            </a:pPr>
+            <a:r>
+              <a:rPr sz="1700" b="1">
+                <a:solidFill>
+                  <a:srgbClr val="D4AF5A"/>
+                </a:solidFill>
+                <a:latin typeface="Helvetica"/>
+              </a:rPr>
+              <a:t>•   </a:t>
+            </a:r>
+            <a:r>
+              <a:rPr sz="1700">
+                <a:solidFill>
+                  <a:srgbClr val="F0F0F8"/>
+                </a:solidFill>
+                <a:latin typeface="Helvetica"/>
+              </a:rPr>
+              <a:t>✓ Validate every QR type (MEMBER · ENT · TKT · DRINK · BDAY · generic)</a:t>
+            </a:r>
+          </a:p>
+          <a:p>
+            <a:pPr algn="l">
+              <a:spcAft>
+                <a:spcPts val="800"/>
+              </a:spcAft>
+            </a:pPr>
+            <a:r>
+              <a:rPr sz="1700" b="1">
+                <a:solidFill>
+                  <a:srgbClr val="D4AF5A"/>
+                </a:solidFill>
+                <a:latin typeface="Helvetica"/>
+              </a:rPr>
+              <a:t>•   </a:t>
+            </a:r>
+            <a:r>
+              <a:rPr sz="1700">
+                <a:solidFill>
+                  <a:srgbClr val="F0F0F8"/>
+                </a:solidFill>
+                <a:latin typeface="Helvetica"/>
+              </a:rPr>
+              <a:t>✓ Explain base tier vs subscription tier</a:t>
+            </a:r>
+          </a:p>
+          <a:p>
+            <a:pPr algn="l">
+              <a:spcAft>
+                <a:spcPts val="800"/>
+              </a:spcAft>
+            </a:pPr>
+            <a:r>
+              <a:rPr sz="1700" b="1">
+                <a:solidFill>
+                  <a:srgbClr val="D4AF5A"/>
+                </a:solidFill>
+                <a:latin typeface="Helvetica"/>
+              </a:rPr>
+              <a:t>•   </a:t>
+            </a:r>
+            <a:r>
+              <a:rPr sz="1700">
+                <a:solidFill>
+                  <a:srgbClr val="F0F0F8"/>
+                </a:solidFill>
+                <a:latin typeface="Helvetica"/>
+              </a:rPr>
+              <a:t>✓ Walk a member to their Member Card</a:t>
+            </a:r>
+          </a:p>
+          <a:p>
+            <a:pPr algn="l">
+              <a:spcAft>
+                <a:spcPts val="800"/>
+              </a:spcAft>
+            </a:pPr>
+            <a:r>
+              <a:rPr sz="1700" b="1">
+                <a:solidFill>
+                  <a:srgbClr val="D4AF5A"/>
+                </a:solidFill>
+                <a:latin typeface="Helvetica"/>
+              </a:rPr>
+              <a:t>•   </a:t>
+            </a:r>
+            <a:r>
+              <a:rPr sz="1700">
+                <a:solidFill>
+                  <a:srgbClr val="F0F0F8"/>
+                </a:solidFill>
+                <a:latin typeface="Helvetica"/>
+              </a:rPr>
+              <a:t>✓ Triage a missing-points complaint</a:t>
+            </a:r>
+          </a:p>
+          <a:p>
+            <a:pPr algn="l">
+              <a:spcAft>
+                <a:spcPts val="800"/>
+              </a:spcAft>
+            </a:pPr>
+            <a:r>
+              <a:rPr sz="1700" b="1">
+                <a:solidFill>
+                  <a:srgbClr val="D4AF5A"/>
+                </a:solidFill>
+                <a:latin typeface="Helvetica"/>
+              </a:rPr>
+              <a:t>•   </a:t>
+            </a:r>
+            <a:r>
+              <a:rPr sz="1700">
+                <a:solidFill>
+                  <a:srgbClr val="F0F0F8"/>
+                </a:solidFill>
+                <a:latin typeface="Helvetica"/>
+              </a:rPr>
+              <a:t>✓ Explain (don't fire) the SOS workflow</a:t>
+            </a:r>
+          </a:p>
+          <a:p>
+            <a:pPr algn="l">
+              <a:spcAft>
+                <a:spcPts val="800"/>
+              </a:spcAft>
+            </a:pPr>
+            <a:r>
+              <a:rPr sz="1700" b="1">
+                <a:solidFill>
+                  <a:srgbClr val="D4AF5A"/>
+                </a:solidFill>
+                <a:latin typeface="Helvetica"/>
+              </a:rPr>
+              <a:t>•   </a:t>
+            </a:r>
+            <a:r>
+              <a:rPr sz="1700">
+                <a:solidFill>
+                  <a:srgbClr val="F0F0F8"/>
+                </a:solidFill>
+                <a:latin typeface="Helvetica"/>
+              </a:rPr>
+              <a:t>✓ Identify when to escalate to manager / Luna Hub</a:t>
+            </a:r>
+          </a:p>
+        </p:txBody>
+      </p:sp>
+      <p:sp>
+        <p:nvSpPr>
+          <p:cNvPr id="6" name="TextBox 5"/>
+          <p:cNvSpPr txBox="1"/>
+          <p:nvPr/>
+        </p:nvSpPr>
+        <p:spPr>
+          <a:xfrm>
+            <a:off x="548640" y="6446520"/>
+            <a:ext cx="5486400" cy="274320"/>
+          </a:xfrm>
+          <a:prstGeom prst="rect">
+            <a:avLst/>
+          </a:prstGeom>
+          <a:noFill/>
+        </p:spPr>
+        <p:txBody>
+          <a:bodyPr wrap="square" lIns="0" rIns="0" tIns="0" bIns="0">
+            <a:spAutoFit/>
+          </a:bodyPr>
+          <a:lstStyle/>
+          <a:p>
+            <a:pPr algn="l"/>
+            <a:r>
+              <a:rPr sz="900" b="0">
+                <a:solidFill>
+                  <a:srgbClr val="9A95B0"/>
+                </a:solidFill>
+                <a:latin typeface="Helvetica"/>
+              </a:rPr>
+              <a:t>Luna Group VIP · Staff Training</a:t>
+            </a:r>
+          </a:p>
+        </p:txBody>
+      </p:sp>
+      <p:sp>
+        <p:nvSpPr>
+          <p:cNvPr id="7" name="TextBox 6"/>
+          <p:cNvSpPr txBox="1"/>
+          <p:nvPr/>
+        </p:nvSpPr>
+        <p:spPr>
+          <a:xfrm>
+            <a:off x="6858000" y="6446520"/>
+            <a:ext cx="4754880" cy="274320"/>
+          </a:xfrm>
+          <a:prstGeom prst="rect">
+            <a:avLst/>
+          </a:prstGeom>
+          <a:noFill/>
+        </p:spPr>
+        <p:txBody>
+          <a:bodyPr wrap="square" lIns="0" rIns="0" tIns="0" bIns="0">
+            <a:spAutoFit/>
+          </a:bodyPr>
+          <a:lstStyle/>
+          <a:p>
+            <a:pPr algn="r"/>
+            <a:r>
+              <a:rPr sz="900" b="0">
+                <a:solidFill>
+                  <a:srgbClr val="9A95B0"/>
+                </a:solidFill>
+                <a:latin typeface="Helvetica"/>
+              </a:rPr>
+              <a:t>Module 9 · Sign-off</a:t>
+            </a:r>
+          </a:p>
+        </p:txBody>
+      </p:sp>
+    </p:spTree>
+  </p:cSld>
+  <p:clrMapOvr>
+    <a:masterClrMapping/>
+  </p:clrMapOvr>
+</p:sld>
+</file>
+
+<file path=ppt/slides/slide29.xml><?xml version="1.0" encoding="utf-8"?>
 <p:sld xmlns:a="http://schemas.openxmlformats.org/drawingml/2006/main" xmlns:p="http://schemas.openxmlformats.org/presentationml/2006/main" xmlns:r="http://schemas.openxmlformats.org/officeDocument/2006/relationships">
   <p:cSld>
     <p:bg>

--- a/LUNA_STAFF_TRAINING_DECK.pptx
+++ b/LUNA_STAFF_TRAINING_DECK.pptx
@@ -34,6 +34,7 @@
     <p:sldId id="282" r:id="rId33"/>
     <p:sldId id="283" r:id="rId34"/>
     <p:sldId id="284" r:id="rId35"/>
+    <p:sldId id="285" r:id="rId36"/>
   </p:sldIdLst>
   <p:sldSz cx="12191695" cy="6858000" type="screen4x3"/>
   <p:notesSz cx="6858000" cy="9144000"/>
@@ -3337,7 +3338,7 @@
                 </a:solidFill>
                 <a:latin typeface="Helvetica"/>
               </a:rPr>
-              <a:t>v1.1 · Apr 2026</a:t>
+              <a:t>v1.2 · Apr 2026</a:t>
             </a:r>
           </a:p>
         </p:txBody>
@@ -4055,7 +4056,7 @@
                 </a:solidFill>
                 <a:latin typeface="Helvetica"/>
               </a:rPr>
-              <a:t>Award Points — 8 step flow</a:t>
+              <a:t>Award Points — only when SwiftPOS can't</a:t>
             </a:r>
           </a:p>
         </p:txBody>
@@ -4271,7 +4272,7 @@
                 </a:solidFill>
                 <a:latin typeface="Helvetica"/>
               </a:rPr>
-              <a:t>6. (Optional) Enter receipt reference for reconciliation</a:t>
+              <a:t>6. ALWAYS enter the receipt reference — anti-double-credit guard</a:t>
             </a:r>
           </a:p>
           <a:p>
@@ -4296,7 +4297,7 @@
                 </a:solidFill>
                 <a:latin typeface="Helvetica"/>
               </a:rPr>
-              <a:t>7. Tap Award Points</a:t>
+              <a:t>7. Tap Award Points  →  $1 = 10 pts × tier multiplier</a:t>
             </a:r>
           </a:p>
           <a:p>
@@ -4321,7 +4322,7 @@
                 </a:solidFill>
                 <a:latin typeface="Helvetica"/>
               </a:rPr>
-              <a:t>8. Read confirmation: points awarded, new balance, tier change</a:t>
+              <a:t>8. 409 "already awarded"?  →  it's already in SwiftPOS — leave it</a:t>
             </a:r>
           </a:p>
         </p:txBody>
@@ -4452,7 +4453,7 @@
                 </a:solidFill>
                 <a:latin typeface="Helvetica"/>
               </a:rPr>
-              <a:t>MODULE 4 · TAB 2</a:t>
+              <a:t>MODULE 4 · IMPORTANT</a:t>
             </a:r>
           </a:p>
         </p:txBody>
@@ -4487,7 +4488,7 @@
                 </a:solidFill>
                 <a:latin typeface="Helvetica"/>
               </a:rPr>
-              <a:t>Validate — door / bar / cashier</a:t>
+              <a:t>Quick Award is an EXCEPTION tool</a:t>
             </a:r>
           </a:p>
         </p:txBody>
@@ -4543,7 +4544,42 @@
         </p:nvSpPr>
         <p:spPr>
           <a:xfrm>
-            <a:off x="640080" y="2011680"/>
+            <a:off x="640080" y="1920240"/>
+            <a:ext cx="10972800" cy="457200"/>
+          </a:xfrm>
+          <a:prstGeom prst="rect">
+            <a:avLst/>
+          </a:prstGeom>
+          <a:noFill/>
+        </p:spPr>
+        <p:txBody>
+          <a:bodyPr wrap="square" lIns="0" rIns="0" tIns="0" bIns="0">
+            <a:spAutoFit/>
+          </a:bodyPr>
+          <a:lstStyle/>
+          <a:p>
+            <a:pPr algn="l"/>
+            <a:r>
+              <a:rPr sz="1500" b="1">
+                <a:solidFill>
+                  <a:srgbClr val="D4AF5A"/>
+                </a:solidFill>
+                <a:latin typeface="Helvetica"/>
+              </a:rPr>
+              <a:t>Use Quick Award only when SwiftPOS can't capture the sale.</a:t>
+            </a:r>
+          </a:p>
+        </p:txBody>
+      </p:sp>
+      <p:sp>
+        <p:nvSpPr>
+          <p:cNvPr id="6" name="TextBox 5"/>
+          <p:cNvSpPr txBox="1"/>
+          <p:nvPr/>
+        </p:nvSpPr>
+        <p:spPr>
+          <a:xfrm>
+            <a:off x="640080" y="2468880"/>
             <a:ext cx="10972800" cy="4572000"/>
           </a:xfrm>
           <a:prstGeom prst="rect">
@@ -4563,7 +4599,7 @@
               </a:spcAft>
             </a:pPr>
             <a:r>
-              <a:rPr sz="1800" b="1">
+              <a:rPr sz="1400" b="1">
                 <a:solidFill>
                   <a:srgbClr val="D4AF5A"/>
                 </a:solidFill>
@@ -4572,13 +4608,13 @@
               <a:t>•   </a:t>
             </a:r>
             <a:r>
-              <a:rPr sz="1800">
+              <a:rPr sz="1400">
                 <a:solidFill>
                   <a:srgbClr val="F0F0F8"/>
                 </a:solidFill>
                 <a:latin typeface="Helvetica"/>
               </a:rPr>
-              <a:t>Confirm venue selector</a:t>
+              <a:t>DO  →  Cash-only / pop-up / off-system events</a:t>
             </a:r>
           </a:p>
           <a:p>
@@ -4588,7 +4624,7 @@
               </a:spcAft>
             </a:pPr>
             <a:r>
-              <a:rPr sz="1800" b="1">
+              <a:rPr sz="1400" b="1">
                 <a:solidFill>
                   <a:srgbClr val="D4AF5A"/>
                 </a:solidFill>
@@ -4597,13 +4633,13 @@
               <a:t>•   </a:t>
             </a:r>
             <a:r>
-              <a:rPr sz="1800">
+              <a:rPr sz="1400">
                 <a:solidFill>
                   <a:srgbClr val="F0F0F8"/>
                 </a:solidFill>
                 <a:latin typeface="Helvetica"/>
               </a:rPr>
-              <a:t>Tap Scan QR  OR  paste the QR string into the input</a:t>
+              <a:t>DO  →  SwiftPOS outage / network down (note receipt, enter when back)</a:t>
             </a:r>
           </a:p>
           <a:p>
@@ -4613,7 +4649,7 @@
               </a:spcAft>
             </a:pPr>
             <a:r>
-              <a:rPr sz="1800" b="1">
+              <a:rPr sz="1400" b="1">
                 <a:solidFill>
                   <a:srgbClr val="D4AF5A"/>
                 </a:solidFill>
@@ -4622,13 +4658,13 @@
               <a:t>•   </a:t>
             </a:r>
             <a:r>
-              <a:rPr sz="1800">
+              <a:rPr sz="1400">
                 <a:solidFill>
                   <a:srgbClr val="F0F0F8"/>
                 </a:solidFill>
                 <a:latin typeface="Helvetica"/>
               </a:rPr>
-              <a:t>The portal auto-routes by prefix (next slide)</a:t>
+              <a:t>DO  →  Split bills — only for the portion that didn't go through POS</a:t>
             </a:r>
           </a:p>
           <a:p>
@@ -4638,7 +4674,7 @@
               </a:spcAft>
             </a:pPr>
             <a:r>
-              <a:rPr sz="1800" b="1">
+              <a:rPr sz="1400" b="1">
                 <a:solidFill>
                   <a:srgbClr val="D4AF5A"/>
                 </a:solidFill>
@@ -4647,13 +4683,13 @@
               <a:t>•   </a:t>
             </a:r>
             <a:r>
-              <a:rPr sz="1800">
+              <a:rPr sz="1400">
                 <a:solidFill>
                   <a:srgbClr val="F0F0F8"/>
                 </a:solidFill>
                 <a:latin typeface="Helvetica"/>
               </a:rPr>
-              <a:t>GREEN = success — proceed; reward is now consumed</a:t>
+              <a:t>DO  →  Manager Gift Points — comps, hospitality, artist drinks</a:t>
             </a:r>
           </a:p>
           <a:p>
@@ -4663,7 +4699,7 @@
               </a:spcAft>
             </a:pPr>
             <a:r>
-              <a:rPr sz="1800" b="1">
+              <a:rPr sz="1400" b="1">
                 <a:solidFill>
                   <a:srgbClr val="D4AF5A"/>
                 </a:solidFill>
@@ -4672,13 +4708,13 @@
               <a:t>•   </a:t>
             </a:r>
             <a:r>
-              <a:rPr sz="1800">
+              <a:rPr sz="1400">
                 <a:solidFill>
                   <a:srgbClr val="F0F0F8"/>
                 </a:solidFill>
                 <a:latin typeface="Helvetica"/>
               </a:rPr>
-              <a:t>RED = failure — read the message (expired / wrong venue / used)</a:t>
+              <a:t/>
             </a:r>
           </a:p>
           <a:p>
@@ -4688,7 +4724,7 @@
               </a:spcAft>
             </a:pPr>
             <a:r>
-              <a:rPr sz="1800" b="1">
+              <a:rPr sz="1400" b="1">
                 <a:solidFill>
                   <a:srgbClr val="D4AF5A"/>
                 </a:solidFill>
@@ -4697,13 +4733,13 @@
               <a:t>•   </a:t>
             </a:r>
             <a:r>
-              <a:rPr sz="1800">
+              <a:rPr sz="1400">
                 <a:solidFill>
                   <a:srgbClr val="F0F0F8"/>
                 </a:solidFill>
                 <a:latin typeface="Helvetica"/>
               </a:rPr>
-              <a:t>NEVER strip the LUNA- prefix</a:t>
+              <a:t>DO NOT  →  Sale that already went through SwiftPOS (= double credit)</a:t>
             </a:r>
           </a:p>
           <a:p>
@@ -4713,7 +4749,7 @@
               </a:spcAft>
             </a:pPr>
             <a:r>
-              <a:rPr sz="1800" b="1">
+              <a:rPr sz="1400" b="1">
                 <a:solidFill>
                   <a:srgbClr val="D4AF5A"/>
                 </a:solidFill>
@@ -4722,20 +4758,95 @@
               <a:t>•   </a:t>
             </a:r>
             <a:r>
-              <a:rPr sz="1800">
+              <a:rPr sz="1400">
                 <a:solidFill>
                   <a:srgbClr val="F0F0F8"/>
                 </a:solidFill>
                 <a:latin typeface="Helvetica"/>
               </a:rPr>
-              <a:t>If a refusal needs reversing AFTER green: manager only</a:t>
-            </a:r>
-          </a:p>
-        </p:txBody>
-      </p:sp>
-      <p:sp>
-        <p:nvSpPr>
-          <p:cNvPr id="6" name="TextBox 5"/>
+              <a:t>DO NOT  →  Member 'forgot to give number' on a SwiftPOS docket</a:t>
+            </a:r>
+          </a:p>
+          <a:p>
+            <a:pPr algn="l">
+              <a:spcAft>
+                <a:spcPts val="800"/>
+              </a:spcAft>
+            </a:pPr>
+            <a:r>
+              <a:rPr sz="1400" b="1">
+                <a:solidFill>
+                  <a:srgbClr val="D4AF5A"/>
+                </a:solidFill>
+                <a:latin typeface="Helvetica"/>
+              </a:rPr>
+              <a:t>•   </a:t>
+            </a:r>
+            <a:r>
+              <a:rPr sz="1400">
+                <a:solidFill>
+                  <a:srgbClr val="F0F0F8"/>
+                </a:solidFill>
+                <a:latin typeface="Helvetica"/>
+              </a:rPr>
+              <a:t>             (manager attaches member to existing receipt instead)</a:t>
+            </a:r>
+          </a:p>
+          <a:p>
+            <a:pPr algn="l">
+              <a:spcAft>
+                <a:spcPts val="800"/>
+              </a:spcAft>
+            </a:pPr>
+            <a:r>
+              <a:rPr sz="1400" b="1">
+                <a:solidFill>
+                  <a:srgbClr val="D4AF5A"/>
+                </a:solidFill>
+                <a:latin typeface="Helvetica"/>
+              </a:rPr>
+              <a:t>•   </a:t>
+            </a:r>
+            <a:r>
+              <a:rPr sz="1400">
+                <a:solidFill>
+                  <a:srgbClr val="F0F0F8"/>
+                </a:solidFill>
+                <a:latin typeface="Helvetica"/>
+              </a:rPr>
+              <a:t/>
+            </a:r>
+          </a:p>
+          <a:p>
+            <a:pPr algn="l">
+              <a:spcAft>
+                <a:spcPts val="800"/>
+              </a:spcAft>
+            </a:pPr>
+            <a:r>
+              <a:rPr sz="1400" b="1">
+                <a:solidFill>
+                  <a:srgbClr val="D4AF5A"/>
+                </a:solidFill>
+                <a:latin typeface="Helvetica"/>
+              </a:rPr>
+              <a:t>•   </a:t>
+            </a:r>
+            <a:r>
+              <a:rPr sz="1400">
+                <a:solidFill>
+                  <a:srgbClr val="F0F0F8"/>
+                </a:solidFill>
+                <a:latin typeface="Helvetica"/>
+              </a:rPr>
+              <a:t>Receipt-ref guard returns 409 if the same receipt is awarded twice.</a:t>
+            </a:r>
+          </a:p>
+        </p:txBody>
+      </p:sp>
+      <p:sp>
+        <p:nvSpPr>
+          <p:cNvPr id="7" name="TextBox 6"/>
           <p:cNvSpPr txBox="1"/>
           <p:nvPr/>
         </p:nvSpPr>
@@ -4770,7 +4881,7 @@
       </p:sp>
       <p:sp>
         <p:nvSpPr>
-          <p:cNvPr id="7" name="TextBox 6"/>
+          <p:cNvPr id="8" name="TextBox 7"/>
           <p:cNvSpPr txBox="1"/>
           <p:nvPr/>
         </p:nvSpPr>
@@ -4798,7 +4909,7 @@
                 </a:solidFill>
                 <a:latin typeface="Helvetica"/>
               </a:rPr>
-              <a:t>Module 4 · Validate</a:t>
+              <a:t>Module 4 · Quick-Award rules</a:t>
             </a:r>
           </a:p>
         </p:txBody>
@@ -4859,7 +4970,7 @@
                 </a:solidFill>
                 <a:latin typeface="Helvetica"/>
               </a:rPr>
-              <a:t>MODULE 4 · TAB 3</a:t>
+              <a:t>MODULE 4 · TAB 2</a:t>
             </a:r>
           </a:p>
         </p:txBody>
@@ -4894,7 +5005,7 @@
                 </a:solidFill>
                 <a:latin typeface="Helvetica"/>
               </a:rPr>
-              <a:t>History — your audit trail</a:t>
+              <a:t>Validate — door / bar / cashier</a:t>
             </a:r>
           </a:p>
         </p:txBody>
@@ -4985,7 +5096,7 @@
                 </a:solidFill>
                 <a:latin typeface="Helvetica"/>
               </a:rPr>
-              <a:t>Filter: today · 7-day · 30-day · per-venue</a:t>
+              <a:t>Confirm venue selector</a:t>
             </a:r>
           </a:p>
           <a:p>
@@ -5010,7 +5121,7 @@
                 </a:solidFill>
                 <a:latin typeface="Helvetica"/>
               </a:rPr>
-              <a:t>Lists every Award + every Validate by you and your team</a:t>
+              <a:t>Tap Scan QR  OR  paste the QR string into the input</a:t>
             </a:r>
           </a:p>
           <a:p>
@@ -5035,7 +5146,7 @@
                 </a:solidFill>
                 <a:latin typeface="Helvetica"/>
               </a:rPr>
-              <a:t>Use this FIRST to investigate any 'missing points' dispute</a:t>
+              <a:t>The portal auto-routes by prefix (next slide)</a:t>
             </a:r>
           </a:p>
           <a:p>
@@ -5060,7 +5171,7 @@
                 </a:solidFill>
                 <a:latin typeface="Helvetica"/>
               </a:rPr>
-              <a:t>Tap a row to see receipt reference, amount, member, timestamp</a:t>
+              <a:t>GREEN = success — proceed; reward is now consumed</a:t>
             </a:r>
           </a:p>
           <a:p>
@@ -5085,7 +5196,57 @@
                 </a:solidFill>
                 <a:latin typeface="Helvetica"/>
               </a:rPr>
-              <a:t>Manager Gift-Points are flagged in red — bypass the earn-guard</a:t>
+              <a:t>RED = failure — read the message (expired / wrong venue / used)</a:t>
+            </a:r>
+          </a:p>
+          <a:p>
+            <a:pPr algn="l">
+              <a:spcAft>
+                <a:spcPts val="800"/>
+              </a:spcAft>
+            </a:pPr>
+            <a:r>
+              <a:rPr sz="1800" b="1">
+                <a:solidFill>
+                  <a:srgbClr val="D4AF5A"/>
+                </a:solidFill>
+                <a:latin typeface="Helvetica"/>
+              </a:rPr>
+              <a:t>•   </a:t>
+            </a:r>
+            <a:r>
+              <a:rPr sz="1800">
+                <a:solidFill>
+                  <a:srgbClr val="F0F0F8"/>
+                </a:solidFill>
+                <a:latin typeface="Helvetica"/>
+              </a:rPr>
+              <a:t>NEVER strip the LUNA- prefix</a:t>
+            </a:r>
+          </a:p>
+          <a:p>
+            <a:pPr algn="l">
+              <a:spcAft>
+                <a:spcPts val="800"/>
+              </a:spcAft>
+            </a:pPr>
+            <a:r>
+              <a:rPr sz="1800" b="1">
+                <a:solidFill>
+                  <a:srgbClr val="D4AF5A"/>
+                </a:solidFill>
+                <a:latin typeface="Helvetica"/>
+              </a:rPr>
+              <a:t>•   </a:t>
+            </a:r>
+            <a:r>
+              <a:rPr sz="1800">
+                <a:solidFill>
+                  <a:srgbClr val="F0F0F8"/>
+                </a:solidFill>
+                <a:latin typeface="Helvetica"/>
+              </a:rPr>
+              <a:t>If a refusal needs reversing AFTER green: manager only</a:t>
             </a:r>
           </a:p>
         </p:txBody>
@@ -5155,7 +5316,7 @@
                 </a:solidFill>
                 <a:latin typeface="Helvetica"/>
               </a:rPr>
-              <a:t>Module 4 · History</a:t>
+              <a:t>Module 4 · Validate</a:t>
             </a:r>
           </a:p>
         </p:txBody>
@@ -5169,6 +5330,363 @@
 </file>
 
 <file path=ppt/slides/slide15.xml><?xml version="1.0" encoding="utf-8"?>
+<p:sld xmlns:a="http://schemas.openxmlformats.org/drawingml/2006/main" xmlns:p="http://schemas.openxmlformats.org/presentationml/2006/main" xmlns:r="http://schemas.openxmlformats.org/officeDocument/2006/relationships">
+  <p:cSld>
+    <p:bg>
+      <p:bgPr>
+        <a:solidFill>
+          <a:srgbClr val="08080E"/>
+        </a:solidFill>
+        <a:effectLst/>
+      </p:bgPr>
+    </p:bg>
+    <p:spTree>
+      <p:nvGrpSpPr>
+        <p:cNvPr id="1" name=""/>
+        <p:cNvGrpSpPr/>
+        <p:nvPr/>
+      </p:nvGrpSpPr>
+      <p:grpSpPr/>
+      <p:sp>
+        <p:nvSpPr>
+          <p:cNvPr id="2" name="TextBox 1"/>
+          <p:cNvSpPr txBox="1"/>
+          <p:nvPr/>
+        </p:nvSpPr>
+        <p:spPr>
+          <a:xfrm>
+            <a:off x="548640" y="457200"/>
+            <a:ext cx="10972800" cy="365760"/>
+          </a:xfrm>
+          <a:prstGeom prst="rect">
+            <a:avLst/>
+          </a:prstGeom>
+          <a:noFill/>
+        </p:spPr>
+        <p:txBody>
+          <a:bodyPr wrap="square" lIns="0" rIns="0" tIns="0" bIns="0">
+            <a:spAutoFit/>
+          </a:bodyPr>
+          <a:lstStyle/>
+          <a:p>
+            <a:pPr algn="l"/>
+            <a:r>
+              <a:rPr sz="1200" b="1">
+                <a:solidFill>
+                  <a:srgbClr val="D4AF5A"/>
+                </a:solidFill>
+                <a:latin typeface="Helvetica"/>
+              </a:rPr>
+              <a:t>MODULE 4 · TAB 3</a:t>
+            </a:r>
+          </a:p>
+        </p:txBody>
+      </p:sp>
+      <p:sp>
+        <p:nvSpPr>
+          <p:cNvPr id="3" name="TextBox 2"/>
+          <p:cNvSpPr txBox="1"/>
+          <p:nvPr/>
+        </p:nvSpPr>
+        <p:spPr>
+          <a:xfrm>
+            <a:off x="548640" y="868680"/>
+            <a:ext cx="10972800" cy="914400"/>
+          </a:xfrm>
+          <a:prstGeom prst="rect">
+            <a:avLst/>
+          </a:prstGeom>
+          <a:noFill/>
+        </p:spPr>
+        <p:txBody>
+          <a:bodyPr wrap="square" lIns="0" rIns="0" tIns="0" bIns="0">
+            <a:spAutoFit/>
+          </a:bodyPr>
+          <a:lstStyle/>
+          <a:p>
+            <a:pPr algn="l"/>
+            <a:r>
+              <a:rPr sz="3200" b="1">
+                <a:solidFill>
+                  <a:srgbClr val="FFFFFF"/>
+                </a:solidFill>
+                <a:latin typeface="Helvetica"/>
+              </a:rPr>
+              <a:t>History — your audit trail</a:t>
+            </a:r>
+          </a:p>
+        </p:txBody>
+      </p:sp>
+      <p:sp>
+        <p:nvSpPr>
+          <p:cNvPr id="4" name="Rectangle 3"/>
+          <p:cNvSpPr/>
+          <p:nvPr/>
+        </p:nvSpPr>
+        <p:spPr>
+          <a:xfrm>
+            <a:off x="548640" y="1691640"/>
+            <a:ext cx="914400" cy="45720"/>
+          </a:xfrm>
+          <a:prstGeom prst="rect">
+            <a:avLst/>
+          </a:prstGeom>
+          <a:solidFill>
+            <a:srgbClr val="D4AF5A"/>
+          </a:solidFill>
+          <a:ln>
+            <a:noFill/>
+          </a:ln>
+        </p:spPr>
+        <p:style>
+          <a:lnRef idx="1">
+            <a:schemeClr val="accent1"/>
+          </a:lnRef>
+          <a:fillRef idx="3">
+            <a:schemeClr val="accent1"/>
+          </a:fillRef>
+          <a:effectRef idx="2">
+            <a:schemeClr val="accent1"/>
+          </a:effectRef>
+          <a:fontRef idx="minor">
+            <a:schemeClr val="lt1"/>
+          </a:fontRef>
+        </p:style>
+        <p:txBody>
+          <a:bodyPr rtlCol="0" anchor="ctr"/>
+          <a:lstStyle/>
+          <a:p>
+            <a:pPr algn="ctr"/>
+          </a:p>
+        </p:txBody>
+      </p:sp>
+      <p:sp>
+        <p:nvSpPr>
+          <p:cNvPr id="5" name="TextBox 4"/>
+          <p:cNvSpPr txBox="1"/>
+          <p:nvPr/>
+        </p:nvSpPr>
+        <p:spPr>
+          <a:xfrm>
+            <a:off x="640080" y="2011680"/>
+            <a:ext cx="10972800" cy="4572000"/>
+          </a:xfrm>
+          <a:prstGeom prst="rect">
+            <a:avLst/>
+          </a:prstGeom>
+          <a:noFill/>
+        </p:spPr>
+        <p:txBody>
+          <a:bodyPr wrap="square">
+            <a:spAutoFit/>
+          </a:bodyPr>
+          <a:lstStyle/>
+          <a:p>
+            <a:pPr algn="l">
+              <a:spcAft>
+                <a:spcPts val="800"/>
+              </a:spcAft>
+            </a:pPr>
+            <a:r>
+              <a:rPr sz="1800" b="1">
+                <a:solidFill>
+                  <a:srgbClr val="D4AF5A"/>
+                </a:solidFill>
+                <a:latin typeface="Helvetica"/>
+              </a:rPr>
+              <a:t>•   </a:t>
+            </a:r>
+            <a:r>
+              <a:rPr sz="1800">
+                <a:solidFill>
+                  <a:srgbClr val="F0F0F8"/>
+                </a:solidFill>
+                <a:latin typeface="Helvetica"/>
+              </a:rPr>
+              <a:t>Filter: today · 7-day · 30-day · per-venue</a:t>
+            </a:r>
+          </a:p>
+          <a:p>
+            <a:pPr algn="l">
+              <a:spcAft>
+                <a:spcPts val="800"/>
+              </a:spcAft>
+            </a:pPr>
+            <a:r>
+              <a:rPr sz="1800" b="1">
+                <a:solidFill>
+                  <a:srgbClr val="D4AF5A"/>
+                </a:solidFill>
+                <a:latin typeface="Helvetica"/>
+              </a:rPr>
+              <a:t>•   </a:t>
+            </a:r>
+            <a:r>
+              <a:rPr sz="1800">
+                <a:solidFill>
+                  <a:srgbClr val="F0F0F8"/>
+                </a:solidFill>
+                <a:latin typeface="Helvetica"/>
+              </a:rPr>
+              <a:t>Lists every Award + every Validate by you and your team</a:t>
+            </a:r>
+          </a:p>
+          <a:p>
+            <a:pPr algn="l">
+              <a:spcAft>
+                <a:spcPts val="800"/>
+              </a:spcAft>
+            </a:pPr>
+            <a:r>
+              <a:rPr sz="1800" b="1">
+                <a:solidFill>
+                  <a:srgbClr val="D4AF5A"/>
+                </a:solidFill>
+                <a:latin typeface="Helvetica"/>
+              </a:rPr>
+              <a:t>•   </a:t>
+            </a:r>
+            <a:r>
+              <a:rPr sz="1800">
+                <a:solidFill>
+                  <a:srgbClr val="F0F0F8"/>
+                </a:solidFill>
+                <a:latin typeface="Helvetica"/>
+              </a:rPr>
+              <a:t>Use this FIRST to investigate any 'missing points' dispute</a:t>
+            </a:r>
+          </a:p>
+          <a:p>
+            <a:pPr algn="l">
+              <a:spcAft>
+                <a:spcPts val="800"/>
+              </a:spcAft>
+            </a:pPr>
+            <a:r>
+              <a:rPr sz="1800" b="1">
+                <a:solidFill>
+                  <a:srgbClr val="D4AF5A"/>
+                </a:solidFill>
+                <a:latin typeface="Helvetica"/>
+              </a:rPr>
+              <a:t>•   </a:t>
+            </a:r>
+            <a:r>
+              <a:rPr sz="1800">
+                <a:solidFill>
+                  <a:srgbClr val="F0F0F8"/>
+                </a:solidFill>
+                <a:latin typeface="Helvetica"/>
+              </a:rPr>
+              <a:t>Tap a row to see receipt reference, amount, member, timestamp</a:t>
+            </a:r>
+          </a:p>
+          <a:p>
+            <a:pPr algn="l">
+              <a:spcAft>
+                <a:spcPts val="800"/>
+              </a:spcAft>
+            </a:pPr>
+            <a:r>
+              <a:rPr sz="1800" b="1">
+                <a:solidFill>
+                  <a:srgbClr val="D4AF5A"/>
+                </a:solidFill>
+                <a:latin typeface="Helvetica"/>
+              </a:rPr>
+              <a:t>•   </a:t>
+            </a:r>
+            <a:r>
+              <a:rPr sz="1800">
+                <a:solidFill>
+                  <a:srgbClr val="F0F0F8"/>
+                </a:solidFill>
+                <a:latin typeface="Helvetica"/>
+              </a:rPr>
+              <a:t>Manager Gift-Points are flagged in red — bypass the earn-guard</a:t>
+            </a:r>
+          </a:p>
+        </p:txBody>
+      </p:sp>
+      <p:sp>
+        <p:nvSpPr>
+          <p:cNvPr id="6" name="TextBox 5"/>
+          <p:cNvSpPr txBox="1"/>
+          <p:nvPr/>
+        </p:nvSpPr>
+        <p:spPr>
+          <a:xfrm>
+            <a:off x="548640" y="6446520"/>
+            <a:ext cx="5486400" cy="274320"/>
+          </a:xfrm>
+          <a:prstGeom prst="rect">
+            <a:avLst/>
+          </a:prstGeom>
+          <a:noFill/>
+        </p:spPr>
+        <p:txBody>
+          <a:bodyPr wrap="square" lIns="0" rIns="0" tIns="0" bIns="0">
+            <a:spAutoFit/>
+          </a:bodyPr>
+          <a:lstStyle/>
+          <a:p>
+            <a:pPr algn="l"/>
+            <a:r>
+              <a:rPr sz="900" b="0">
+                <a:solidFill>
+                  <a:srgbClr val="9A95B0"/>
+                </a:solidFill>
+                <a:latin typeface="Helvetica"/>
+              </a:rPr>
+              <a:t>Luna Group VIP · Staff Training</a:t>
+            </a:r>
+          </a:p>
+        </p:txBody>
+      </p:sp>
+      <p:sp>
+        <p:nvSpPr>
+          <p:cNvPr id="7" name="TextBox 6"/>
+          <p:cNvSpPr txBox="1"/>
+          <p:nvPr/>
+        </p:nvSpPr>
+        <p:spPr>
+          <a:xfrm>
+            <a:off x="6858000" y="6446520"/>
+            <a:ext cx="4754880" cy="274320"/>
+          </a:xfrm>
+          <a:prstGeom prst="rect">
+            <a:avLst/>
+          </a:prstGeom>
+          <a:noFill/>
+        </p:spPr>
+        <p:txBody>
+          <a:bodyPr wrap="square" lIns="0" rIns="0" tIns="0" bIns="0">
+            <a:spAutoFit/>
+          </a:bodyPr>
+          <a:lstStyle/>
+          <a:p>
+            <a:pPr algn="r"/>
+            <a:r>
+              <a:rPr sz="900" b="0">
+                <a:solidFill>
+                  <a:srgbClr val="9A95B0"/>
+                </a:solidFill>
+                <a:latin typeface="Helvetica"/>
+              </a:rPr>
+              <a:t>Module 4 · History</a:t>
+            </a:r>
+          </a:p>
+        </p:txBody>
+      </p:sp>
+    </p:spTree>
+  </p:cSld>
+  <p:clrMapOvr>
+    <a:masterClrMapping/>
+  </p:clrMapOvr>
+</p:sld>
+</file>
+
+<file path=ppt/slides/slide16.xml><?xml version="1.0" encoding="utf-8"?>
 <p:sld xmlns:a="http://schemas.openxmlformats.org/drawingml/2006/main" xmlns:p="http://schemas.openxmlformats.org/presentationml/2006/main" xmlns:r="http://schemas.openxmlformats.org/officeDocument/2006/relationships">
   <p:cSld>
     <p:bg>
@@ -5307,7 +5825,7 @@
 </p:sld>
 </file>
 
-<file path=ppt/slides/slide16.xml><?xml version="1.0" encoding="utf-8"?>
+<file path=ppt/slides/slide17.xml><?xml version="1.0" encoding="utf-8"?>
 <p:sld xmlns:a="http://schemas.openxmlformats.org/drawingml/2006/main" xmlns:p="http://schemas.openxmlformats.org/presentationml/2006/main" xmlns:r="http://schemas.openxmlformats.org/officeDocument/2006/relationships">
   <p:cSld>
     <p:bg>
@@ -6075,7 +6593,7 @@
 </p:sld>
 </file>
 
-<file path=ppt/slides/slide17.xml><?xml version="1.0" encoding="utf-8"?>
+<file path=ppt/slides/slide18.xml><?xml version="1.0" encoding="utf-8"?>
 <p:sld xmlns:a="http://schemas.openxmlformats.org/drawingml/2006/main" xmlns:p="http://schemas.openxmlformats.org/presentationml/2006/main" xmlns:r="http://schemas.openxmlformats.org/officeDocument/2006/relationships">
   <p:cSld>
     <p:bg>
@@ -6214,7 +6732,7 @@
 </p:sld>
 </file>
 
-<file path=ppt/slides/slide18.xml><?xml version="1.0" encoding="utf-8"?>
+<file path=ppt/slides/slide19.xml><?xml version="1.0" encoding="utf-8"?>
 <p:sld xmlns:a="http://schemas.openxmlformats.org/drawingml/2006/main" xmlns:p="http://schemas.openxmlformats.org/presentationml/2006/main" xmlns:r="http://schemas.openxmlformats.org/officeDocument/2006/relationships">
   <p:cSld>
     <p:bg>
@@ -6901,438 +7419,6 @@
 </p:sld>
 </file>
 
-<file path=ppt/slides/slide19.xml><?xml version="1.0" encoding="utf-8"?>
-<p:sld xmlns:a="http://schemas.openxmlformats.org/drawingml/2006/main" xmlns:p="http://schemas.openxmlformats.org/presentationml/2006/main" xmlns:r="http://schemas.openxmlformats.org/officeDocument/2006/relationships">
-  <p:cSld>
-    <p:bg>
-      <p:bgPr>
-        <a:solidFill>
-          <a:srgbClr val="08080E"/>
-        </a:solidFill>
-        <a:effectLst/>
-      </p:bgPr>
-    </p:bg>
-    <p:spTree>
-      <p:nvGrpSpPr>
-        <p:cNvPr id="1" name=""/>
-        <p:cNvGrpSpPr/>
-        <p:nvPr/>
-      </p:nvGrpSpPr>
-      <p:grpSpPr/>
-      <p:sp>
-        <p:nvSpPr>
-          <p:cNvPr id="2" name="TextBox 1"/>
-          <p:cNvSpPr txBox="1"/>
-          <p:nvPr/>
-        </p:nvSpPr>
-        <p:spPr>
-          <a:xfrm>
-            <a:off x="548640" y="457200"/>
-            <a:ext cx="10972800" cy="365760"/>
-          </a:xfrm>
-          <a:prstGeom prst="rect">
-            <a:avLst/>
-          </a:prstGeom>
-          <a:noFill/>
-        </p:spPr>
-        <p:txBody>
-          <a:bodyPr wrap="square" lIns="0" rIns="0" tIns="0" bIns="0">
-            <a:spAutoFit/>
-          </a:bodyPr>
-          <a:lstStyle/>
-          <a:p>
-            <a:pPr algn="l"/>
-            <a:r>
-              <a:rPr sz="1200" b="1">
-                <a:solidFill>
-                  <a:srgbClr val="D4AF5A"/>
-                </a:solidFill>
-                <a:latin typeface="Helvetica"/>
-              </a:rPr>
-              <a:t>MODULE 6</a:t>
-            </a:r>
-          </a:p>
-        </p:txBody>
-      </p:sp>
-      <p:sp>
-        <p:nvSpPr>
-          <p:cNvPr id="3" name="TextBox 2"/>
-          <p:cNvSpPr txBox="1"/>
-          <p:nvPr/>
-        </p:nvSpPr>
-        <p:spPr>
-          <a:xfrm>
-            <a:off x="548640" y="868680"/>
-            <a:ext cx="10972800" cy="914400"/>
-          </a:xfrm>
-          <a:prstGeom prst="rect">
-            <a:avLst/>
-          </a:prstGeom>
-          <a:noFill/>
-        </p:spPr>
-        <p:txBody>
-          <a:bodyPr wrap="square" lIns="0" rIns="0" tIns="0" bIns="0">
-            <a:spAutoFit/>
-          </a:bodyPr>
-          <a:lstStyle/>
-          <a:p>
-            <a:pPr algn="l"/>
-            <a:r>
-              <a:rPr sz="3200" b="1">
-                <a:solidFill>
-                  <a:srgbClr val="FFFFFF"/>
-                </a:solidFill>
-                <a:latin typeface="Helvetica"/>
-              </a:rPr>
-              <a:t>Paid Subscriptions — Stripe</a:t>
-            </a:r>
-          </a:p>
-        </p:txBody>
-      </p:sp>
-      <p:sp>
-        <p:nvSpPr>
-          <p:cNvPr id="4" name="Rectangle 3"/>
-          <p:cNvSpPr/>
-          <p:nvPr/>
-        </p:nvSpPr>
-        <p:spPr>
-          <a:xfrm>
-            <a:off x="548640" y="1691640"/>
-            <a:ext cx="914400" cy="45720"/>
-          </a:xfrm>
-          <a:prstGeom prst="rect">
-            <a:avLst/>
-          </a:prstGeom>
-          <a:solidFill>
-            <a:srgbClr val="D4AF5A"/>
-          </a:solidFill>
-          <a:ln>
-            <a:noFill/>
-          </a:ln>
-        </p:spPr>
-        <p:style>
-          <a:lnRef idx="1">
-            <a:schemeClr val="accent1"/>
-          </a:lnRef>
-          <a:fillRef idx="3">
-            <a:schemeClr val="accent1"/>
-          </a:fillRef>
-          <a:effectRef idx="2">
-            <a:schemeClr val="accent1"/>
-          </a:effectRef>
-          <a:fontRef idx="minor">
-            <a:schemeClr val="lt1"/>
-          </a:fontRef>
-        </p:style>
-        <p:txBody>
-          <a:bodyPr rtlCol="0" anchor="ctr"/>
-          <a:lstStyle/>
-          <a:p>
-            <a:pPr algn="ctr"/>
-          </a:p>
-        </p:txBody>
-      </p:sp>
-      <p:sp>
-        <p:nvSpPr>
-          <p:cNvPr id="5" name="TextBox 4"/>
-          <p:cNvSpPr txBox="1"/>
-          <p:nvPr/>
-        </p:nvSpPr>
-        <p:spPr>
-          <a:xfrm>
-            <a:off x="640080" y="2011680"/>
-            <a:ext cx="10972800" cy="4572000"/>
-          </a:xfrm>
-          <a:prstGeom prst="rect">
-            <a:avLst/>
-          </a:prstGeom>
-          <a:noFill/>
-        </p:spPr>
-        <p:txBody>
-          <a:bodyPr wrap="square">
-            <a:spAutoFit/>
-          </a:bodyPr>
-          <a:lstStyle/>
-          <a:p>
-            <a:pPr algn="l">
-              <a:spcAft>
-                <a:spcPts val="800"/>
-              </a:spcAft>
-            </a:pPr>
-            <a:r>
-              <a:rPr sz="1800" b="1">
-                <a:solidFill>
-                  <a:srgbClr val="D4AF5A"/>
-                </a:solidFill>
-                <a:latin typeface="Helvetica"/>
-              </a:rPr>
-              <a:t>•   </a:t>
-            </a:r>
-            <a:r>
-              <a:rPr sz="1800">
-                <a:solidFill>
-                  <a:srgbClr val="F0F0F8"/>
-                </a:solidFill>
-                <a:latin typeface="Helvetica"/>
-              </a:rPr>
-              <a:t>Aurora  —  bonus points multiplier · early access</a:t>
-            </a:r>
-          </a:p>
-          <a:p>
-            <a:pPr algn="l">
-              <a:spcAft>
-                <a:spcPts val="800"/>
-              </a:spcAft>
-            </a:pPr>
-            <a:r>
-              <a:rPr sz="1800" b="1">
-                <a:solidFill>
-                  <a:srgbClr val="D4AF5A"/>
-                </a:solidFill>
-                <a:latin typeface="Helvetica"/>
-              </a:rPr>
-              <a:t>•   </a:t>
-            </a:r>
-            <a:r>
-              <a:rPr sz="1800">
-                <a:solidFill>
-                  <a:srgbClr val="F0F0F8"/>
-                </a:solidFill>
-                <a:latin typeface="Helvetica"/>
-              </a:rPr>
-              <a:t>Lunar   —  monthly free entries (LUNA-ENT-) · monthly drink · priority bookings</a:t>
-            </a:r>
-          </a:p>
-          <a:p>
-            <a:pPr algn="l">
-              <a:spcAft>
-                <a:spcPts val="800"/>
-              </a:spcAft>
-            </a:pPr>
-            <a:r>
-              <a:rPr sz="1800" b="1">
-                <a:solidFill>
-                  <a:srgbClr val="D4AF5A"/>
-                </a:solidFill>
-                <a:latin typeface="Helvetica"/>
-              </a:rPr>
-              <a:t>•   </a:t>
-            </a:r>
-            <a:r>
-              <a:rPr sz="1800">
-                <a:solidFill>
-                  <a:srgbClr val="F0F0F8"/>
-                </a:solidFill>
-                <a:latin typeface="Helvetica"/>
-              </a:rPr>
-              <a:t>Legend  —  Lunar perks + table credits + concierge</a:t>
-            </a:r>
-          </a:p>
-          <a:p>
-            <a:pPr algn="l">
-              <a:spcAft>
-                <a:spcPts val="800"/>
-              </a:spcAft>
-            </a:pPr>
-            <a:r>
-              <a:rPr sz="1800" b="1">
-                <a:solidFill>
-                  <a:srgbClr val="D4AF5A"/>
-                </a:solidFill>
-                <a:latin typeface="Helvetica"/>
-              </a:rPr>
-              <a:t>•   </a:t>
-            </a:r>
-            <a:r>
-              <a:rPr sz="1800">
-                <a:solidFill>
-                  <a:srgbClr val="F0F0F8"/>
-                </a:solidFill>
-                <a:latin typeface="Helvetica"/>
-              </a:rPr>
-              <a:t/>
-            </a:r>
-          </a:p>
-          <a:p>
-            <a:pPr algn="l">
-              <a:spcAft>
-                <a:spcPts val="800"/>
-              </a:spcAft>
-            </a:pPr>
-            <a:r>
-              <a:rPr sz="1800" b="1">
-                <a:solidFill>
-                  <a:srgbClr val="D4AF5A"/>
-                </a:solidFill>
-                <a:latin typeface="Helvetica"/>
-              </a:rPr>
-              <a:t>•   </a:t>
-            </a:r>
-            <a:r>
-              <a:rPr sz="1800">
-                <a:solidFill>
-                  <a:srgbClr val="F0F0F8"/>
-                </a:solidFill>
-                <a:latin typeface="Helvetica"/>
-              </a:rPr>
-              <a:t>Subscription tier is INDEPENDENT of base tier</a:t>
-            </a:r>
-          </a:p>
-          <a:p>
-            <a:pPr algn="l">
-              <a:spcAft>
-                <a:spcPts val="800"/>
-              </a:spcAft>
-            </a:pPr>
-            <a:r>
-              <a:rPr sz="1800" b="1">
-                <a:solidFill>
-                  <a:srgbClr val="D4AF5A"/>
-                </a:solidFill>
-                <a:latin typeface="Helvetica"/>
-              </a:rPr>
-              <a:t>•   </a:t>
-            </a:r>
-            <a:r>
-              <a:rPr sz="1800">
-                <a:solidFill>
-                  <a:srgbClr val="F0F0F8"/>
-                </a:solidFill>
-                <a:latin typeface="Helvetica"/>
-              </a:rPr>
-              <a:t>(A Bronze member can hold a Lunar subscription)</a:t>
-            </a:r>
-          </a:p>
-          <a:p>
-            <a:pPr algn="l">
-              <a:spcAft>
-                <a:spcPts val="800"/>
-              </a:spcAft>
-            </a:pPr>
-            <a:r>
-              <a:rPr sz="1800" b="1">
-                <a:solidFill>
-                  <a:srgbClr val="D4AF5A"/>
-                </a:solidFill>
-                <a:latin typeface="Helvetica"/>
-              </a:rPr>
-              <a:t>•   </a:t>
-            </a:r>
-            <a:r>
-              <a:rPr sz="1800">
-                <a:solidFill>
-                  <a:srgbClr val="F0F0F8"/>
-                </a:solidFill>
-                <a:latin typeface="Helvetica"/>
-              </a:rPr>
-              <a:t/>
-            </a:r>
-          </a:p>
-          <a:p>
-            <a:pPr algn="l">
-              <a:spcAft>
-                <a:spcPts val="800"/>
-              </a:spcAft>
-            </a:pPr>
-            <a:r>
-              <a:rPr sz="1800" b="1">
-                <a:solidFill>
-                  <a:srgbClr val="D4AF5A"/>
-                </a:solidFill>
-                <a:latin typeface="Helvetica"/>
-              </a:rPr>
-              <a:t>•   </a:t>
-            </a:r>
-            <a:r>
-              <a:rPr sz="1800">
-                <a:solidFill>
-                  <a:srgbClr val="F0F0F8"/>
-                </a:solidFill>
-                <a:latin typeface="Helvetica"/>
-              </a:rPr>
-              <a:t>Total earn multiplier = base tier × subscription bonus × active boost</a:t>
-            </a:r>
-          </a:p>
-        </p:txBody>
-      </p:sp>
-      <p:sp>
-        <p:nvSpPr>
-          <p:cNvPr id="6" name="TextBox 5"/>
-          <p:cNvSpPr txBox="1"/>
-          <p:nvPr/>
-        </p:nvSpPr>
-        <p:spPr>
-          <a:xfrm>
-            <a:off x="548640" y="6446520"/>
-            <a:ext cx="5486400" cy="274320"/>
-          </a:xfrm>
-          <a:prstGeom prst="rect">
-            <a:avLst/>
-          </a:prstGeom>
-          <a:noFill/>
-        </p:spPr>
-        <p:txBody>
-          <a:bodyPr wrap="square" lIns="0" rIns="0" tIns="0" bIns="0">
-            <a:spAutoFit/>
-          </a:bodyPr>
-          <a:lstStyle/>
-          <a:p>
-            <a:pPr algn="l"/>
-            <a:r>
-              <a:rPr sz="900" b="0">
-                <a:solidFill>
-                  <a:srgbClr val="9A95B0"/>
-                </a:solidFill>
-                <a:latin typeface="Helvetica"/>
-              </a:rPr>
-              <a:t>Luna Group VIP · Staff Training</a:t>
-            </a:r>
-          </a:p>
-        </p:txBody>
-      </p:sp>
-      <p:sp>
-        <p:nvSpPr>
-          <p:cNvPr id="7" name="TextBox 6"/>
-          <p:cNvSpPr txBox="1"/>
-          <p:nvPr/>
-        </p:nvSpPr>
-        <p:spPr>
-          <a:xfrm>
-            <a:off x="6858000" y="6446520"/>
-            <a:ext cx="4754880" cy="274320"/>
-          </a:xfrm>
-          <a:prstGeom prst="rect">
-            <a:avLst/>
-          </a:prstGeom>
-          <a:noFill/>
-        </p:spPr>
-        <p:txBody>
-          <a:bodyPr wrap="square" lIns="0" rIns="0" tIns="0" bIns="0">
-            <a:spAutoFit/>
-          </a:bodyPr>
-          <a:lstStyle/>
-          <a:p>
-            <a:pPr algn="r"/>
-            <a:r>
-              <a:rPr sz="900" b="0">
-                <a:solidFill>
-                  <a:srgbClr val="9A95B0"/>
-                </a:solidFill>
-                <a:latin typeface="Helvetica"/>
-              </a:rPr>
-              <a:t>Module 6 · Subs</a:t>
-            </a:r>
-          </a:p>
-        </p:txBody>
-      </p:sp>
-    </p:spTree>
-  </p:cSld>
-  <p:clrMapOvr>
-    <a:masterClrMapping/>
-  </p:clrMapOvr>
-</p:sld>
-</file>
-
 <file path=ppt/slides/slide2.xml><?xml version="1.0" encoding="utf-8"?>
 <p:sld xmlns:a="http://schemas.openxmlformats.org/drawingml/2006/main" xmlns:p="http://schemas.openxmlformats.org/presentationml/2006/main" xmlns:r="http://schemas.openxmlformats.org/officeDocument/2006/relationships">
   <p:cSld>
@@ -7838,7 +7924,7 @@
                 </a:solidFill>
                 <a:latin typeface="Helvetica"/>
               </a:rPr>
-              <a:t>MODULE 6.5 · NEW</a:t>
+              <a:t>MODULE 6</a:t>
             </a:r>
           </a:p>
         </p:txBody>
@@ -7873,7 +7959,7 @@
                 </a:solidFill>
                 <a:latin typeface="Helvetica"/>
               </a:rPr>
-              <a:t>Missions &amp; Milestones — what changed</a:t>
+              <a:t>Paid Subscriptions — Stripe</a:t>
             </a:r>
           </a:p>
         </p:txBody>
@@ -7949,7 +8035,7 @@
               </a:spcAft>
             </a:pPr>
             <a:r>
-              <a:rPr sz="1700" b="1">
+              <a:rPr sz="1800" b="1">
                 <a:solidFill>
                   <a:srgbClr val="D4AF5A"/>
                 </a:solidFill>
@@ -7958,13 +8044,13 @@
               <a:t>•   </a:t>
             </a:r>
             <a:r>
-              <a:rPr sz="1700">
+              <a:rPr sz="1800">
                 <a:solidFill>
                   <a:srgbClr val="F0F0F8"/>
                 </a:solidFill>
                 <a:latin typeface="Helvetica"/>
               </a:rPr>
-              <a:t>MISSIONS auto-progress every time you Quick-Award. No extra steps.</a:t>
+              <a:t>Aurora  —  bonus points multiplier · early access</a:t>
             </a:r>
           </a:p>
           <a:p>
@@ -7974,7 +8060,7 @@
               </a:spcAft>
             </a:pPr>
             <a:r>
-              <a:rPr sz="1700" b="1">
+              <a:rPr sz="1800" b="1">
                 <a:solidFill>
                   <a:srgbClr val="D4AF5A"/>
                 </a:solidFill>
@@ -7983,13 +8069,13 @@
               <a:t>•   </a:t>
             </a:r>
             <a:r>
-              <a:rPr sz="1700">
+              <a:rPr sz="1800">
                 <a:solidFill>
                   <a:srgbClr val="F0F0F8"/>
                 </a:solidFill>
                 <a:latin typeface="Helvetica"/>
               </a:rPr>
-              <a:t>Members see live progress in Profile → Missions</a:t>
+              <a:t>Lunar   —  monthly free entries (LUNA-ENT-) · monthly drink · priority bookings</a:t>
             </a:r>
           </a:p>
           <a:p>
@@ -7999,7 +8085,7 @@
               </a:spcAft>
             </a:pPr>
             <a:r>
-              <a:rPr sz="1700" b="1">
+              <a:rPr sz="1800" b="1">
                 <a:solidFill>
                   <a:srgbClr val="D4AF5A"/>
                 </a:solidFill>
@@ -8008,13 +8094,13 @@
               <a:t>•   </a:t>
             </a:r>
             <a:r>
-              <a:rPr sz="1700">
+              <a:rPr sz="1800">
                 <a:solidFill>
                   <a:srgbClr val="F0F0F8"/>
                 </a:solidFill>
                 <a:latin typeface="Helvetica"/>
               </a:rPr>
-              <a:t>Mission complete? — push fires; member taps Claim to bank the points</a:t>
+              <a:t>Legend  —  Lunar perks + table credits + concierge</a:t>
             </a:r>
           </a:p>
           <a:p>
@@ -8024,7 +8110,7 @@
               </a:spcAft>
             </a:pPr>
             <a:r>
-              <a:rPr sz="1700" b="1">
+              <a:rPr sz="1800" b="1">
                 <a:solidFill>
                   <a:srgbClr val="D4AF5A"/>
                 </a:solidFill>
@@ -8033,13 +8119,13 @@
               <a:t>•   </a:t>
             </a:r>
             <a:r>
-              <a:rPr sz="1700">
+              <a:rPr sz="1800">
                 <a:solidFill>
                   <a:srgbClr val="F0F0F8"/>
                 </a:solidFill>
                 <a:latin typeface="Helvetica"/>
               </a:rPr>
-              <a:t>MILESTONES are lifetime tiers — Newbie · Rising Star · VIP Status · Luna Elite · Supernova · Legend</a:t>
+              <a:t/>
             </a:r>
           </a:p>
           <a:p>
@@ -8049,7 +8135,7 @@
               </a:spcAft>
             </a:pPr>
             <a:r>
-              <a:rPr sz="1700" b="1">
+              <a:rPr sz="1800" b="1">
                 <a:solidFill>
                   <a:srgbClr val="D4AF5A"/>
                 </a:solidFill>
@@ -8058,13 +8144,13 @@
               <a:t>•   </a:t>
             </a:r>
             <a:r>
-              <a:rPr sz="1700">
+              <a:rPr sz="1800">
                 <a:solidFill>
                   <a:srgbClr val="F0F0F8"/>
                 </a:solidFill>
                 <a:latin typeface="Helvetica"/>
               </a:rPr>
-              <a:t>Hitting a milestone unlocks signed LUNA-TKT- QRs (single-use, can't be forged)</a:t>
+              <a:t>Subscription tier is INDEPENDENT of base tier</a:t>
             </a:r>
           </a:p>
           <a:p>
@@ -8074,7 +8160,7 @@
               </a:spcAft>
             </a:pPr>
             <a:r>
-              <a:rPr sz="1700" b="1">
+              <a:rPr sz="1800" b="1">
                 <a:solidFill>
                   <a:srgbClr val="D4AF5A"/>
                 </a:solidFill>
@@ -8083,13 +8169,13 @@
               <a:t>•   </a:t>
             </a:r>
             <a:r>
-              <a:rPr sz="1700">
+              <a:rPr sz="1800">
                 <a:solidFill>
                   <a:srgbClr val="F0F0F8"/>
                 </a:solidFill>
                 <a:latin typeface="Helvetica"/>
               </a:rPr>
-              <a:t>Manager-only: Lovable now has a 'Test trigger' button + activity timeline</a:t>
+              <a:t>(A Bronze member can hold a Lunar subscription)</a:t>
             </a:r>
           </a:p>
           <a:p>
@@ -8099,7 +8185,7 @@
               </a:spcAft>
             </a:pPr>
             <a:r>
-              <a:rPr sz="1700" b="1">
+              <a:rPr sz="1800" b="1">
                 <a:solidFill>
                   <a:srgbClr val="D4AF5A"/>
                 </a:solidFill>
@@ -8108,13 +8194,38 @@
               <a:t>•   </a:t>
             </a:r>
             <a:r>
-              <a:rPr sz="1700">
+              <a:rPr sz="1800">
                 <a:solidFill>
                   <a:srgbClr val="F0F0F8"/>
                 </a:solidFill>
                 <a:latin typeface="Helvetica"/>
               </a:rPr>
-              <a:t>Common Q: "did this count toward my mission?" — Answer: yes, automatically</a:t>
+              <a:t/>
+            </a:r>
+          </a:p>
+          <a:p>
+            <a:pPr algn="l">
+              <a:spcAft>
+                <a:spcPts val="800"/>
+              </a:spcAft>
+            </a:pPr>
+            <a:r>
+              <a:rPr sz="1800" b="1">
+                <a:solidFill>
+                  <a:srgbClr val="D4AF5A"/>
+                </a:solidFill>
+                <a:latin typeface="Helvetica"/>
+              </a:rPr>
+              <a:t>•   </a:t>
+            </a:r>
+            <a:r>
+              <a:rPr sz="1800">
+                <a:solidFill>
+                  <a:srgbClr val="F0F0F8"/>
+                </a:solidFill>
+                <a:latin typeface="Helvetica"/>
+              </a:rPr>
+              <a:t>Total earn multiplier = base tier × subscription bonus × active boost</a:t>
             </a:r>
           </a:p>
         </p:txBody>
@@ -8184,7 +8295,7 @@
                 </a:solidFill>
                 <a:latin typeface="Helvetica"/>
               </a:rPr>
-              <a:t>Module 6.5 · Missions</a:t>
+              <a:t>Module 6 · Subs</a:t>
             </a:r>
           </a:p>
         </p:txBody>
@@ -8198,6 +8309,413 @@
 </file>
 
 <file path=ppt/slides/slide21.xml><?xml version="1.0" encoding="utf-8"?>
+<p:sld xmlns:a="http://schemas.openxmlformats.org/drawingml/2006/main" xmlns:p="http://schemas.openxmlformats.org/presentationml/2006/main" xmlns:r="http://schemas.openxmlformats.org/officeDocument/2006/relationships">
+  <p:cSld>
+    <p:bg>
+      <p:bgPr>
+        <a:solidFill>
+          <a:srgbClr val="08080E"/>
+        </a:solidFill>
+        <a:effectLst/>
+      </p:bgPr>
+    </p:bg>
+    <p:spTree>
+      <p:nvGrpSpPr>
+        <p:cNvPr id="1" name=""/>
+        <p:cNvGrpSpPr/>
+        <p:nvPr/>
+      </p:nvGrpSpPr>
+      <p:grpSpPr/>
+      <p:sp>
+        <p:nvSpPr>
+          <p:cNvPr id="2" name="TextBox 1"/>
+          <p:cNvSpPr txBox="1"/>
+          <p:nvPr/>
+        </p:nvSpPr>
+        <p:spPr>
+          <a:xfrm>
+            <a:off x="548640" y="457200"/>
+            <a:ext cx="10972800" cy="365760"/>
+          </a:xfrm>
+          <a:prstGeom prst="rect">
+            <a:avLst/>
+          </a:prstGeom>
+          <a:noFill/>
+        </p:spPr>
+        <p:txBody>
+          <a:bodyPr wrap="square" lIns="0" rIns="0" tIns="0" bIns="0">
+            <a:spAutoFit/>
+          </a:bodyPr>
+          <a:lstStyle/>
+          <a:p>
+            <a:pPr algn="l"/>
+            <a:r>
+              <a:rPr sz="1200" b="1">
+                <a:solidFill>
+                  <a:srgbClr val="D4AF5A"/>
+                </a:solidFill>
+                <a:latin typeface="Helvetica"/>
+              </a:rPr>
+              <a:t>MODULE 6.5 · NEW</a:t>
+            </a:r>
+          </a:p>
+        </p:txBody>
+      </p:sp>
+      <p:sp>
+        <p:nvSpPr>
+          <p:cNvPr id="3" name="TextBox 2"/>
+          <p:cNvSpPr txBox="1"/>
+          <p:nvPr/>
+        </p:nvSpPr>
+        <p:spPr>
+          <a:xfrm>
+            <a:off x="548640" y="868680"/>
+            <a:ext cx="10972800" cy="914400"/>
+          </a:xfrm>
+          <a:prstGeom prst="rect">
+            <a:avLst/>
+          </a:prstGeom>
+          <a:noFill/>
+        </p:spPr>
+        <p:txBody>
+          <a:bodyPr wrap="square" lIns="0" rIns="0" tIns="0" bIns="0">
+            <a:spAutoFit/>
+          </a:bodyPr>
+          <a:lstStyle/>
+          <a:p>
+            <a:pPr algn="l"/>
+            <a:r>
+              <a:rPr sz="3200" b="1">
+                <a:solidFill>
+                  <a:srgbClr val="FFFFFF"/>
+                </a:solidFill>
+                <a:latin typeface="Helvetica"/>
+              </a:rPr>
+              <a:t>Missions &amp; Milestones — what changed</a:t>
+            </a:r>
+          </a:p>
+        </p:txBody>
+      </p:sp>
+      <p:sp>
+        <p:nvSpPr>
+          <p:cNvPr id="4" name="Rectangle 3"/>
+          <p:cNvSpPr/>
+          <p:nvPr/>
+        </p:nvSpPr>
+        <p:spPr>
+          <a:xfrm>
+            <a:off x="548640" y="1691640"/>
+            <a:ext cx="914400" cy="45720"/>
+          </a:xfrm>
+          <a:prstGeom prst="rect">
+            <a:avLst/>
+          </a:prstGeom>
+          <a:solidFill>
+            <a:srgbClr val="D4AF5A"/>
+          </a:solidFill>
+          <a:ln>
+            <a:noFill/>
+          </a:ln>
+        </p:spPr>
+        <p:style>
+          <a:lnRef idx="1">
+            <a:schemeClr val="accent1"/>
+          </a:lnRef>
+          <a:fillRef idx="3">
+            <a:schemeClr val="accent1"/>
+          </a:fillRef>
+          <a:effectRef idx="2">
+            <a:schemeClr val="accent1"/>
+          </a:effectRef>
+          <a:fontRef idx="minor">
+            <a:schemeClr val="lt1"/>
+          </a:fontRef>
+        </p:style>
+        <p:txBody>
+          <a:bodyPr rtlCol="0" anchor="ctr"/>
+          <a:lstStyle/>
+          <a:p>
+            <a:pPr algn="ctr"/>
+          </a:p>
+        </p:txBody>
+      </p:sp>
+      <p:sp>
+        <p:nvSpPr>
+          <p:cNvPr id="5" name="TextBox 4"/>
+          <p:cNvSpPr txBox="1"/>
+          <p:nvPr/>
+        </p:nvSpPr>
+        <p:spPr>
+          <a:xfrm>
+            <a:off x="640080" y="2011680"/>
+            <a:ext cx="10972800" cy="4572000"/>
+          </a:xfrm>
+          <a:prstGeom prst="rect">
+            <a:avLst/>
+          </a:prstGeom>
+          <a:noFill/>
+        </p:spPr>
+        <p:txBody>
+          <a:bodyPr wrap="square">
+            <a:spAutoFit/>
+          </a:bodyPr>
+          <a:lstStyle/>
+          <a:p>
+            <a:pPr algn="l">
+              <a:spcAft>
+                <a:spcPts val="800"/>
+              </a:spcAft>
+            </a:pPr>
+            <a:r>
+              <a:rPr sz="1700" b="1">
+                <a:solidFill>
+                  <a:srgbClr val="D4AF5A"/>
+                </a:solidFill>
+                <a:latin typeface="Helvetica"/>
+              </a:rPr>
+              <a:t>•   </a:t>
+            </a:r>
+            <a:r>
+              <a:rPr sz="1700">
+                <a:solidFill>
+                  <a:srgbClr val="F0F0F8"/>
+                </a:solidFill>
+                <a:latin typeface="Helvetica"/>
+              </a:rPr>
+              <a:t>MISSIONS auto-progress every time you Quick-Award. No extra steps.</a:t>
+            </a:r>
+          </a:p>
+          <a:p>
+            <a:pPr algn="l">
+              <a:spcAft>
+                <a:spcPts val="800"/>
+              </a:spcAft>
+            </a:pPr>
+            <a:r>
+              <a:rPr sz="1700" b="1">
+                <a:solidFill>
+                  <a:srgbClr val="D4AF5A"/>
+                </a:solidFill>
+                <a:latin typeface="Helvetica"/>
+              </a:rPr>
+              <a:t>•   </a:t>
+            </a:r>
+            <a:r>
+              <a:rPr sz="1700">
+                <a:solidFill>
+                  <a:srgbClr val="F0F0F8"/>
+                </a:solidFill>
+                <a:latin typeface="Helvetica"/>
+              </a:rPr>
+              <a:t>Members see live progress in Profile → Missions</a:t>
+            </a:r>
+          </a:p>
+          <a:p>
+            <a:pPr algn="l">
+              <a:spcAft>
+                <a:spcPts val="800"/>
+              </a:spcAft>
+            </a:pPr>
+            <a:r>
+              <a:rPr sz="1700" b="1">
+                <a:solidFill>
+                  <a:srgbClr val="D4AF5A"/>
+                </a:solidFill>
+                <a:latin typeface="Helvetica"/>
+              </a:rPr>
+              <a:t>•   </a:t>
+            </a:r>
+            <a:r>
+              <a:rPr sz="1700">
+                <a:solidFill>
+                  <a:srgbClr val="F0F0F8"/>
+                </a:solidFill>
+                <a:latin typeface="Helvetica"/>
+              </a:rPr>
+              <a:t>Mission complete? — push fires; member taps Claim to bank the points</a:t>
+            </a:r>
+          </a:p>
+          <a:p>
+            <a:pPr algn="l">
+              <a:spcAft>
+                <a:spcPts val="800"/>
+              </a:spcAft>
+            </a:pPr>
+            <a:r>
+              <a:rPr sz="1700" b="1">
+                <a:solidFill>
+                  <a:srgbClr val="D4AF5A"/>
+                </a:solidFill>
+                <a:latin typeface="Helvetica"/>
+              </a:rPr>
+              <a:t>•   </a:t>
+            </a:r>
+            <a:r>
+              <a:rPr sz="1700">
+                <a:solidFill>
+                  <a:srgbClr val="F0F0F8"/>
+                </a:solidFill>
+                <a:latin typeface="Helvetica"/>
+              </a:rPr>
+              <a:t>MILESTONES are lifetime tiers — Newbie · Rising Star · VIP Status · Luna Elite · Supernova · Legend</a:t>
+            </a:r>
+          </a:p>
+          <a:p>
+            <a:pPr algn="l">
+              <a:spcAft>
+                <a:spcPts val="800"/>
+              </a:spcAft>
+            </a:pPr>
+            <a:r>
+              <a:rPr sz="1700" b="1">
+                <a:solidFill>
+                  <a:srgbClr val="D4AF5A"/>
+                </a:solidFill>
+                <a:latin typeface="Helvetica"/>
+              </a:rPr>
+              <a:t>•   </a:t>
+            </a:r>
+            <a:r>
+              <a:rPr sz="1700">
+                <a:solidFill>
+                  <a:srgbClr val="F0F0F8"/>
+                </a:solidFill>
+                <a:latin typeface="Helvetica"/>
+              </a:rPr>
+              <a:t>Hitting a milestone unlocks signed LUNA-TKT- QRs (single-use, can't be forged)</a:t>
+            </a:r>
+          </a:p>
+          <a:p>
+            <a:pPr algn="l">
+              <a:spcAft>
+                <a:spcPts val="800"/>
+              </a:spcAft>
+            </a:pPr>
+            <a:r>
+              <a:rPr sz="1700" b="1">
+                <a:solidFill>
+                  <a:srgbClr val="D4AF5A"/>
+                </a:solidFill>
+                <a:latin typeface="Helvetica"/>
+              </a:rPr>
+              <a:t>•   </a:t>
+            </a:r>
+            <a:r>
+              <a:rPr sz="1700">
+                <a:solidFill>
+                  <a:srgbClr val="F0F0F8"/>
+                </a:solidFill>
+                <a:latin typeface="Helvetica"/>
+              </a:rPr>
+              <a:t>Manager-only: Lovable now has a 'Test trigger' button + activity timeline</a:t>
+            </a:r>
+          </a:p>
+          <a:p>
+            <a:pPr algn="l">
+              <a:spcAft>
+                <a:spcPts val="800"/>
+              </a:spcAft>
+            </a:pPr>
+            <a:r>
+              <a:rPr sz="1700" b="1">
+                <a:solidFill>
+                  <a:srgbClr val="D4AF5A"/>
+                </a:solidFill>
+                <a:latin typeface="Helvetica"/>
+              </a:rPr>
+              <a:t>•   </a:t>
+            </a:r>
+            <a:r>
+              <a:rPr sz="1700">
+                <a:solidFill>
+                  <a:srgbClr val="F0F0F8"/>
+                </a:solidFill>
+                <a:latin typeface="Helvetica"/>
+              </a:rPr>
+              <a:t>Common Q: "did this count toward my mission?" — Answer: yes, automatically</a:t>
+            </a:r>
+          </a:p>
+        </p:txBody>
+      </p:sp>
+      <p:sp>
+        <p:nvSpPr>
+          <p:cNvPr id="6" name="TextBox 5"/>
+          <p:cNvSpPr txBox="1"/>
+          <p:nvPr/>
+        </p:nvSpPr>
+        <p:spPr>
+          <a:xfrm>
+            <a:off x="548640" y="6446520"/>
+            <a:ext cx="5486400" cy="274320"/>
+          </a:xfrm>
+          <a:prstGeom prst="rect">
+            <a:avLst/>
+          </a:prstGeom>
+          <a:noFill/>
+        </p:spPr>
+        <p:txBody>
+          <a:bodyPr wrap="square" lIns="0" rIns="0" tIns="0" bIns="0">
+            <a:spAutoFit/>
+          </a:bodyPr>
+          <a:lstStyle/>
+          <a:p>
+            <a:pPr algn="l"/>
+            <a:r>
+              <a:rPr sz="900" b="0">
+                <a:solidFill>
+                  <a:srgbClr val="9A95B0"/>
+                </a:solidFill>
+                <a:latin typeface="Helvetica"/>
+              </a:rPr>
+              <a:t>Luna Group VIP · Staff Training</a:t>
+            </a:r>
+          </a:p>
+        </p:txBody>
+      </p:sp>
+      <p:sp>
+        <p:nvSpPr>
+          <p:cNvPr id="7" name="TextBox 6"/>
+          <p:cNvSpPr txBox="1"/>
+          <p:nvPr/>
+        </p:nvSpPr>
+        <p:spPr>
+          <a:xfrm>
+            <a:off x="6858000" y="6446520"/>
+            <a:ext cx="4754880" cy="274320"/>
+          </a:xfrm>
+          <a:prstGeom prst="rect">
+            <a:avLst/>
+          </a:prstGeom>
+          <a:noFill/>
+        </p:spPr>
+        <p:txBody>
+          <a:bodyPr wrap="square" lIns="0" rIns="0" tIns="0" bIns="0">
+            <a:spAutoFit/>
+          </a:bodyPr>
+          <a:lstStyle/>
+          <a:p>
+            <a:pPr algn="r"/>
+            <a:r>
+              <a:rPr sz="900" b="0">
+                <a:solidFill>
+                  <a:srgbClr val="9A95B0"/>
+                </a:solidFill>
+                <a:latin typeface="Helvetica"/>
+              </a:rPr>
+              <a:t>Module 6.5 · Missions</a:t>
+            </a:r>
+          </a:p>
+        </p:txBody>
+      </p:sp>
+    </p:spTree>
+  </p:cSld>
+  <p:clrMapOvr>
+    <a:masterClrMapping/>
+  </p:clrMapOvr>
+</p:sld>
+</file>
+
+<file path=ppt/slides/slide22.xml><?xml version="1.0" encoding="utf-8"?>
 <p:sld xmlns:a="http://schemas.openxmlformats.org/drawingml/2006/main" xmlns:p="http://schemas.openxmlformats.org/presentationml/2006/main" xmlns:r="http://schemas.openxmlformats.org/officeDocument/2006/relationships">
   <p:cSld>
     <p:bg>
@@ -8337,7 +8855,7 @@
 </p:sld>
 </file>
 
-<file path=ppt/slides/slide22.xml><?xml version="1.0" encoding="utf-8"?>
+<file path=ppt/slides/slide23.xml><?xml version="1.0" encoding="utf-8"?>
 <p:sld xmlns:a="http://schemas.openxmlformats.org/drawingml/2006/main" xmlns:p="http://schemas.openxmlformats.org/presentationml/2006/main" xmlns:r="http://schemas.openxmlformats.org/officeDocument/2006/relationships">
   <p:cSld>
     <p:bg>
@@ -8769,7 +9287,7 @@
 </p:sld>
 </file>
 
-<file path=ppt/slides/slide23.xml><?xml version="1.0" encoding="utf-8"?>
+<file path=ppt/slides/slide24.xml><?xml version="1.0" encoding="utf-8"?>
 <p:sld xmlns:a="http://schemas.openxmlformats.org/drawingml/2006/main" xmlns:p="http://schemas.openxmlformats.org/presentationml/2006/main" xmlns:r="http://schemas.openxmlformats.org/officeDocument/2006/relationships">
   <p:cSld>
     <p:bg>
@@ -8898,775 +9416,6 @@
           <a:lstStyle/>
           <a:p>
             <a:pPr algn="ctr"/>
-          </a:p>
-        </p:txBody>
-      </p:sp>
-    </p:spTree>
-  </p:cSld>
-  <p:clrMapOvr>
-    <a:masterClrMapping/>
-  </p:clrMapOvr>
-</p:sld>
-</file>
-
-<file path=ppt/slides/slide24.xml><?xml version="1.0" encoding="utf-8"?>
-<p:sld xmlns:a="http://schemas.openxmlformats.org/drawingml/2006/main" xmlns:p="http://schemas.openxmlformats.org/presentationml/2006/main" xmlns:r="http://schemas.openxmlformats.org/officeDocument/2006/relationships">
-  <p:cSld>
-    <p:bg>
-      <p:bgPr>
-        <a:solidFill>
-          <a:srgbClr val="08080E"/>
-        </a:solidFill>
-        <a:effectLst/>
-      </p:bgPr>
-    </p:bg>
-    <p:spTree>
-      <p:nvGrpSpPr>
-        <p:cNvPr id="1" name=""/>
-        <p:cNvGrpSpPr/>
-        <p:nvPr/>
-      </p:nvGrpSpPr>
-      <p:grpSpPr/>
-      <p:sp>
-        <p:nvSpPr>
-          <p:cNvPr id="2" name="TextBox 1"/>
-          <p:cNvSpPr txBox="1"/>
-          <p:nvPr/>
-        </p:nvSpPr>
-        <p:spPr>
-          <a:xfrm>
-            <a:off x="548640" y="457200"/>
-            <a:ext cx="10972800" cy="365760"/>
-          </a:xfrm>
-          <a:prstGeom prst="rect">
-            <a:avLst/>
-          </a:prstGeom>
-          <a:noFill/>
-        </p:spPr>
-        <p:txBody>
-          <a:bodyPr wrap="square" lIns="0" rIns="0" tIns="0" bIns="0">
-            <a:spAutoFit/>
-          </a:bodyPr>
-          <a:lstStyle/>
-          <a:p>
-            <a:pPr algn="l"/>
-            <a:r>
-              <a:rPr sz="1200" b="1">
-                <a:solidFill>
-                  <a:srgbClr val="D4AF5A"/>
-                </a:solidFill>
-                <a:latin typeface="Helvetica"/>
-              </a:rPr>
-              <a:t>MODULE 8</a:t>
-            </a:r>
-          </a:p>
-        </p:txBody>
-      </p:sp>
-      <p:sp>
-        <p:nvSpPr>
-          <p:cNvPr id="3" name="TextBox 2"/>
-          <p:cNvSpPr txBox="1"/>
-          <p:nvPr/>
-        </p:nvSpPr>
-        <p:spPr>
-          <a:xfrm>
-            <a:off x="548640" y="868680"/>
-            <a:ext cx="10972800" cy="914400"/>
-          </a:xfrm>
-          <a:prstGeom prst="rect">
-            <a:avLst/>
-          </a:prstGeom>
-          <a:noFill/>
-        </p:spPr>
-        <p:txBody>
-          <a:bodyPr wrap="square" lIns="0" rIns="0" tIns="0" bIns="0">
-            <a:spAutoFit/>
-          </a:bodyPr>
-          <a:lstStyle/>
-          <a:p>
-            <a:pPr algn="l"/>
-            <a:r>
-              <a:rPr sz="3200" b="1">
-                <a:solidFill>
-                  <a:srgbClr val="FFFFFF"/>
-                </a:solidFill>
-                <a:latin typeface="Helvetica"/>
-              </a:rPr>
-              <a:t>Top member questions — one-line scripts</a:t>
-            </a:r>
-          </a:p>
-        </p:txBody>
-      </p:sp>
-      <p:sp>
-        <p:nvSpPr>
-          <p:cNvPr id="4" name="Rectangle 3"/>
-          <p:cNvSpPr/>
-          <p:nvPr/>
-        </p:nvSpPr>
-        <p:spPr>
-          <a:xfrm>
-            <a:off x="548640" y="1691640"/>
-            <a:ext cx="914400" cy="45720"/>
-          </a:xfrm>
-          <a:prstGeom prst="rect">
-            <a:avLst/>
-          </a:prstGeom>
-          <a:solidFill>
-            <a:srgbClr val="D4AF5A"/>
-          </a:solidFill>
-          <a:ln>
-            <a:noFill/>
-          </a:ln>
-        </p:spPr>
-        <p:style>
-          <a:lnRef idx="1">
-            <a:schemeClr val="accent1"/>
-          </a:lnRef>
-          <a:fillRef idx="3">
-            <a:schemeClr val="accent1"/>
-          </a:fillRef>
-          <a:effectRef idx="2">
-            <a:schemeClr val="accent1"/>
-          </a:effectRef>
-          <a:fontRef idx="minor">
-            <a:schemeClr val="lt1"/>
-          </a:fontRef>
-        </p:style>
-        <p:txBody>
-          <a:bodyPr rtlCol="0" anchor="ctr"/>
-          <a:lstStyle/>
-          <a:p>
-            <a:pPr algn="ctr"/>
-          </a:p>
-        </p:txBody>
-      </p:sp>
-      <p:sp>
-        <p:nvSpPr>
-          <p:cNvPr id="5" name="TextBox 4"/>
-          <p:cNvSpPr txBox="1"/>
-          <p:nvPr/>
-        </p:nvSpPr>
-        <p:spPr>
-          <a:xfrm>
-            <a:off x="640080" y="2011680"/>
-            <a:ext cx="5029200" cy="365760"/>
-          </a:xfrm>
-          <a:prstGeom prst="rect">
-            <a:avLst/>
-          </a:prstGeom>
-          <a:noFill/>
-        </p:spPr>
-        <p:txBody>
-          <a:bodyPr wrap="square" lIns="0" rIns="0" tIns="0" bIns="0">
-            <a:spAutoFit/>
-          </a:bodyPr>
-          <a:lstStyle/>
-          <a:p>
-            <a:pPr algn="l"/>
-            <a:r>
-              <a:rPr sz="1300" b="1">
-                <a:solidFill>
-                  <a:srgbClr val="D4AF5A"/>
-                </a:solidFill>
-                <a:latin typeface="Helvetica"/>
-              </a:rPr>
-              <a:t>"How do I get my points?"</a:t>
-            </a:r>
-          </a:p>
-        </p:txBody>
-      </p:sp>
-      <p:sp>
-        <p:nvSpPr>
-          <p:cNvPr id="6" name="TextBox 5"/>
-          <p:cNvSpPr txBox="1"/>
-          <p:nvPr/>
-        </p:nvSpPr>
-        <p:spPr>
-          <a:xfrm>
-            <a:off x="5760720" y="2011680"/>
-            <a:ext cx="5943600" cy="365760"/>
-          </a:xfrm>
-          <a:prstGeom prst="rect">
-            <a:avLst/>
-          </a:prstGeom>
-          <a:noFill/>
-        </p:spPr>
-        <p:txBody>
-          <a:bodyPr wrap="square" lIns="0" rIns="0" tIns="0" bIns="0">
-            <a:spAutoFit/>
-          </a:bodyPr>
-          <a:lstStyle/>
-          <a:p>
-            <a:pPr algn="l"/>
-            <a:r>
-              <a:rPr sz="1300" b="0">
-                <a:solidFill>
-                  <a:srgbClr val="F0F0F8"/>
-                </a:solidFill>
-                <a:latin typeface="Helvetica"/>
-              </a:rPr>
-              <a:t>I'll scan your member QR and award them now.</a:t>
-            </a:r>
-          </a:p>
-        </p:txBody>
-      </p:sp>
-      <p:sp>
-        <p:nvSpPr>
-          <p:cNvPr id="7" name="TextBox 6"/>
-          <p:cNvSpPr txBox="1"/>
-          <p:nvPr/>
-        </p:nvSpPr>
-        <p:spPr>
-          <a:xfrm>
-            <a:off x="640080" y="2514600"/>
-            <a:ext cx="5029200" cy="365760"/>
-          </a:xfrm>
-          <a:prstGeom prst="rect">
-            <a:avLst/>
-          </a:prstGeom>
-          <a:noFill/>
-        </p:spPr>
-        <p:txBody>
-          <a:bodyPr wrap="square" lIns="0" rIns="0" tIns="0" bIns="0">
-            <a:spAutoFit/>
-          </a:bodyPr>
-          <a:lstStyle/>
-          <a:p>
-            <a:pPr algn="l"/>
-            <a:r>
-              <a:rPr sz="1300" b="1">
-                <a:solidFill>
-                  <a:srgbClr val="D4AF5A"/>
-                </a:solidFill>
-                <a:latin typeface="Helvetica"/>
-              </a:rPr>
-              <a:t>"Where's my member QR?"</a:t>
-            </a:r>
-          </a:p>
-        </p:txBody>
-      </p:sp>
-      <p:sp>
-        <p:nvSpPr>
-          <p:cNvPr id="8" name="TextBox 7"/>
-          <p:cNvSpPr txBox="1"/>
-          <p:nvPr/>
-        </p:nvSpPr>
-        <p:spPr>
-          <a:xfrm>
-            <a:off x="5760720" y="2514600"/>
-            <a:ext cx="5943600" cy="365760"/>
-          </a:xfrm>
-          <a:prstGeom prst="rect">
-            <a:avLst/>
-          </a:prstGeom>
-          <a:noFill/>
-        </p:spPr>
-        <p:txBody>
-          <a:bodyPr wrap="square" lIns="0" rIns="0" tIns="0" bIns="0">
-            <a:spAutoFit/>
-          </a:bodyPr>
-          <a:lstStyle/>
-          <a:p>
-            <a:pPr algn="l"/>
-            <a:r>
-              <a:rPr sz="1300" b="0">
-                <a:solidFill>
-                  <a:srgbClr val="F0F0F8"/>
-                </a:solidFill>
-                <a:latin typeface="Helvetica"/>
-              </a:rPr>
-              <a:t>Open the app → Wallet → Member Card.</a:t>
-            </a:r>
-          </a:p>
-        </p:txBody>
-      </p:sp>
-      <p:sp>
-        <p:nvSpPr>
-          <p:cNvPr id="9" name="TextBox 8"/>
-          <p:cNvSpPr txBox="1"/>
-          <p:nvPr/>
-        </p:nvSpPr>
-        <p:spPr>
-          <a:xfrm>
-            <a:off x="640080" y="3017520"/>
-            <a:ext cx="5029200" cy="365760"/>
-          </a:xfrm>
-          <a:prstGeom prst="rect">
-            <a:avLst/>
-          </a:prstGeom>
-          <a:noFill/>
-        </p:spPr>
-        <p:txBody>
-          <a:bodyPr wrap="square" lIns="0" rIns="0" tIns="0" bIns="0">
-            <a:spAutoFit/>
-          </a:bodyPr>
-          <a:lstStyle/>
-          <a:p>
-            <a:pPr algn="l"/>
-            <a:r>
-              <a:rPr sz="1300" b="1">
-                <a:solidFill>
-                  <a:srgbClr val="D4AF5A"/>
-                </a:solidFill>
-                <a:latin typeface="Helvetica"/>
-              </a:rPr>
-              <a:t>"I didn't get points from yesterday"</a:t>
-            </a:r>
-          </a:p>
-        </p:txBody>
-      </p:sp>
-      <p:sp>
-        <p:nvSpPr>
-          <p:cNvPr id="10" name="TextBox 9"/>
-          <p:cNvSpPr txBox="1"/>
-          <p:nvPr/>
-        </p:nvSpPr>
-        <p:spPr>
-          <a:xfrm>
-            <a:off x="5760720" y="3017520"/>
-            <a:ext cx="5943600" cy="365760"/>
-          </a:xfrm>
-          <a:prstGeom prst="rect">
-            <a:avLst/>
-          </a:prstGeom>
-          <a:noFill/>
-        </p:spPr>
-        <p:txBody>
-          <a:bodyPr wrap="square" lIns="0" rIns="0" tIns="0" bIns="0">
-            <a:spAutoFit/>
-          </a:bodyPr>
-          <a:lstStyle/>
-          <a:p>
-            <a:pPr algn="l"/>
-            <a:r>
-              <a:rPr sz="1300" b="0">
-                <a:solidFill>
-                  <a:srgbClr val="F0F0F8"/>
-                </a:solidFill>
-                <a:latin typeface="Helvetica"/>
-              </a:rPr>
-              <a:t>Let me check History — SwiftPOS can take a few minutes.</a:t>
-            </a:r>
-          </a:p>
-        </p:txBody>
-      </p:sp>
-      <p:sp>
-        <p:nvSpPr>
-          <p:cNvPr id="11" name="TextBox 10"/>
-          <p:cNvSpPr txBox="1"/>
-          <p:nvPr/>
-        </p:nvSpPr>
-        <p:spPr>
-          <a:xfrm>
-            <a:off x="640080" y="3520439"/>
-            <a:ext cx="5029200" cy="365760"/>
-          </a:xfrm>
-          <a:prstGeom prst="rect">
-            <a:avLst/>
-          </a:prstGeom>
-          <a:noFill/>
-        </p:spPr>
-        <p:txBody>
-          <a:bodyPr wrap="square" lIns="0" rIns="0" tIns="0" bIns="0">
-            <a:spAutoFit/>
-          </a:bodyPr>
-          <a:lstStyle/>
-          <a:p>
-            <a:pPr algn="l"/>
-            <a:r>
-              <a:rPr sz="1300" b="1">
-                <a:solidFill>
-                  <a:srgbClr val="D4AF5A"/>
-                </a:solidFill>
-                <a:latin typeface="Helvetica"/>
-              </a:rPr>
-              <a:t>"How do I get free entry?"</a:t>
-            </a:r>
-          </a:p>
-        </p:txBody>
-      </p:sp>
-      <p:sp>
-        <p:nvSpPr>
-          <p:cNvPr id="12" name="TextBox 11"/>
-          <p:cNvSpPr txBox="1"/>
-          <p:nvPr/>
-        </p:nvSpPr>
-        <p:spPr>
-          <a:xfrm>
-            <a:off x="5760720" y="3520439"/>
-            <a:ext cx="5943600" cy="365760"/>
-          </a:xfrm>
-          <a:prstGeom prst="rect">
-            <a:avLst/>
-          </a:prstGeom>
-          <a:noFill/>
-        </p:spPr>
-        <p:txBody>
-          <a:bodyPr wrap="square" lIns="0" rIns="0" tIns="0" bIns="0">
-            <a:spAutoFit/>
-          </a:bodyPr>
-          <a:lstStyle/>
-          <a:p>
-            <a:pPr algn="l"/>
-            <a:r>
-              <a:rPr sz="1300" b="0">
-                <a:solidFill>
-                  <a:srgbClr val="F0F0F8"/>
-                </a:solidFill>
-                <a:latin typeface="Helvetica"/>
-              </a:rPr>
-              <a:t>Lunar subscription gives monthly entries; tier may also unlock.</a:t>
-            </a:r>
-          </a:p>
-        </p:txBody>
-      </p:sp>
-      <p:sp>
-        <p:nvSpPr>
-          <p:cNvPr id="13" name="TextBox 12"/>
-          <p:cNvSpPr txBox="1"/>
-          <p:nvPr/>
-        </p:nvSpPr>
-        <p:spPr>
-          <a:xfrm>
-            <a:off x="640080" y="4023359"/>
-            <a:ext cx="5029200" cy="365760"/>
-          </a:xfrm>
-          <a:prstGeom prst="rect">
-            <a:avLst/>
-          </a:prstGeom>
-          <a:noFill/>
-        </p:spPr>
-        <p:txBody>
-          <a:bodyPr wrap="square" lIns="0" rIns="0" tIns="0" bIns="0">
-            <a:spAutoFit/>
-          </a:bodyPr>
-          <a:lstStyle/>
-          <a:p>
-            <a:pPr algn="l"/>
-            <a:r>
-              <a:rPr sz="1300" b="1">
-                <a:solidFill>
-                  <a:srgbClr val="D4AF5A"/>
-                </a:solidFill>
-                <a:latin typeface="Helvetica"/>
-              </a:rPr>
-              <a:t>"What's my tier?"</a:t>
-            </a:r>
-          </a:p>
-        </p:txBody>
-      </p:sp>
-      <p:sp>
-        <p:nvSpPr>
-          <p:cNvPr id="14" name="TextBox 13"/>
-          <p:cNvSpPr txBox="1"/>
-          <p:nvPr/>
-        </p:nvSpPr>
-        <p:spPr>
-          <a:xfrm>
-            <a:off x="5760720" y="4023359"/>
-            <a:ext cx="5943600" cy="365760"/>
-          </a:xfrm>
-          <a:prstGeom prst="rect">
-            <a:avLst/>
-          </a:prstGeom>
-          <a:noFill/>
-        </p:spPr>
-        <p:txBody>
-          <a:bodyPr wrap="square" lIns="0" rIns="0" tIns="0" bIns="0">
-            <a:spAutoFit/>
-          </a:bodyPr>
-          <a:lstStyle/>
-          <a:p>
-            <a:pPr algn="l"/>
-            <a:r>
-              <a:rPr sz="1300" b="0">
-                <a:solidFill>
-                  <a:srgbClr val="F0F0F8"/>
-                </a:solidFill>
-                <a:latin typeface="Helvetica"/>
-              </a:rPr>
-              <a:t>It's on your Profile screen — Bronze · Silver · Gold · Legend.</a:t>
-            </a:r>
-          </a:p>
-        </p:txBody>
-      </p:sp>
-      <p:sp>
-        <p:nvSpPr>
-          <p:cNvPr id="15" name="TextBox 14"/>
-          <p:cNvSpPr txBox="1"/>
-          <p:nvPr/>
-        </p:nvSpPr>
-        <p:spPr>
-          <a:xfrm>
-            <a:off x="640080" y="4526279"/>
-            <a:ext cx="5029200" cy="365760"/>
-          </a:xfrm>
-          <a:prstGeom prst="rect">
-            <a:avLst/>
-          </a:prstGeom>
-          <a:noFill/>
-        </p:spPr>
-        <p:txBody>
-          <a:bodyPr wrap="square" lIns="0" rIns="0" tIns="0" bIns="0">
-            <a:spAutoFit/>
-          </a:bodyPr>
-          <a:lstStyle/>
-          <a:p>
-            <a:pPr algn="l"/>
-            <a:r>
-              <a:rPr sz="1300" b="1">
-                <a:solidFill>
-                  <a:srgbClr val="D4AF5A"/>
-                </a:solidFill>
-                <a:latin typeface="Helvetica"/>
-              </a:rPr>
-              <a:t>"How do referrals work?"</a:t>
-            </a:r>
-          </a:p>
-        </p:txBody>
-      </p:sp>
-      <p:sp>
-        <p:nvSpPr>
-          <p:cNvPr id="16" name="TextBox 15"/>
-          <p:cNvSpPr txBox="1"/>
-          <p:nvPr/>
-        </p:nvSpPr>
-        <p:spPr>
-          <a:xfrm>
-            <a:off x="5760720" y="4526279"/>
-            <a:ext cx="5943600" cy="365760"/>
-          </a:xfrm>
-          <a:prstGeom prst="rect">
-            <a:avLst/>
-          </a:prstGeom>
-          <a:noFill/>
-        </p:spPr>
-        <p:txBody>
-          <a:bodyPr wrap="square" lIns="0" rIns="0" tIns="0" bIns="0">
-            <a:spAutoFit/>
-          </a:bodyPr>
-          <a:lstStyle/>
-          <a:p>
-            <a:pPr algn="l"/>
-            <a:r>
-              <a:rPr sz="1300" b="0">
-                <a:solidFill>
-                  <a:srgbClr val="F0F0F8"/>
-                </a:solidFill>
-                <a:latin typeface="Helvetica"/>
-              </a:rPr>
-              <a:t>Profile → Refer a Friend. You both get bonus points after their first visit.</a:t>
-            </a:r>
-          </a:p>
-        </p:txBody>
-      </p:sp>
-      <p:sp>
-        <p:nvSpPr>
-          <p:cNvPr id="17" name="TextBox 16"/>
-          <p:cNvSpPr txBox="1"/>
-          <p:nvPr/>
-        </p:nvSpPr>
-        <p:spPr>
-          <a:xfrm>
-            <a:off x="640080" y="5029199"/>
-            <a:ext cx="5029200" cy="365760"/>
-          </a:xfrm>
-          <a:prstGeom prst="rect">
-            <a:avLst/>
-          </a:prstGeom>
-          <a:noFill/>
-        </p:spPr>
-        <p:txBody>
-          <a:bodyPr wrap="square" lIns="0" rIns="0" tIns="0" bIns="0">
-            <a:spAutoFit/>
-          </a:bodyPr>
-          <a:lstStyle/>
-          <a:p>
-            <a:pPr algn="l"/>
-            <a:r>
-              <a:rPr sz="1300" b="1">
-                <a:solidFill>
-                  <a:srgbClr val="D4AF5A"/>
-                </a:solidFill>
-                <a:latin typeface="Helvetica"/>
-              </a:rPr>
-              <a:t>"I lost something"</a:t>
-            </a:r>
-          </a:p>
-        </p:txBody>
-      </p:sp>
-      <p:sp>
-        <p:nvSpPr>
-          <p:cNvPr id="18" name="TextBox 17"/>
-          <p:cNvSpPr txBox="1"/>
-          <p:nvPr/>
-        </p:nvSpPr>
-        <p:spPr>
-          <a:xfrm>
-            <a:off x="5760720" y="5029199"/>
-            <a:ext cx="5943600" cy="365760"/>
-          </a:xfrm>
-          <a:prstGeom prst="rect">
-            <a:avLst/>
-          </a:prstGeom>
-          <a:noFill/>
-        </p:spPr>
-        <p:txBody>
-          <a:bodyPr wrap="square" lIns="0" rIns="0" tIns="0" bIns="0">
-            <a:spAutoFit/>
-          </a:bodyPr>
-          <a:lstStyle/>
-          <a:p>
-            <a:pPr algn="l"/>
-            <a:r>
-              <a:rPr sz="1300" b="0">
-                <a:solidFill>
-                  <a:srgbClr val="F0F0F8"/>
-                </a:solidFill>
-                <a:latin typeface="Helvetica"/>
-              </a:rPr>
-              <a:t>App → Lost &amp; Found → Report Missing. We'll match it.</a:t>
-            </a:r>
-          </a:p>
-        </p:txBody>
-      </p:sp>
-      <p:sp>
-        <p:nvSpPr>
-          <p:cNvPr id="19" name="TextBox 18"/>
-          <p:cNvSpPr txBox="1"/>
-          <p:nvPr/>
-        </p:nvSpPr>
-        <p:spPr>
-          <a:xfrm>
-            <a:off x="640080" y="5532119"/>
-            <a:ext cx="5029200" cy="365760"/>
-          </a:xfrm>
-          <a:prstGeom prst="rect">
-            <a:avLst/>
-          </a:prstGeom>
-          <a:noFill/>
-        </p:spPr>
-        <p:txBody>
-          <a:bodyPr wrap="square" lIns="0" rIns="0" tIns="0" bIns="0">
-            <a:spAutoFit/>
-          </a:bodyPr>
-          <a:lstStyle/>
-          <a:p>
-            <a:pPr algn="l"/>
-            <a:r>
-              <a:rPr sz="1300" b="1">
-                <a:solidFill>
-                  <a:srgbClr val="D4AF5A"/>
-                </a:solidFill>
-                <a:latin typeface="Helvetica"/>
-              </a:rPr>
-              <a:t>"Cancel my subscription?"</a:t>
-            </a:r>
-          </a:p>
-        </p:txBody>
-      </p:sp>
-      <p:sp>
-        <p:nvSpPr>
-          <p:cNvPr id="20" name="TextBox 19"/>
-          <p:cNvSpPr txBox="1"/>
-          <p:nvPr/>
-        </p:nvSpPr>
-        <p:spPr>
-          <a:xfrm>
-            <a:off x="5760720" y="5532119"/>
-            <a:ext cx="5943600" cy="365760"/>
-          </a:xfrm>
-          <a:prstGeom prst="rect">
-            <a:avLst/>
-          </a:prstGeom>
-          <a:noFill/>
-        </p:spPr>
-        <p:txBody>
-          <a:bodyPr wrap="square" lIns="0" rIns="0" tIns="0" bIns="0">
-            <a:spAutoFit/>
-          </a:bodyPr>
-          <a:lstStyle/>
-          <a:p>
-            <a:pPr algn="l"/>
-            <a:r>
-              <a:rPr sz="1300" b="0">
-                <a:solidFill>
-                  <a:srgbClr val="F0F0F8"/>
-                </a:solidFill>
-                <a:latin typeface="Helvetica"/>
-              </a:rPr>
-              <a:t>Profile → Subscriptions → Manage. Stripe handles it; access until period-end.</a:t>
-            </a:r>
-          </a:p>
-        </p:txBody>
-      </p:sp>
-      <p:sp>
-        <p:nvSpPr>
-          <p:cNvPr id="21" name="TextBox 20"/>
-          <p:cNvSpPr txBox="1"/>
-          <p:nvPr/>
-        </p:nvSpPr>
-        <p:spPr>
-          <a:xfrm>
-            <a:off x="548640" y="6446520"/>
-            <a:ext cx="5486400" cy="274320"/>
-          </a:xfrm>
-          <a:prstGeom prst="rect">
-            <a:avLst/>
-          </a:prstGeom>
-          <a:noFill/>
-        </p:spPr>
-        <p:txBody>
-          <a:bodyPr wrap="square" lIns="0" rIns="0" tIns="0" bIns="0">
-            <a:spAutoFit/>
-          </a:bodyPr>
-          <a:lstStyle/>
-          <a:p>
-            <a:pPr algn="l"/>
-            <a:r>
-              <a:rPr sz="900" b="0">
-                <a:solidFill>
-                  <a:srgbClr val="9A95B0"/>
-                </a:solidFill>
-                <a:latin typeface="Helvetica"/>
-              </a:rPr>
-              <a:t>Luna Group VIP · Staff Training</a:t>
-            </a:r>
-          </a:p>
-        </p:txBody>
-      </p:sp>
-      <p:sp>
-        <p:nvSpPr>
-          <p:cNvPr id="22" name="TextBox 21"/>
-          <p:cNvSpPr txBox="1"/>
-          <p:nvPr/>
-        </p:nvSpPr>
-        <p:spPr>
-          <a:xfrm>
-            <a:off x="6858000" y="6446520"/>
-            <a:ext cx="4754880" cy="274320"/>
-          </a:xfrm>
-          <a:prstGeom prst="rect">
-            <a:avLst/>
-          </a:prstGeom>
-          <a:noFill/>
-        </p:spPr>
-        <p:txBody>
-          <a:bodyPr wrap="square" lIns="0" rIns="0" tIns="0" bIns="0">
-            <a:spAutoFit/>
-          </a:bodyPr>
-          <a:lstStyle/>
-          <a:p>
-            <a:pPr algn="r"/>
-            <a:r>
-              <a:rPr sz="900" b="0">
-                <a:solidFill>
-                  <a:srgbClr val="9A95B0"/>
-                </a:solidFill>
-                <a:latin typeface="Helvetica"/>
-              </a:rPr>
-              <a:t>Module 8 · Cheat sheet</a:t>
-            </a:r>
           </a:p>
         </p:txBody>
       </p:sp>
@@ -9761,7 +9510,7 @@
                 </a:solidFill>
                 <a:latin typeface="Helvetica"/>
               </a:rPr>
-              <a:t>Troubleshooting playbook</a:t>
+              <a:t>Top member questions — one-line scripts</a:t>
             </a:r>
           </a:p>
         </p:txBody>
@@ -9818,148 +9567,560 @@
         <p:spPr>
           <a:xfrm>
             <a:off x="640080" y="2011680"/>
-            <a:ext cx="10972800" cy="4572000"/>
-          </a:xfrm>
-          <a:prstGeom prst="rect">
-            <a:avLst/>
-          </a:prstGeom>
-          <a:noFill/>
-        </p:spPr>
-        <p:txBody>
-          <a:bodyPr wrap="square">
-            <a:spAutoFit/>
-          </a:bodyPr>
-          <a:lstStyle/>
-          <a:p>
-            <a:pPr algn="l">
-              <a:spcAft>
-                <a:spcPts val="800"/>
-              </a:spcAft>
-            </a:pPr>
-            <a:r>
-              <a:rPr sz="1800" b="1">
+            <a:ext cx="5029200" cy="365760"/>
+          </a:xfrm>
+          <a:prstGeom prst="rect">
+            <a:avLst/>
+          </a:prstGeom>
+          <a:noFill/>
+        </p:spPr>
+        <p:txBody>
+          <a:bodyPr wrap="square" lIns="0" rIns="0" tIns="0" bIns="0">
+            <a:spAutoFit/>
+          </a:bodyPr>
+          <a:lstStyle/>
+          <a:p>
+            <a:pPr algn="l"/>
+            <a:r>
+              <a:rPr sz="1300" b="1">
                 <a:solidFill>
                   <a:srgbClr val="D4AF5A"/>
                 </a:solidFill>
                 <a:latin typeface="Helvetica"/>
               </a:rPr>
-              <a:t>•   </a:t>
-            </a:r>
-            <a:r>
-              <a:rPr sz="1800">
+              <a:t>"How do I get my points?"</a:t>
+            </a:r>
+          </a:p>
+        </p:txBody>
+      </p:sp>
+      <p:sp>
+        <p:nvSpPr>
+          <p:cNvPr id="6" name="TextBox 5"/>
+          <p:cNvSpPr txBox="1"/>
+          <p:nvPr/>
+        </p:nvSpPr>
+        <p:spPr>
+          <a:xfrm>
+            <a:off x="5760720" y="2011680"/>
+            <a:ext cx="5943600" cy="365760"/>
+          </a:xfrm>
+          <a:prstGeom prst="rect">
+            <a:avLst/>
+          </a:prstGeom>
+          <a:noFill/>
+        </p:spPr>
+        <p:txBody>
+          <a:bodyPr wrap="square" lIns="0" rIns="0" tIns="0" bIns="0">
+            <a:spAutoFit/>
+          </a:bodyPr>
+          <a:lstStyle/>
+          <a:p>
+            <a:pPr algn="l"/>
+            <a:r>
+              <a:rPr sz="1300" b="0">
                 <a:solidFill>
                   <a:srgbClr val="F0F0F8"/>
                 </a:solidFill>
                 <a:latin typeface="Helvetica"/>
               </a:rPr>
-              <a:t>Points not showing  →  check History; if absent, re-award + flag manager</a:t>
-            </a:r>
-          </a:p>
-          <a:p>
-            <a:pPr algn="l">
-              <a:spcAft>
-                <a:spcPts val="800"/>
-              </a:spcAft>
-            </a:pPr>
-            <a:r>
-              <a:rPr sz="1800" b="1">
+              <a:t>I'll scan your member QR and award them now.</a:t>
+            </a:r>
+          </a:p>
+        </p:txBody>
+      </p:sp>
+      <p:sp>
+        <p:nvSpPr>
+          <p:cNvPr id="7" name="TextBox 6"/>
+          <p:cNvSpPr txBox="1"/>
+          <p:nvPr/>
+        </p:nvSpPr>
+        <p:spPr>
+          <a:xfrm>
+            <a:off x="640080" y="2514600"/>
+            <a:ext cx="5029200" cy="365760"/>
+          </a:xfrm>
+          <a:prstGeom prst="rect">
+            <a:avLst/>
+          </a:prstGeom>
+          <a:noFill/>
+        </p:spPr>
+        <p:txBody>
+          <a:bodyPr wrap="square" lIns="0" rIns="0" tIns="0" bIns="0">
+            <a:spAutoFit/>
+          </a:bodyPr>
+          <a:lstStyle/>
+          <a:p>
+            <a:pPr algn="l"/>
+            <a:r>
+              <a:rPr sz="1300" b="1">
                 <a:solidFill>
                   <a:srgbClr val="D4AF5A"/>
                 </a:solidFill>
                 <a:latin typeface="Helvetica"/>
               </a:rPr>
-              <a:t>•   </a:t>
-            </a:r>
-            <a:r>
-              <a:rPr sz="1800">
+              <a:t>"Where's my member QR?"</a:t>
+            </a:r>
+          </a:p>
+        </p:txBody>
+      </p:sp>
+      <p:sp>
+        <p:nvSpPr>
+          <p:cNvPr id="8" name="TextBox 7"/>
+          <p:cNvSpPr txBox="1"/>
+          <p:nvPr/>
+        </p:nvSpPr>
+        <p:spPr>
+          <a:xfrm>
+            <a:off x="5760720" y="2514600"/>
+            <a:ext cx="5943600" cy="365760"/>
+          </a:xfrm>
+          <a:prstGeom prst="rect">
+            <a:avLst/>
+          </a:prstGeom>
+          <a:noFill/>
+        </p:spPr>
+        <p:txBody>
+          <a:bodyPr wrap="square" lIns="0" rIns="0" tIns="0" bIns="0">
+            <a:spAutoFit/>
+          </a:bodyPr>
+          <a:lstStyle/>
+          <a:p>
+            <a:pPr algn="l"/>
+            <a:r>
+              <a:rPr sz="1300" b="0">
                 <a:solidFill>
                   <a:srgbClr val="F0F0F8"/>
                 </a:solidFill>
                 <a:latin typeface="Helvetica"/>
               </a:rPr>
-              <a:t>QR won't scan  →  brightness up · full-screen Member Card · or search by email</a:t>
-            </a:r>
-          </a:p>
-          <a:p>
-            <a:pPr algn="l">
-              <a:spcAft>
-                <a:spcPts val="800"/>
-              </a:spcAft>
-            </a:pPr>
-            <a:r>
-              <a:rPr sz="1800" b="1">
+              <a:t>Open the app → Wallet → Member Card.</a:t>
+            </a:r>
+          </a:p>
+        </p:txBody>
+      </p:sp>
+      <p:sp>
+        <p:nvSpPr>
+          <p:cNvPr id="9" name="TextBox 8"/>
+          <p:cNvSpPr txBox="1"/>
+          <p:nvPr/>
+        </p:nvSpPr>
+        <p:spPr>
+          <a:xfrm>
+            <a:off x="640080" y="3017520"/>
+            <a:ext cx="5029200" cy="365760"/>
+          </a:xfrm>
+          <a:prstGeom prst="rect">
+            <a:avLst/>
+          </a:prstGeom>
+          <a:noFill/>
+        </p:spPr>
+        <p:txBody>
+          <a:bodyPr wrap="square" lIns="0" rIns="0" tIns="0" bIns="0">
+            <a:spAutoFit/>
+          </a:bodyPr>
+          <a:lstStyle/>
+          <a:p>
+            <a:pPr algn="l"/>
+            <a:r>
+              <a:rPr sz="1300" b="1">
                 <a:solidFill>
                   <a:srgbClr val="D4AF5A"/>
                 </a:solidFill>
                 <a:latin typeface="Helvetica"/>
               </a:rPr>
-              <a:t>•   </a:t>
-            </a:r>
-            <a:r>
-              <a:rPr sz="1800">
+              <a:t>"I didn't get points from yesterday"</a:t>
+            </a:r>
+          </a:p>
+        </p:txBody>
+      </p:sp>
+      <p:sp>
+        <p:nvSpPr>
+          <p:cNvPr id="10" name="TextBox 9"/>
+          <p:cNvSpPr txBox="1"/>
+          <p:nvPr/>
+        </p:nvSpPr>
+        <p:spPr>
+          <a:xfrm>
+            <a:off x="5760720" y="3017520"/>
+            <a:ext cx="5943600" cy="365760"/>
+          </a:xfrm>
+          <a:prstGeom prst="rect">
+            <a:avLst/>
+          </a:prstGeom>
+          <a:noFill/>
+        </p:spPr>
+        <p:txBody>
+          <a:bodyPr wrap="square" lIns="0" rIns="0" tIns="0" bIns="0">
+            <a:spAutoFit/>
+          </a:bodyPr>
+          <a:lstStyle/>
+          <a:p>
+            <a:pPr algn="l"/>
+            <a:r>
+              <a:rPr sz="1300" b="0">
                 <a:solidFill>
                   <a:srgbClr val="F0F0F8"/>
                 </a:solidFill>
                 <a:latin typeface="Helvetica"/>
               </a:rPr>
-              <a:t>App crashing  →  force close · update · capture screenshot for support</a:t>
-            </a:r>
-          </a:p>
-          <a:p>
-            <a:pPr algn="l">
-              <a:spcAft>
-                <a:spcPts val="800"/>
-              </a:spcAft>
-            </a:pPr>
-            <a:r>
-              <a:rPr sz="1800" b="1">
+              <a:t>Let me check History — SwiftPOS can take a few minutes.</a:t>
+            </a:r>
+          </a:p>
+        </p:txBody>
+      </p:sp>
+      <p:sp>
+        <p:nvSpPr>
+          <p:cNvPr id="11" name="TextBox 10"/>
+          <p:cNvSpPr txBox="1"/>
+          <p:nvPr/>
+        </p:nvSpPr>
+        <p:spPr>
+          <a:xfrm>
+            <a:off x="640080" y="3520439"/>
+            <a:ext cx="5029200" cy="365760"/>
+          </a:xfrm>
+          <a:prstGeom prst="rect">
+            <a:avLst/>
+          </a:prstGeom>
+          <a:noFill/>
+        </p:spPr>
+        <p:txBody>
+          <a:bodyPr wrap="square" lIns="0" rIns="0" tIns="0" bIns="0">
+            <a:spAutoFit/>
+          </a:bodyPr>
+          <a:lstStyle/>
+          <a:p>
+            <a:pPr algn="l"/>
+            <a:r>
+              <a:rPr sz="1300" b="1">
                 <a:solidFill>
                   <a:srgbClr val="D4AF5A"/>
                 </a:solidFill>
                 <a:latin typeface="Helvetica"/>
               </a:rPr>
-              <a:t>•   </a:t>
-            </a:r>
-            <a:r>
-              <a:rPr sz="1800">
+              <a:t>"How do I get free entry?"</a:t>
+            </a:r>
+          </a:p>
+        </p:txBody>
+      </p:sp>
+      <p:sp>
+        <p:nvSpPr>
+          <p:cNvPr id="12" name="TextBox 11"/>
+          <p:cNvSpPr txBox="1"/>
+          <p:nvPr/>
+        </p:nvSpPr>
+        <p:spPr>
+          <a:xfrm>
+            <a:off x="5760720" y="3520439"/>
+            <a:ext cx="5943600" cy="365760"/>
+          </a:xfrm>
+          <a:prstGeom prst="rect">
+            <a:avLst/>
+          </a:prstGeom>
+          <a:noFill/>
+        </p:spPr>
+        <p:txBody>
+          <a:bodyPr wrap="square" lIns="0" rIns="0" tIns="0" bIns="0">
+            <a:spAutoFit/>
+          </a:bodyPr>
+          <a:lstStyle/>
+          <a:p>
+            <a:pPr algn="l"/>
+            <a:r>
+              <a:rPr sz="1300" b="0">
                 <a:solidFill>
                   <a:srgbClr val="F0F0F8"/>
                 </a:solidFill>
                 <a:latin typeface="Helvetica"/>
               </a:rPr>
-              <a:t>Wrong venue on receipt  →  do NOT reverse · call manager · they fix in Lovable</a:t>
-            </a:r>
-          </a:p>
-          <a:p>
-            <a:pPr algn="l">
-              <a:spcAft>
-                <a:spcPts val="800"/>
-              </a:spcAft>
-            </a:pPr>
-            <a:r>
-              <a:rPr sz="1800" b="1">
+              <a:t>Lunar subscription gives monthly entries; tier may also unlock.</a:t>
+            </a:r>
+          </a:p>
+        </p:txBody>
+      </p:sp>
+      <p:sp>
+        <p:nvSpPr>
+          <p:cNvPr id="13" name="TextBox 12"/>
+          <p:cNvSpPr txBox="1"/>
+          <p:nvPr/>
+        </p:nvSpPr>
+        <p:spPr>
+          <a:xfrm>
+            <a:off x="640080" y="4023359"/>
+            <a:ext cx="5029200" cy="365760"/>
+          </a:xfrm>
+          <a:prstGeom prst="rect">
+            <a:avLst/>
+          </a:prstGeom>
+          <a:noFill/>
+        </p:spPr>
+        <p:txBody>
+          <a:bodyPr wrap="square" lIns="0" rIns="0" tIns="0" bIns="0">
+            <a:spAutoFit/>
+          </a:bodyPr>
+          <a:lstStyle/>
+          <a:p>
+            <a:pPr algn="l"/>
+            <a:r>
+              <a:rPr sz="1300" b="1">
                 <a:solidFill>
                   <a:srgbClr val="D4AF5A"/>
                 </a:solidFill>
                 <a:latin typeface="Helvetica"/>
               </a:rPr>
-              <a:t>•   </a:t>
-            </a:r>
-            <a:r>
-              <a:rPr sz="1800">
+              <a:t>"What's my tier?"</a:t>
+            </a:r>
+          </a:p>
+        </p:txBody>
+      </p:sp>
+      <p:sp>
+        <p:nvSpPr>
+          <p:cNvPr id="14" name="TextBox 13"/>
+          <p:cNvSpPr txBox="1"/>
+          <p:nvPr/>
+        </p:nvSpPr>
+        <p:spPr>
+          <a:xfrm>
+            <a:off x="5760720" y="4023359"/>
+            <a:ext cx="5943600" cy="365760"/>
+          </a:xfrm>
+          <a:prstGeom prst="rect">
+            <a:avLst/>
+          </a:prstGeom>
+          <a:noFill/>
+        </p:spPr>
+        <p:txBody>
+          <a:bodyPr wrap="square" lIns="0" rIns="0" tIns="0" bIns="0">
+            <a:spAutoFit/>
+          </a:bodyPr>
+          <a:lstStyle/>
+          <a:p>
+            <a:pPr algn="l"/>
+            <a:r>
+              <a:rPr sz="1300" b="0">
                 <a:solidFill>
                   <a:srgbClr val="F0F0F8"/>
                 </a:solidFill>
                 <a:latin typeface="Helvetica"/>
               </a:rPr>
-              <a:t>Duplicate award  →  manager reverses one in Lovable Admin Portal</a:t>
-            </a:r>
-          </a:p>
-        </p:txBody>
-      </p:sp>
-      <p:sp>
-        <p:nvSpPr>
-          <p:cNvPr id="6" name="TextBox 5"/>
+              <a:t>It's on your Profile screen — Bronze · Silver · Gold · Legend.</a:t>
+            </a:r>
+          </a:p>
+        </p:txBody>
+      </p:sp>
+      <p:sp>
+        <p:nvSpPr>
+          <p:cNvPr id="15" name="TextBox 14"/>
+          <p:cNvSpPr txBox="1"/>
+          <p:nvPr/>
+        </p:nvSpPr>
+        <p:spPr>
+          <a:xfrm>
+            <a:off x="640080" y="4526279"/>
+            <a:ext cx="5029200" cy="365760"/>
+          </a:xfrm>
+          <a:prstGeom prst="rect">
+            <a:avLst/>
+          </a:prstGeom>
+          <a:noFill/>
+        </p:spPr>
+        <p:txBody>
+          <a:bodyPr wrap="square" lIns="0" rIns="0" tIns="0" bIns="0">
+            <a:spAutoFit/>
+          </a:bodyPr>
+          <a:lstStyle/>
+          <a:p>
+            <a:pPr algn="l"/>
+            <a:r>
+              <a:rPr sz="1300" b="1">
+                <a:solidFill>
+                  <a:srgbClr val="D4AF5A"/>
+                </a:solidFill>
+                <a:latin typeface="Helvetica"/>
+              </a:rPr>
+              <a:t>"How do referrals work?"</a:t>
+            </a:r>
+          </a:p>
+        </p:txBody>
+      </p:sp>
+      <p:sp>
+        <p:nvSpPr>
+          <p:cNvPr id="16" name="TextBox 15"/>
+          <p:cNvSpPr txBox="1"/>
+          <p:nvPr/>
+        </p:nvSpPr>
+        <p:spPr>
+          <a:xfrm>
+            <a:off x="5760720" y="4526279"/>
+            <a:ext cx="5943600" cy="365760"/>
+          </a:xfrm>
+          <a:prstGeom prst="rect">
+            <a:avLst/>
+          </a:prstGeom>
+          <a:noFill/>
+        </p:spPr>
+        <p:txBody>
+          <a:bodyPr wrap="square" lIns="0" rIns="0" tIns="0" bIns="0">
+            <a:spAutoFit/>
+          </a:bodyPr>
+          <a:lstStyle/>
+          <a:p>
+            <a:pPr algn="l"/>
+            <a:r>
+              <a:rPr sz="1300" b="0">
+                <a:solidFill>
+                  <a:srgbClr val="F0F0F8"/>
+                </a:solidFill>
+                <a:latin typeface="Helvetica"/>
+              </a:rPr>
+              <a:t>Profile → Refer a Friend. You both get bonus points after their first visit.</a:t>
+            </a:r>
+          </a:p>
+        </p:txBody>
+      </p:sp>
+      <p:sp>
+        <p:nvSpPr>
+          <p:cNvPr id="17" name="TextBox 16"/>
+          <p:cNvSpPr txBox="1"/>
+          <p:nvPr/>
+        </p:nvSpPr>
+        <p:spPr>
+          <a:xfrm>
+            <a:off x="640080" y="5029199"/>
+            <a:ext cx="5029200" cy="365760"/>
+          </a:xfrm>
+          <a:prstGeom prst="rect">
+            <a:avLst/>
+          </a:prstGeom>
+          <a:noFill/>
+        </p:spPr>
+        <p:txBody>
+          <a:bodyPr wrap="square" lIns="0" rIns="0" tIns="0" bIns="0">
+            <a:spAutoFit/>
+          </a:bodyPr>
+          <a:lstStyle/>
+          <a:p>
+            <a:pPr algn="l"/>
+            <a:r>
+              <a:rPr sz="1300" b="1">
+                <a:solidFill>
+                  <a:srgbClr val="D4AF5A"/>
+                </a:solidFill>
+                <a:latin typeface="Helvetica"/>
+              </a:rPr>
+              <a:t>"I lost something"</a:t>
+            </a:r>
+          </a:p>
+        </p:txBody>
+      </p:sp>
+      <p:sp>
+        <p:nvSpPr>
+          <p:cNvPr id="18" name="TextBox 17"/>
+          <p:cNvSpPr txBox="1"/>
+          <p:nvPr/>
+        </p:nvSpPr>
+        <p:spPr>
+          <a:xfrm>
+            <a:off x="5760720" y="5029199"/>
+            <a:ext cx="5943600" cy="365760"/>
+          </a:xfrm>
+          <a:prstGeom prst="rect">
+            <a:avLst/>
+          </a:prstGeom>
+          <a:noFill/>
+        </p:spPr>
+        <p:txBody>
+          <a:bodyPr wrap="square" lIns="0" rIns="0" tIns="0" bIns="0">
+            <a:spAutoFit/>
+          </a:bodyPr>
+          <a:lstStyle/>
+          <a:p>
+            <a:pPr algn="l"/>
+            <a:r>
+              <a:rPr sz="1300" b="0">
+                <a:solidFill>
+                  <a:srgbClr val="F0F0F8"/>
+                </a:solidFill>
+                <a:latin typeface="Helvetica"/>
+              </a:rPr>
+              <a:t>App → Lost &amp; Found → Report Missing. We'll match it.</a:t>
+            </a:r>
+          </a:p>
+        </p:txBody>
+      </p:sp>
+      <p:sp>
+        <p:nvSpPr>
+          <p:cNvPr id="19" name="TextBox 18"/>
+          <p:cNvSpPr txBox="1"/>
+          <p:nvPr/>
+        </p:nvSpPr>
+        <p:spPr>
+          <a:xfrm>
+            <a:off x="640080" y="5532119"/>
+            <a:ext cx="5029200" cy="365760"/>
+          </a:xfrm>
+          <a:prstGeom prst="rect">
+            <a:avLst/>
+          </a:prstGeom>
+          <a:noFill/>
+        </p:spPr>
+        <p:txBody>
+          <a:bodyPr wrap="square" lIns="0" rIns="0" tIns="0" bIns="0">
+            <a:spAutoFit/>
+          </a:bodyPr>
+          <a:lstStyle/>
+          <a:p>
+            <a:pPr algn="l"/>
+            <a:r>
+              <a:rPr sz="1300" b="1">
+                <a:solidFill>
+                  <a:srgbClr val="D4AF5A"/>
+                </a:solidFill>
+                <a:latin typeface="Helvetica"/>
+              </a:rPr>
+              <a:t>"Cancel my subscription?"</a:t>
+            </a:r>
+          </a:p>
+        </p:txBody>
+      </p:sp>
+      <p:sp>
+        <p:nvSpPr>
+          <p:cNvPr id="20" name="TextBox 19"/>
+          <p:cNvSpPr txBox="1"/>
+          <p:nvPr/>
+        </p:nvSpPr>
+        <p:spPr>
+          <a:xfrm>
+            <a:off x="5760720" y="5532119"/>
+            <a:ext cx="5943600" cy="365760"/>
+          </a:xfrm>
+          <a:prstGeom prst="rect">
+            <a:avLst/>
+          </a:prstGeom>
+          <a:noFill/>
+        </p:spPr>
+        <p:txBody>
+          <a:bodyPr wrap="square" lIns="0" rIns="0" tIns="0" bIns="0">
+            <a:spAutoFit/>
+          </a:bodyPr>
+          <a:lstStyle/>
+          <a:p>
+            <a:pPr algn="l"/>
+            <a:r>
+              <a:rPr sz="1300" b="0">
+                <a:solidFill>
+                  <a:srgbClr val="F0F0F8"/>
+                </a:solidFill>
+                <a:latin typeface="Helvetica"/>
+              </a:rPr>
+              <a:t>Profile → Subscriptions → Manage. Stripe handles it; access until period-end.</a:t>
+            </a:r>
+          </a:p>
+        </p:txBody>
+      </p:sp>
+      <p:sp>
+        <p:nvSpPr>
+          <p:cNvPr id="21" name="TextBox 20"/>
           <p:cNvSpPr txBox="1"/>
           <p:nvPr/>
         </p:nvSpPr>
@@ -9994,7 +10155,7 @@
       </p:sp>
       <p:sp>
         <p:nvSpPr>
-          <p:cNvPr id="7" name="TextBox 6"/>
+          <p:cNvPr id="22" name="TextBox 21"/>
           <p:cNvSpPr txBox="1"/>
           <p:nvPr/>
         </p:nvSpPr>
@@ -10022,7 +10183,7 @@
                 </a:solidFill>
                 <a:latin typeface="Helvetica"/>
               </a:rPr>
-              <a:t>Module 8 · Troubleshooting</a:t>
+              <a:t>Module 8 · Cheat sheet</a:t>
             </a:r>
           </a:p>
         </p:txBody>
@@ -10036,6 +10197,363 @@
 </file>
 
 <file path=ppt/slides/slide26.xml><?xml version="1.0" encoding="utf-8"?>
+<p:sld xmlns:a="http://schemas.openxmlformats.org/drawingml/2006/main" xmlns:p="http://schemas.openxmlformats.org/presentationml/2006/main" xmlns:r="http://schemas.openxmlformats.org/officeDocument/2006/relationships">
+  <p:cSld>
+    <p:bg>
+      <p:bgPr>
+        <a:solidFill>
+          <a:srgbClr val="08080E"/>
+        </a:solidFill>
+        <a:effectLst/>
+      </p:bgPr>
+    </p:bg>
+    <p:spTree>
+      <p:nvGrpSpPr>
+        <p:cNvPr id="1" name=""/>
+        <p:cNvGrpSpPr/>
+        <p:nvPr/>
+      </p:nvGrpSpPr>
+      <p:grpSpPr/>
+      <p:sp>
+        <p:nvSpPr>
+          <p:cNvPr id="2" name="TextBox 1"/>
+          <p:cNvSpPr txBox="1"/>
+          <p:nvPr/>
+        </p:nvSpPr>
+        <p:spPr>
+          <a:xfrm>
+            <a:off x="548640" y="457200"/>
+            <a:ext cx="10972800" cy="365760"/>
+          </a:xfrm>
+          <a:prstGeom prst="rect">
+            <a:avLst/>
+          </a:prstGeom>
+          <a:noFill/>
+        </p:spPr>
+        <p:txBody>
+          <a:bodyPr wrap="square" lIns="0" rIns="0" tIns="0" bIns="0">
+            <a:spAutoFit/>
+          </a:bodyPr>
+          <a:lstStyle/>
+          <a:p>
+            <a:pPr algn="l"/>
+            <a:r>
+              <a:rPr sz="1200" b="1">
+                <a:solidFill>
+                  <a:srgbClr val="D4AF5A"/>
+                </a:solidFill>
+                <a:latin typeface="Helvetica"/>
+              </a:rPr>
+              <a:t>MODULE 8</a:t>
+            </a:r>
+          </a:p>
+        </p:txBody>
+      </p:sp>
+      <p:sp>
+        <p:nvSpPr>
+          <p:cNvPr id="3" name="TextBox 2"/>
+          <p:cNvSpPr txBox="1"/>
+          <p:nvPr/>
+        </p:nvSpPr>
+        <p:spPr>
+          <a:xfrm>
+            <a:off x="548640" y="868680"/>
+            <a:ext cx="10972800" cy="914400"/>
+          </a:xfrm>
+          <a:prstGeom prst="rect">
+            <a:avLst/>
+          </a:prstGeom>
+          <a:noFill/>
+        </p:spPr>
+        <p:txBody>
+          <a:bodyPr wrap="square" lIns="0" rIns="0" tIns="0" bIns="0">
+            <a:spAutoFit/>
+          </a:bodyPr>
+          <a:lstStyle/>
+          <a:p>
+            <a:pPr algn="l"/>
+            <a:r>
+              <a:rPr sz="3200" b="1">
+                <a:solidFill>
+                  <a:srgbClr val="FFFFFF"/>
+                </a:solidFill>
+                <a:latin typeface="Helvetica"/>
+              </a:rPr>
+              <a:t>Troubleshooting playbook</a:t>
+            </a:r>
+          </a:p>
+        </p:txBody>
+      </p:sp>
+      <p:sp>
+        <p:nvSpPr>
+          <p:cNvPr id="4" name="Rectangle 3"/>
+          <p:cNvSpPr/>
+          <p:nvPr/>
+        </p:nvSpPr>
+        <p:spPr>
+          <a:xfrm>
+            <a:off x="548640" y="1691640"/>
+            <a:ext cx="914400" cy="45720"/>
+          </a:xfrm>
+          <a:prstGeom prst="rect">
+            <a:avLst/>
+          </a:prstGeom>
+          <a:solidFill>
+            <a:srgbClr val="D4AF5A"/>
+          </a:solidFill>
+          <a:ln>
+            <a:noFill/>
+          </a:ln>
+        </p:spPr>
+        <p:style>
+          <a:lnRef idx="1">
+            <a:schemeClr val="accent1"/>
+          </a:lnRef>
+          <a:fillRef idx="3">
+            <a:schemeClr val="accent1"/>
+          </a:fillRef>
+          <a:effectRef idx="2">
+            <a:schemeClr val="accent1"/>
+          </a:effectRef>
+          <a:fontRef idx="minor">
+            <a:schemeClr val="lt1"/>
+          </a:fontRef>
+        </p:style>
+        <p:txBody>
+          <a:bodyPr rtlCol="0" anchor="ctr"/>
+          <a:lstStyle/>
+          <a:p>
+            <a:pPr algn="ctr"/>
+          </a:p>
+        </p:txBody>
+      </p:sp>
+      <p:sp>
+        <p:nvSpPr>
+          <p:cNvPr id="5" name="TextBox 4"/>
+          <p:cNvSpPr txBox="1"/>
+          <p:nvPr/>
+        </p:nvSpPr>
+        <p:spPr>
+          <a:xfrm>
+            <a:off x="640080" y="2011680"/>
+            <a:ext cx="10972800" cy="4572000"/>
+          </a:xfrm>
+          <a:prstGeom prst="rect">
+            <a:avLst/>
+          </a:prstGeom>
+          <a:noFill/>
+        </p:spPr>
+        <p:txBody>
+          <a:bodyPr wrap="square">
+            <a:spAutoFit/>
+          </a:bodyPr>
+          <a:lstStyle/>
+          <a:p>
+            <a:pPr algn="l">
+              <a:spcAft>
+                <a:spcPts val="800"/>
+              </a:spcAft>
+            </a:pPr>
+            <a:r>
+              <a:rPr sz="1800" b="1">
+                <a:solidFill>
+                  <a:srgbClr val="D4AF5A"/>
+                </a:solidFill>
+                <a:latin typeface="Helvetica"/>
+              </a:rPr>
+              <a:t>•   </a:t>
+            </a:r>
+            <a:r>
+              <a:rPr sz="1800">
+                <a:solidFill>
+                  <a:srgbClr val="F0F0F8"/>
+                </a:solidFill>
+                <a:latin typeface="Helvetica"/>
+              </a:rPr>
+              <a:t>Points not showing  →  check History; if absent, re-award + flag manager</a:t>
+            </a:r>
+          </a:p>
+          <a:p>
+            <a:pPr algn="l">
+              <a:spcAft>
+                <a:spcPts val="800"/>
+              </a:spcAft>
+            </a:pPr>
+            <a:r>
+              <a:rPr sz="1800" b="1">
+                <a:solidFill>
+                  <a:srgbClr val="D4AF5A"/>
+                </a:solidFill>
+                <a:latin typeface="Helvetica"/>
+              </a:rPr>
+              <a:t>•   </a:t>
+            </a:r>
+            <a:r>
+              <a:rPr sz="1800">
+                <a:solidFill>
+                  <a:srgbClr val="F0F0F8"/>
+                </a:solidFill>
+                <a:latin typeface="Helvetica"/>
+              </a:rPr>
+              <a:t>QR won't scan  →  brightness up · full-screen Member Card · or search by email</a:t>
+            </a:r>
+          </a:p>
+          <a:p>
+            <a:pPr algn="l">
+              <a:spcAft>
+                <a:spcPts val="800"/>
+              </a:spcAft>
+            </a:pPr>
+            <a:r>
+              <a:rPr sz="1800" b="1">
+                <a:solidFill>
+                  <a:srgbClr val="D4AF5A"/>
+                </a:solidFill>
+                <a:latin typeface="Helvetica"/>
+              </a:rPr>
+              <a:t>•   </a:t>
+            </a:r>
+            <a:r>
+              <a:rPr sz="1800">
+                <a:solidFill>
+                  <a:srgbClr val="F0F0F8"/>
+                </a:solidFill>
+                <a:latin typeface="Helvetica"/>
+              </a:rPr>
+              <a:t>App crashing  →  force close · update · capture screenshot for support</a:t>
+            </a:r>
+          </a:p>
+          <a:p>
+            <a:pPr algn="l">
+              <a:spcAft>
+                <a:spcPts val="800"/>
+              </a:spcAft>
+            </a:pPr>
+            <a:r>
+              <a:rPr sz="1800" b="1">
+                <a:solidFill>
+                  <a:srgbClr val="D4AF5A"/>
+                </a:solidFill>
+                <a:latin typeface="Helvetica"/>
+              </a:rPr>
+              <a:t>•   </a:t>
+            </a:r>
+            <a:r>
+              <a:rPr sz="1800">
+                <a:solidFill>
+                  <a:srgbClr val="F0F0F8"/>
+                </a:solidFill>
+                <a:latin typeface="Helvetica"/>
+              </a:rPr>
+              <a:t>Wrong venue on receipt  →  do NOT reverse · call manager · they fix in Lovable</a:t>
+            </a:r>
+          </a:p>
+          <a:p>
+            <a:pPr algn="l">
+              <a:spcAft>
+                <a:spcPts val="800"/>
+              </a:spcAft>
+            </a:pPr>
+            <a:r>
+              <a:rPr sz="1800" b="1">
+                <a:solidFill>
+                  <a:srgbClr val="D4AF5A"/>
+                </a:solidFill>
+                <a:latin typeface="Helvetica"/>
+              </a:rPr>
+              <a:t>•   </a:t>
+            </a:r>
+            <a:r>
+              <a:rPr sz="1800">
+                <a:solidFill>
+                  <a:srgbClr val="F0F0F8"/>
+                </a:solidFill>
+                <a:latin typeface="Helvetica"/>
+              </a:rPr>
+              <a:t>Duplicate award  →  manager reverses one in Lovable Admin Portal</a:t>
+            </a:r>
+          </a:p>
+        </p:txBody>
+      </p:sp>
+      <p:sp>
+        <p:nvSpPr>
+          <p:cNvPr id="6" name="TextBox 5"/>
+          <p:cNvSpPr txBox="1"/>
+          <p:nvPr/>
+        </p:nvSpPr>
+        <p:spPr>
+          <a:xfrm>
+            <a:off x="548640" y="6446520"/>
+            <a:ext cx="5486400" cy="274320"/>
+          </a:xfrm>
+          <a:prstGeom prst="rect">
+            <a:avLst/>
+          </a:prstGeom>
+          <a:noFill/>
+        </p:spPr>
+        <p:txBody>
+          <a:bodyPr wrap="square" lIns="0" rIns="0" tIns="0" bIns="0">
+            <a:spAutoFit/>
+          </a:bodyPr>
+          <a:lstStyle/>
+          <a:p>
+            <a:pPr algn="l"/>
+            <a:r>
+              <a:rPr sz="900" b="0">
+                <a:solidFill>
+                  <a:srgbClr val="9A95B0"/>
+                </a:solidFill>
+                <a:latin typeface="Helvetica"/>
+              </a:rPr>
+              <a:t>Luna Group VIP · Staff Training</a:t>
+            </a:r>
+          </a:p>
+        </p:txBody>
+      </p:sp>
+      <p:sp>
+        <p:nvSpPr>
+          <p:cNvPr id="7" name="TextBox 6"/>
+          <p:cNvSpPr txBox="1"/>
+          <p:nvPr/>
+        </p:nvSpPr>
+        <p:spPr>
+          <a:xfrm>
+            <a:off x="6858000" y="6446520"/>
+            <a:ext cx="4754880" cy="274320"/>
+          </a:xfrm>
+          <a:prstGeom prst="rect">
+            <a:avLst/>
+          </a:prstGeom>
+          <a:noFill/>
+        </p:spPr>
+        <p:txBody>
+          <a:bodyPr wrap="square" lIns="0" rIns="0" tIns="0" bIns="0">
+            <a:spAutoFit/>
+          </a:bodyPr>
+          <a:lstStyle/>
+          <a:p>
+            <a:pPr algn="r"/>
+            <a:r>
+              <a:rPr sz="900" b="0">
+                <a:solidFill>
+                  <a:srgbClr val="9A95B0"/>
+                </a:solidFill>
+                <a:latin typeface="Helvetica"/>
+              </a:rPr>
+              <a:t>Module 8 · Troubleshooting</a:t>
+            </a:r>
+          </a:p>
+        </p:txBody>
+      </p:sp>
+    </p:spTree>
+  </p:cSld>
+  <p:clrMapOvr>
+    <a:masterClrMapping/>
+  </p:clrMapOvr>
+</p:sld>
+</file>
+
+<file path=ppt/slides/slide27.xml><?xml version="1.0" encoding="utf-8"?>
 <p:sld xmlns:a="http://schemas.openxmlformats.org/drawingml/2006/main" xmlns:p="http://schemas.openxmlformats.org/presentationml/2006/main" xmlns:r="http://schemas.openxmlformats.org/officeDocument/2006/relationships">
   <p:cSld>
     <p:bg>
@@ -10164,388 +10682,6 @@
           <a:lstStyle/>
           <a:p>
             <a:pPr algn="ctr"/>
-          </a:p>
-        </p:txBody>
-      </p:sp>
-    </p:spTree>
-  </p:cSld>
-  <p:clrMapOvr>
-    <a:masterClrMapping/>
-  </p:clrMapOvr>
-</p:sld>
-</file>
-
-<file path=ppt/slides/slide27.xml><?xml version="1.0" encoding="utf-8"?>
-<p:sld xmlns:a="http://schemas.openxmlformats.org/drawingml/2006/main" xmlns:p="http://schemas.openxmlformats.org/presentationml/2006/main" xmlns:r="http://schemas.openxmlformats.org/officeDocument/2006/relationships">
-  <p:cSld>
-    <p:bg>
-      <p:bgPr>
-        <a:solidFill>
-          <a:srgbClr val="08080E"/>
-        </a:solidFill>
-        <a:effectLst/>
-      </p:bgPr>
-    </p:bg>
-    <p:spTree>
-      <p:nvGrpSpPr>
-        <p:cNvPr id="1" name=""/>
-        <p:cNvGrpSpPr/>
-        <p:nvPr/>
-      </p:nvGrpSpPr>
-      <p:grpSpPr/>
-      <p:sp>
-        <p:nvSpPr>
-          <p:cNvPr id="2" name="TextBox 1"/>
-          <p:cNvSpPr txBox="1"/>
-          <p:nvPr/>
-        </p:nvSpPr>
-        <p:spPr>
-          <a:xfrm>
-            <a:off x="548640" y="457200"/>
-            <a:ext cx="10972800" cy="365760"/>
-          </a:xfrm>
-          <a:prstGeom prst="rect">
-            <a:avLst/>
-          </a:prstGeom>
-          <a:noFill/>
-        </p:spPr>
-        <p:txBody>
-          <a:bodyPr wrap="square" lIns="0" rIns="0" tIns="0" bIns="0">
-            <a:spAutoFit/>
-          </a:bodyPr>
-          <a:lstStyle/>
-          <a:p>
-            <a:pPr algn="l"/>
-            <a:r>
-              <a:rPr sz="1200" b="1">
-                <a:solidFill>
-                  <a:srgbClr val="D4AF5A"/>
-                </a:solidFill>
-                <a:latin typeface="Helvetica"/>
-              </a:rPr>
-              <a:t>MODULE 9</a:t>
-            </a:r>
-          </a:p>
-        </p:txBody>
-      </p:sp>
-      <p:sp>
-        <p:nvSpPr>
-          <p:cNvPr id="3" name="TextBox 2"/>
-          <p:cNvSpPr txBox="1"/>
-          <p:nvPr/>
-        </p:nvSpPr>
-        <p:spPr>
-          <a:xfrm>
-            <a:off x="548640" y="868680"/>
-            <a:ext cx="10972800" cy="914400"/>
-          </a:xfrm>
-          <a:prstGeom prst="rect">
-            <a:avLst/>
-          </a:prstGeom>
-          <a:noFill/>
-        </p:spPr>
-        <p:txBody>
-          <a:bodyPr wrap="square" lIns="0" rIns="0" tIns="0" bIns="0">
-            <a:spAutoFit/>
-          </a:bodyPr>
-          <a:lstStyle/>
-          <a:p>
-            <a:pPr algn="l"/>
-            <a:r>
-              <a:rPr sz="3200" b="1">
-                <a:solidFill>
-                  <a:srgbClr val="FFFFFF"/>
-                </a:solidFill>
-                <a:latin typeface="Helvetica"/>
-              </a:rPr>
-              <a:t>Drills — pair up and demonstrate</a:t>
-            </a:r>
-          </a:p>
-        </p:txBody>
-      </p:sp>
-      <p:sp>
-        <p:nvSpPr>
-          <p:cNvPr id="4" name="Rectangle 3"/>
-          <p:cNvSpPr/>
-          <p:nvPr/>
-        </p:nvSpPr>
-        <p:spPr>
-          <a:xfrm>
-            <a:off x="548640" y="1691640"/>
-            <a:ext cx="914400" cy="45720"/>
-          </a:xfrm>
-          <a:prstGeom prst="rect">
-            <a:avLst/>
-          </a:prstGeom>
-          <a:solidFill>
-            <a:srgbClr val="D4AF5A"/>
-          </a:solidFill>
-          <a:ln>
-            <a:noFill/>
-          </a:ln>
-        </p:spPr>
-        <p:style>
-          <a:lnRef idx="1">
-            <a:schemeClr val="accent1"/>
-          </a:lnRef>
-          <a:fillRef idx="3">
-            <a:schemeClr val="accent1"/>
-          </a:fillRef>
-          <a:effectRef idx="2">
-            <a:schemeClr val="accent1"/>
-          </a:effectRef>
-          <a:fontRef idx="minor">
-            <a:schemeClr val="lt1"/>
-          </a:fontRef>
-        </p:style>
-        <p:txBody>
-          <a:bodyPr rtlCol="0" anchor="ctr"/>
-          <a:lstStyle/>
-          <a:p>
-            <a:pPr algn="ctr"/>
-          </a:p>
-        </p:txBody>
-      </p:sp>
-      <p:sp>
-        <p:nvSpPr>
-          <p:cNvPr id="5" name="TextBox 4"/>
-          <p:cNvSpPr txBox="1"/>
-          <p:nvPr/>
-        </p:nvSpPr>
-        <p:spPr>
-          <a:xfrm>
-            <a:off x="640080" y="2011680"/>
-            <a:ext cx="10972800" cy="4572000"/>
-          </a:xfrm>
-          <a:prstGeom prst="rect">
-            <a:avLst/>
-          </a:prstGeom>
-          <a:noFill/>
-        </p:spPr>
-        <p:txBody>
-          <a:bodyPr wrap="square">
-            <a:spAutoFit/>
-          </a:bodyPr>
-          <a:lstStyle/>
-          <a:p>
-            <a:pPr algn="l">
-              <a:spcAft>
-                <a:spcPts val="800"/>
-              </a:spcAft>
-            </a:pPr>
-            <a:r>
-              <a:rPr sz="1800" b="1">
-                <a:solidFill>
-                  <a:srgbClr val="D4AF5A"/>
-                </a:solidFill>
-                <a:latin typeface="Helvetica"/>
-              </a:rPr>
-              <a:t>•   </a:t>
-            </a:r>
-            <a:r>
-              <a:rPr sz="1800">
-                <a:solidFill>
-                  <a:srgbClr val="F0F0F8"/>
-                </a:solidFill>
-                <a:latin typeface="Helvetica"/>
-              </a:rPr>
-              <a:t>DRILL 1 · Award $85 of drinks at Eclipse with receipt ref</a:t>
-            </a:r>
-          </a:p>
-          <a:p>
-            <a:pPr algn="l">
-              <a:spcAft>
-                <a:spcPts val="800"/>
-              </a:spcAft>
-            </a:pPr>
-            <a:r>
-              <a:rPr sz="1800" b="1">
-                <a:solidFill>
-                  <a:srgbClr val="D4AF5A"/>
-                </a:solidFill>
-                <a:latin typeface="Helvetica"/>
-              </a:rPr>
-              <a:t>•   </a:t>
-            </a:r>
-            <a:r>
-              <a:rPr sz="1800">
-                <a:solidFill>
-                  <a:srgbClr val="F0F0F8"/>
-                </a:solidFill>
-                <a:latin typeface="Helvetica"/>
-              </a:rPr>
-              <a:t>DRILL 2 · Validate a LUNA-DRINK- QR at the bar</a:t>
-            </a:r>
-          </a:p>
-          <a:p>
-            <a:pPr algn="l">
-              <a:spcAft>
-                <a:spcPts val="800"/>
-              </a:spcAft>
-            </a:pPr>
-            <a:r>
-              <a:rPr sz="1800" b="1">
-                <a:solidFill>
-                  <a:srgbClr val="D4AF5A"/>
-                </a:solidFill>
-                <a:latin typeface="Helvetica"/>
-              </a:rPr>
-              <a:t>•   </a:t>
-            </a:r>
-            <a:r>
-              <a:rPr sz="1800">
-                <a:solidFill>
-                  <a:srgbClr val="F0F0F8"/>
-                </a:solidFill>
-                <a:latin typeface="Helvetica"/>
-              </a:rPr>
-              <a:t>DRILL 3 · Validate a LUNA-ENT- QR at the door (wrong venue first → see error)</a:t>
-            </a:r>
-          </a:p>
-          <a:p>
-            <a:pPr algn="l">
-              <a:spcAft>
-                <a:spcPts val="800"/>
-              </a:spcAft>
-            </a:pPr>
-            <a:r>
-              <a:rPr sz="1800" b="1">
-                <a:solidFill>
-                  <a:srgbClr val="D4AF5A"/>
-                </a:solidFill>
-                <a:latin typeface="Helvetica"/>
-              </a:rPr>
-              <a:t>•   </a:t>
-            </a:r>
-            <a:r>
-              <a:rPr sz="1800">
-                <a:solidFill>
-                  <a:srgbClr val="F0F0F8"/>
-                </a:solidFill>
-                <a:latin typeface="Helvetica"/>
-              </a:rPr>
-              <a:t>DRILL 4 · Search a member by phone, then by QR scan</a:t>
-            </a:r>
-          </a:p>
-          <a:p>
-            <a:pPr algn="l">
-              <a:spcAft>
-                <a:spcPts val="800"/>
-              </a:spcAft>
-            </a:pPr>
-            <a:r>
-              <a:rPr sz="1800" b="1">
-                <a:solidFill>
-                  <a:srgbClr val="D4AF5A"/>
-                </a:solidFill>
-                <a:latin typeface="Helvetica"/>
-              </a:rPr>
-              <a:t>•   </a:t>
-            </a:r>
-            <a:r>
-              <a:rPr sz="1800">
-                <a:solidFill>
-                  <a:srgbClr val="F0F0F8"/>
-                </a:solidFill>
-                <a:latin typeface="Helvetica"/>
-              </a:rPr>
-              <a:t>DRILL 5 · Investigate a fake "missing points" complaint via History</a:t>
-            </a:r>
-          </a:p>
-          <a:p>
-            <a:pPr algn="l">
-              <a:spcAft>
-                <a:spcPts val="800"/>
-              </a:spcAft>
-            </a:pPr>
-            <a:r>
-              <a:rPr sz="1800" b="1">
-                <a:solidFill>
-                  <a:srgbClr val="D4AF5A"/>
-                </a:solidFill>
-                <a:latin typeface="Helvetica"/>
-              </a:rPr>
-              <a:t>•   </a:t>
-            </a:r>
-            <a:r>
-              <a:rPr sz="1800">
-                <a:solidFill>
-                  <a:srgbClr val="F0F0F8"/>
-                </a:solidFill>
-                <a:latin typeface="Helvetica"/>
-              </a:rPr>
-              <a:t>DRILL 6 · Manager only: issue a Gift-Points override with a written reason</a:t>
-            </a:r>
-          </a:p>
-        </p:txBody>
-      </p:sp>
-      <p:sp>
-        <p:nvSpPr>
-          <p:cNvPr id="6" name="TextBox 5"/>
-          <p:cNvSpPr txBox="1"/>
-          <p:nvPr/>
-        </p:nvSpPr>
-        <p:spPr>
-          <a:xfrm>
-            <a:off x="548640" y="6446520"/>
-            <a:ext cx="5486400" cy="274320"/>
-          </a:xfrm>
-          <a:prstGeom prst="rect">
-            <a:avLst/>
-          </a:prstGeom>
-          <a:noFill/>
-        </p:spPr>
-        <p:txBody>
-          <a:bodyPr wrap="square" lIns="0" rIns="0" tIns="0" bIns="0">
-            <a:spAutoFit/>
-          </a:bodyPr>
-          <a:lstStyle/>
-          <a:p>
-            <a:pPr algn="l"/>
-            <a:r>
-              <a:rPr sz="900" b="0">
-                <a:solidFill>
-                  <a:srgbClr val="9A95B0"/>
-                </a:solidFill>
-                <a:latin typeface="Helvetica"/>
-              </a:rPr>
-              <a:t>Luna Group VIP · Staff Training</a:t>
-            </a:r>
-          </a:p>
-        </p:txBody>
-      </p:sp>
-      <p:sp>
-        <p:nvSpPr>
-          <p:cNvPr id="7" name="TextBox 6"/>
-          <p:cNvSpPr txBox="1"/>
-          <p:nvPr/>
-        </p:nvSpPr>
-        <p:spPr>
-          <a:xfrm>
-            <a:off x="6858000" y="6446520"/>
-            <a:ext cx="4754880" cy="274320"/>
-          </a:xfrm>
-          <a:prstGeom prst="rect">
-            <a:avLst/>
-          </a:prstGeom>
-          <a:noFill/>
-        </p:spPr>
-        <p:txBody>
-          <a:bodyPr wrap="square" lIns="0" rIns="0" tIns="0" bIns="0">
-            <a:spAutoFit/>
-          </a:bodyPr>
-          <a:lstStyle/>
-          <a:p>
-            <a:pPr algn="r"/>
-            <a:r>
-              <a:rPr sz="900" b="0">
-                <a:solidFill>
-                  <a:srgbClr val="9A95B0"/>
-                </a:solidFill>
-                <a:latin typeface="Helvetica"/>
-              </a:rPr>
-              <a:t>Module 9 · Drills</a:t>
-            </a:r>
           </a:p>
         </p:txBody>
       </p:sp>
@@ -10640,7 +10776,7 @@
                 </a:solidFill>
                 <a:latin typeface="Helvetica"/>
               </a:rPr>
-              <a:t>Sign-off — each trainee must demonstrate</a:t>
+              <a:t>Drills — pair up and demonstrate</a:t>
             </a:r>
           </a:p>
         </p:txBody>
@@ -10716,7 +10852,7 @@
               </a:spcAft>
             </a:pPr>
             <a:r>
-              <a:rPr sz="1700" b="1">
+              <a:rPr sz="1800" b="1">
                 <a:solidFill>
                   <a:srgbClr val="D4AF5A"/>
                 </a:solidFill>
@@ -10725,13 +10861,13 @@
               <a:t>•   </a:t>
             </a:r>
             <a:r>
-              <a:rPr sz="1700">
+              <a:rPr sz="1800">
                 <a:solidFill>
                   <a:srgbClr val="F0F0F8"/>
                 </a:solidFill>
                 <a:latin typeface="Helvetica"/>
               </a:rPr>
-              <a:t>✓ Log in and select correct venue</a:t>
+              <a:t>DRILL 1 · Award $85 of drinks at Eclipse with receipt ref</a:t>
             </a:r>
           </a:p>
           <a:p>
@@ -10741,7 +10877,7 @@
               </a:spcAft>
             </a:pPr>
             <a:r>
-              <a:rPr sz="1700" b="1">
+              <a:rPr sz="1800" b="1">
                 <a:solidFill>
                   <a:srgbClr val="D4AF5A"/>
                 </a:solidFill>
@@ -10750,13 +10886,13 @@
               <a:t>•   </a:t>
             </a:r>
             <a:r>
-              <a:rPr sz="1700">
+              <a:rPr sz="1800">
                 <a:solidFill>
                   <a:srgbClr val="F0F0F8"/>
                 </a:solidFill>
                 <a:latin typeface="Helvetica"/>
               </a:rPr>
-              <a:t>✓ Search by name · email · QR scan (all three)</a:t>
+              <a:t>DRILL 2 · Validate a LUNA-DRINK- QR at the bar</a:t>
             </a:r>
           </a:p>
           <a:p>
@@ -10766,7 +10902,7 @@
               </a:spcAft>
             </a:pPr>
             <a:r>
-              <a:rPr sz="1700" b="1">
+              <a:rPr sz="1800" b="1">
                 <a:solidFill>
                   <a:srgbClr val="D4AF5A"/>
                 </a:solidFill>
@@ -10775,13 +10911,13 @@
               <a:t>•   </a:t>
             </a:r>
             <a:r>
-              <a:rPr sz="1700">
+              <a:rPr sz="1800">
                 <a:solidFill>
                   <a:srgbClr val="F0F0F8"/>
                 </a:solidFill>
                 <a:latin typeface="Helvetica"/>
               </a:rPr>
-              <a:t>✓ Quick-award with category + receipt ref</a:t>
+              <a:t>DRILL 3 · Validate a LUNA-ENT- QR at the door (wrong venue first → see error)</a:t>
             </a:r>
           </a:p>
           <a:p>
@@ -10791,7 +10927,7 @@
               </a:spcAft>
             </a:pPr>
             <a:r>
-              <a:rPr sz="1700" b="1">
+              <a:rPr sz="1800" b="1">
                 <a:solidFill>
                   <a:srgbClr val="D4AF5A"/>
                 </a:solidFill>
@@ -10800,13 +10936,13 @@
               <a:t>•   </a:t>
             </a:r>
             <a:r>
-              <a:rPr sz="1700">
+              <a:rPr sz="1800">
                 <a:solidFill>
                   <a:srgbClr val="F0F0F8"/>
                 </a:solidFill>
                 <a:latin typeface="Helvetica"/>
               </a:rPr>
-              <a:t>✓ Validate every QR type (MEMBER · ENT · TKT · DRINK · BDAY · generic)</a:t>
+              <a:t>DRILL 4 · Search a member by phone, then by QR scan</a:t>
             </a:r>
           </a:p>
           <a:p>
@@ -10816,7 +10952,7 @@
               </a:spcAft>
             </a:pPr>
             <a:r>
-              <a:rPr sz="1700" b="1">
+              <a:rPr sz="1800" b="1">
                 <a:solidFill>
                   <a:srgbClr val="D4AF5A"/>
                 </a:solidFill>
@@ -10825,13 +10961,13 @@
               <a:t>•   </a:t>
             </a:r>
             <a:r>
-              <a:rPr sz="1700">
+              <a:rPr sz="1800">
                 <a:solidFill>
                   <a:srgbClr val="F0F0F8"/>
                 </a:solidFill>
                 <a:latin typeface="Helvetica"/>
               </a:rPr>
-              <a:t>✓ Explain base tier vs subscription tier</a:t>
+              <a:t>DRILL 5 · Investigate a fake "missing points" complaint via History</a:t>
             </a:r>
           </a:p>
           <a:p>
@@ -10841,7 +10977,7 @@
               </a:spcAft>
             </a:pPr>
             <a:r>
-              <a:rPr sz="1700" b="1">
+              <a:rPr sz="1800" b="1">
                 <a:solidFill>
                   <a:srgbClr val="D4AF5A"/>
                 </a:solidFill>
@@ -10850,88 +10986,13 @@
               <a:t>•   </a:t>
             </a:r>
             <a:r>
-              <a:rPr sz="1700">
+              <a:rPr sz="1800">
                 <a:solidFill>
                   <a:srgbClr val="F0F0F8"/>
                 </a:solidFill>
                 <a:latin typeface="Helvetica"/>
               </a:rPr>
-              <a:t>✓ Walk a member to their Member Card</a:t>
-            </a:r>
-          </a:p>
-          <a:p>
-            <a:pPr algn="l">
-              <a:spcAft>
-                <a:spcPts val="800"/>
-              </a:spcAft>
-            </a:pPr>
-            <a:r>
-              <a:rPr sz="1700" b="1">
-                <a:solidFill>
-                  <a:srgbClr val="D4AF5A"/>
-                </a:solidFill>
-                <a:latin typeface="Helvetica"/>
-              </a:rPr>
-              <a:t>•   </a:t>
-            </a:r>
-            <a:r>
-              <a:rPr sz="1700">
-                <a:solidFill>
-                  <a:srgbClr val="F0F0F8"/>
-                </a:solidFill>
-                <a:latin typeface="Helvetica"/>
-              </a:rPr>
-              <a:t>✓ Triage a missing-points complaint</a:t>
-            </a:r>
-          </a:p>
-          <a:p>
-            <a:pPr algn="l">
-              <a:spcAft>
-                <a:spcPts val="800"/>
-              </a:spcAft>
-            </a:pPr>
-            <a:r>
-              <a:rPr sz="1700" b="1">
-                <a:solidFill>
-                  <a:srgbClr val="D4AF5A"/>
-                </a:solidFill>
-                <a:latin typeface="Helvetica"/>
-              </a:rPr>
-              <a:t>•   </a:t>
-            </a:r>
-            <a:r>
-              <a:rPr sz="1700">
-                <a:solidFill>
-                  <a:srgbClr val="F0F0F8"/>
-                </a:solidFill>
-                <a:latin typeface="Helvetica"/>
-              </a:rPr>
-              <a:t>✓ Explain (don't fire) the SOS workflow</a:t>
-            </a:r>
-          </a:p>
-          <a:p>
-            <a:pPr algn="l">
-              <a:spcAft>
-                <a:spcPts val="800"/>
-              </a:spcAft>
-            </a:pPr>
-            <a:r>
-              <a:rPr sz="1700" b="1">
-                <a:solidFill>
-                  <a:srgbClr val="D4AF5A"/>
-                </a:solidFill>
-                <a:latin typeface="Helvetica"/>
-              </a:rPr>
-              <a:t>•   </a:t>
-            </a:r>
-            <a:r>
-              <a:rPr sz="1700">
-                <a:solidFill>
-                  <a:srgbClr val="F0F0F8"/>
-                </a:solidFill>
-                <a:latin typeface="Helvetica"/>
-              </a:rPr>
-              <a:t>✓ Identify when to escalate to manager / Luna Hub</a:t>
+              <a:t>DRILL 6 · Manager only: issue a Gift-Points override with a written reason</a:t>
             </a:r>
           </a:p>
         </p:txBody>
@@ -11001,7 +11062,7 @@
                 </a:solidFill>
                 <a:latin typeface="Helvetica"/>
               </a:rPr>
-              <a:t>Module 9 · Sign-off</a:t>
+              <a:t>Module 9 · Drills</a:t>
             </a:r>
           </a:p>
         </p:txBody>
@@ -11020,7 +11081,7 @@
     <p:bg>
       <p:bgPr>
         <a:solidFill>
-          <a:srgbClr val="1A1530"/>
+          <a:srgbClr val="08080E"/>
         </a:solidFill>
         <a:effectLst/>
       </p:bgPr>
@@ -11040,8 +11101,8 @@
         </p:nvSpPr>
         <p:spPr>
           <a:xfrm>
-            <a:off x="640080" y="2377440"/>
-            <a:ext cx="10972800" cy="1097280"/>
+            <a:off x="548640" y="457200"/>
+            <a:ext cx="10972800" cy="365760"/>
           </a:xfrm>
           <a:prstGeom prst="rect">
             <a:avLst/>
@@ -11054,29 +11115,355 @@
           </a:bodyPr>
           <a:lstStyle/>
           <a:p>
+            <a:pPr algn="l"/>
+            <a:r>
+              <a:rPr sz="1200" b="1">
+                <a:solidFill>
+                  <a:srgbClr val="D4AF5A"/>
+                </a:solidFill>
+                <a:latin typeface="Helvetica"/>
+              </a:rPr>
+              <a:t>MODULE 9</a:t>
+            </a:r>
+          </a:p>
+        </p:txBody>
+      </p:sp>
+      <p:sp>
+        <p:nvSpPr>
+          <p:cNvPr id="3" name="TextBox 2"/>
+          <p:cNvSpPr txBox="1"/>
+          <p:nvPr/>
+        </p:nvSpPr>
+        <p:spPr>
+          <a:xfrm>
+            <a:off x="548640" y="868680"/>
+            <a:ext cx="10972800" cy="914400"/>
+          </a:xfrm>
+          <a:prstGeom prst="rect">
+            <a:avLst/>
+          </a:prstGeom>
+          <a:noFill/>
+        </p:spPr>
+        <p:txBody>
+          <a:bodyPr wrap="square" lIns="0" rIns="0" tIns="0" bIns="0">
+            <a:spAutoFit/>
+          </a:bodyPr>
+          <a:lstStyle/>
+          <a:p>
+            <a:pPr algn="l"/>
+            <a:r>
+              <a:rPr sz="3200" b="1">
+                <a:solidFill>
+                  <a:srgbClr val="FFFFFF"/>
+                </a:solidFill>
+                <a:latin typeface="Helvetica"/>
+              </a:rPr>
+              <a:t>Sign-off — each trainee must demonstrate</a:t>
+            </a:r>
+          </a:p>
+        </p:txBody>
+      </p:sp>
+      <p:sp>
+        <p:nvSpPr>
+          <p:cNvPr id="4" name="Rectangle 3"/>
+          <p:cNvSpPr/>
+          <p:nvPr/>
+        </p:nvSpPr>
+        <p:spPr>
+          <a:xfrm>
+            <a:off x="548640" y="1691640"/>
+            <a:ext cx="914400" cy="45720"/>
+          </a:xfrm>
+          <a:prstGeom prst="rect">
+            <a:avLst/>
+          </a:prstGeom>
+          <a:solidFill>
+            <a:srgbClr val="D4AF5A"/>
+          </a:solidFill>
+          <a:ln>
+            <a:noFill/>
+          </a:ln>
+        </p:spPr>
+        <p:style>
+          <a:lnRef idx="1">
+            <a:schemeClr val="accent1"/>
+          </a:lnRef>
+          <a:fillRef idx="3">
+            <a:schemeClr val="accent1"/>
+          </a:fillRef>
+          <a:effectRef idx="2">
+            <a:schemeClr val="accent1"/>
+          </a:effectRef>
+          <a:fontRef idx="minor">
+            <a:schemeClr val="lt1"/>
+          </a:fontRef>
+        </p:style>
+        <p:txBody>
+          <a:bodyPr rtlCol="0" anchor="ctr"/>
+          <a:lstStyle/>
+          <a:p>
             <a:pPr algn="ctr"/>
-            <a:r>
-              <a:rPr sz="5200" b="1">
-                <a:solidFill>
-                  <a:srgbClr val="FFFFFF"/>
-                </a:solidFill>
-                <a:latin typeface="Helvetica"/>
-              </a:rPr>
-              <a:t>WELCOME TO THE TEAM</a:t>
-            </a:r>
-          </a:p>
-        </p:txBody>
-      </p:sp>
-      <p:sp>
-        <p:nvSpPr>
-          <p:cNvPr id="3" name="TextBox 2"/>
-          <p:cNvSpPr txBox="1"/>
-          <p:nvPr/>
-        </p:nvSpPr>
-        <p:spPr>
-          <a:xfrm>
-            <a:off x="640080" y="3840480"/>
-            <a:ext cx="10972800" cy="731520"/>
+          </a:p>
+        </p:txBody>
+      </p:sp>
+      <p:sp>
+        <p:nvSpPr>
+          <p:cNvPr id="5" name="TextBox 4"/>
+          <p:cNvSpPr txBox="1"/>
+          <p:nvPr/>
+        </p:nvSpPr>
+        <p:spPr>
+          <a:xfrm>
+            <a:off x="640080" y="2011680"/>
+            <a:ext cx="10972800" cy="4572000"/>
+          </a:xfrm>
+          <a:prstGeom prst="rect">
+            <a:avLst/>
+          </a:prstGeom>
+          <a:noFill/>
+        </p:spPr>
+        <p:txBody>
+          <a:bodyPr wrap="square">
+            <a:spAutoFit/>
+          </a:bodyPr>
+          <a:lstStyle/>
+          <a:p>
+            <a:pPr algn="l">
+              <a:spcAft>
+                <a:spcPts val="800"/>
+              </a:spcAft>
+            </a:pPr>
+            <a:r>
+              <a:rPr sz="1700" b="1">
+                <a:solidFill>
+                  <a:srgbClr val="D4AF5A"/>
+                </a:solidFill>
+                <a:latin typeface="Helvetica"/>
+              </a:rPr>
+              <a:t>•   </a:t>
+            </a:r>
+            <a:r>
+              <a:rPr sz="1700">
+                <a:solidFill>
+                  <a:srgbClr val="F0F0F8"/>
+                </a:solidFill>
+                <a:latin typeface="Helvetica"/>
+              </a:rPr>
+              <a:t>✓ Log in and select correct venue</a:t>
+            </a:r>
+          </a:p>
+          <a:p>
+            <a:pPr algn="l">
+              <a:spcAft>
+                <a:spcPts val="800"/>
+              </a:spcAft>
+            </a:pPr>
+            <a:r>
+              <a:rPr sz="1700" b="1">
+                <a:solidFill>
+                  <a:srgbClr val="D4AF5A"/>
+                </a:solidFill>
+                <a:latin typeface="Helvetica"/>
+              </a:rPr>
+              <a:t>•   </a:t>
+            </a:r>
+            <a:r>
+              <a:rPr sz="1700">
+                <a:solidFill>
+                  <a:srgbClr val="F0F0F8"/>
+                </a:solidFill>
+                <a:latin typeface="Helvetica"/>
+              </a:rPr>
+              <a:t>✓ Search by name · email · QR scan (all three)</a:t>
+            </a:r>
+          </a:p>
+          <a:p>
+            <a:pPr algn="l">
+              <a:spcAft>
+                <a:spcPts val="800"/>
+              </a:spcAft>
+            </a:pPr>
+            <a:r>
+              <a:rPr sz="1700" b="1">
+                <a:solidFill>
+                  <a:srgbClr val="D4AF5A"/>
+                </a:solidFill>
+                <a:latin typeface="Helvetica"/>
+              </a:rPr>
+              <a:t>•   </a:t>
+            </a:r>
+            <a:r>
+              <a:rPr sz="1700">
+                <a:solidFill>
+                  <a:srgbClr val="F0F0F8"/>
+                </a:solidFill>
+                <a:latin typeface="Helvetica"/>
+              </a:rPr>
+              <a:t>✓ Quick-award with category + receipt ref</a:t>
+            </a:r>
+          </a:p>
+          <a:p>
+            <a:pPr algn="l">
+              <a:spcAft>
+                <a:spcPts val="800"/>
+              </a:spcAft>
+            </a:pPr>
+            <a:r>
+              <a:rPr sz="1700" b="1">
+                <a:solidFill>
+                  <a:srgbClr val="D4AF5A"/>
+                </a:solidFill>
+                <a:latin typeface="Helvetica"/>
+              </a:rPr>
+              <a:t>•   </a:t>
+            </a:r>
+            <a:r>
+              <a:rPr sz="1700">
+                <a:solidFill>
+                  <a:srgbClr val="F0F0F8"/>
+                </a:solidFill>
+                <a:latin typeface="Helvetica"/>
+              </a:rPr>
+              <a:t>✓ Validate every QR type (MEMBER · ENT · TKT · DRINK · BDAY · generic)</a:t>
+            </a:r>
+          </a:p>
+          <a:p>
+            <a:pPr algn="l">
+              <a:spcAft>
+                <a:spcPts val="800"/>
+              </a:spcAft>
+            </a:pPr>
+            <a:r>
+              <a:rPr sz="1700" b="1">
+                <a:solidFill>
+                  <a:srgbClr val="D4AF5A"/>
+                </a:solidFill>
+                <a:latin typeface="Helvetica"/>
+              </a:rPr>
+              <a:t>•   </a:t>
+            </a:r>
+            <a:r>
+              <a:rPr sz="1700">
+                <a:solidFill>
+                  <a:srgbClr val="F0F0F8"/>
+                </a:solidFill>
+                <a:latin typeface="Helvetica"/>
+              </a:rPr>
+              <a:t>✓ Explain base tier vs subscription tier</a:t>
+            </a:r>
+          </a:p>
+          <a:p>
+            <a:pPr algn="l">
+              <a:spcAft>
+                <a:spcPts val="800"/>
+              </a:spcAft>
+            </a:pPr>
+            <a:r>
+              <a:rPr sz="1700" b="1">
+                <a:solidFill>
+                  <a:srgbClr val="D4AF5A"/>
+                </a:solidFill>
+                <a:latin typeface="Helvetica"/>
+              </a:rPr>
+              <a:t>•   </a:t>
+            </a:r>
+            <a:r>
+              <a:rPr sz="1700">
+                <a:solidFill>
+                  <a:srgbClr val="F0F0F8"/>
+                </a:solidFill>
+                <a:latin typeface="Helvetica"/>
+              </a:rPr>
+              <a:t>✓ Walk a member to their Member Card</a:t>
+            </a:r>
+          </a:p>
+          <a:p>
+            <a:pPr algn="l">
+              <a:spcAft>
+                <a:spcPts val="800"/>
+              </a:spcAft>
+            </a:pPr>
+            <a:r>
+              <a:rPr sz="1700" b="1">
+                <a:solidFill>
+                  <a:srgbClr val="D4AF5A"/>
+                </a:solidFill>
+                <a:latin typeface="Helvetica"/>
+              </a:rPr>
+              <a:t>•   </a:t>
+            </a:r>
+            <a:r>
+              <a:rPr sz="1700">
+                <a:solidFill>
+                  <a:srgbClr val="F0F0F8"/>
+                </a:solidFill>
+                <a:latin typeface="Helvetica"/>
+              </a:rPr>
+              <a:t>✓ Triage a missing-points complaint</a:t>
+            </a:r>
+          </a:p>
+          <a:p>
+            <a:pPr algn="l">
+              <a:spcAft>
+                <a:spcPts val="800"/>
+              </a:spcAft>
+            </a:pPr>
+            <a:r>
+              <a:rPr sz="1700" b="1">
+                <a:solidFill>
+                  <a:srgbClr val="D4AF5A"/>
+                </a:solidFill>
+                <a:latin typeface="Helvetica"/>
+              </a:rPr>
+              <a:t>•   </a:t>
+            </a:r>
+            <a:r>
+              <a:rPr sz="1700">
+                <a:solidFill>
+                  <a:srgbClr val="F0F0F8"/>
+                </a:solidFill>
+                <a:latin typeface="Helvetica"/>
+              </a:rPr>
+              <a:t>✓ Explain (don't fire) the SOS workflow</a:t>
+            </a:r>
+          </a:p>
+          <a:p>
+            <a:pPr algn="l">
+              <a:spcAft>
+                <a:spcPts val="800"/>
+              </a:spcAft>
+            </a:pPr>
+            <a:r>
+              <a:rPr sz="1700" b="1">
+                <a:solidFill>
+                  <a:srgbClr val="D4AF5A"/>
+                </a:solidFill>
+                <a:latin typeface="Helvetica"/>
+              </a:rPr>
+              <a:t>•   </a:t>
+            </a:r>
+            <a:r>
+              <a:rPr sz="1700">
+                <a:solidFill>
+                  <a:srgbClr val="F0F0F8"/>
+                </a:solidFill>
+                <a:latin typeface="Helvetica"/>
+              </a:rPr>
+              <a:t>✓ Identify when to escalate to manager / Luna Hub</a:t>
+            </a:r>
+          </a:p>
+        </p:txBody>
+      </p:sp>
+      <p:sp>
+        <p:nvSpPr>
+          <p:cNvPr id="6" name="TextBox 5"/>
+          <p:cNvSpPr txBox="1"/>
+          <p:nvPr/>
+        </p:nvSpPr>
+        <p:spPr>
+          <a:xfrm>
+            <a:off x="548640" y="6446520"/>
+            <a:ext cx="5486400" cy="274320"/>
           </a:xfrm>
           <a:prstGeom prst="rect">
             <a:avLst/>
@@ -11089,29 +11476,29 @@
           </a:bodyPr>
           <a:lstStyle/>
           <a:p>
-            <a:pPr algn="ctr"/>
-            <a:r>
-              <a:rPr sz="2000" b="0">
-                <a:solidFill>
-                  <a:srgbClr val="D4AF5A"/>
-                </a:solidFill>
-                <a:latin typeface="Helvetica"/>
-              </a:rPr>
-              <a:t>Now go make every Luna night unforgettable.</a:t>
-            </a:r>
-          </a:p>
-        </p:txBody>
-      </p:sp>
-      <p:sp>
-        <p:nvSpPr>
-          <p:cNvPr id="4" name="TextBox 3"/>
-          <p:cNvSpPr txBox="1"/>
-          <p:nvPr/>
-        </p:nvSpPr>
-        <p:spPr>
-          <a:xfrm>
-            <a:off x="640080" y="5760720"/>
-            <a:ext cx="10972800" cy="365760"/>
+            <a:pPr algn="l"/>
+            <a:r>
+              <a:rPr sz="900" b="0">
+                <a:solidFill>
+                  <a:srgbClr val="9A95B0"/>
+                </a:solidFill>
+                <a:latin typeface="Helvetica"/>
+              </a:rPr>
+              <a:t>Luna Group VIP · Staff Training</a:t>
+            </a:r>
+          </a:p>
+        </p:txBody>
+      </p:sp>
+      <p:sp>
+        <p:nvSpPr>
+          <p:cNvPr id="7" name="TextBox 6"/>
+          <p:cNvSpPr txBox="1"/>
+          <p:nvPr/>
+        </p:nvSpPr>
+        <p:spPr>
+          <a:xfrm>
+            <a:off x="6858000" y="6446520"/>
+            <a:ext cx="4754880" cy="274320"/>
           </a:xfrm>
           <a:prstGeom prst="rect">
             <a:avLst/>
@@ -11124,15 +11511,15 @@
           </a:bodyPr>
           <a:lstStyle/>
           <a:p>
-            <a:pPr algn="ctr"/>
-            <a:r>
-              <a:rPr sz="1200" b="0">
+            <a:pPr algn="r"/>
+            <a:r>
+              <a:rPr sz="900" b="0">
                 <a:solidFill>
                   <a:srgbClr val="9A95B0"/>
                 </a:solidFill>
                 <a:latin typeface="Helvetica"/>
               </a:rPr>
-              <a:t>Questions?  ·  support@lunagroupapp.com.au</a:t>
+              <a:t>Module 9 · Sign-off</a:t>
             </a:r>
           </a:p>
         </p:txBody>
@@ -11274,6 +11661,137 @@
           <a:lstStyle/>
           <a:p>
             <a:pPr algn="ctr"/>
+          </a:p>
+        </p:txBody>
+      </p:sp>
+    </p:spTree>
+  </p:cSld>
+  <p:clrMapOvr>
+    <a:masterClrMapping/>
+  </p:clrMapOvr>
+</p:sld>
+</file>
+
+<file path=ppt/slides/slide30.xml><?xml version="1.0" encoding="utf-8"?>
+<p:sld xmlns:a="http://schemas.openxmlformats.org/drawingml/2006/main" xmlns:p="http://schemas.openxmlformats.org/presentationml/2006/main" xmlns:r="http://schemas.openxmlformats.org/officeDocument/2006/relationships">
+  <p:cSld>
+    <p:bg>
+      <p:bgPr>
+        <a:solidFill>
+          <a:srgbClr val="1A1530"/>
+        </a:solidFill>
+        <a:effectLst/>
+      </p:bgPr>
+    </p:bg>
+    <p:spTree>
+      <p:nvGrpSpPr>
+        <p:cNvPr id="1" name=""/>
+        <p:cNvGrpSpPr/>
+        <p:nvPr/>
+      </p:nvGrpSpPr>
+      <p:grpSpPr/>
+      <p:sp>
+        <p:nvSpPr>
+          <p:cNvPr id="2" name="TextBox 1"/>
+          <p:cNvSpPr txBox="1"/>
+          <p:nvPr/>
+        </p:nvSpPr>
+        <p:spPr>
+          <a:xfrm>
+            <a:off x="640080" y="2377440"/>
+            <a:ext cx="10972800" cy="1097280"/>
+          </a:xfrm>
+          <a:prstGeom prst="rect">
+            <a:avLst/>
+          </a:prstGeom>
+          <a:noFill/>
+        </p:spPr>
+        <p:txBody>
+          <a:bodyPr wrap="square" lIns="0" rIns="0" tIns="0" bIns="0">
+            <a:spAutoFit/>
+          </a:bodyPr>
+          <a:lstStyle/>
+          <a:p>
+            <a:pPr algn="ctr"/>
+            <a:r>
+              <a:rPr sz="5200" b="1">
+                <a:solidFill>
+                  <a:srgbClr val="FFFFFF"/>
+                </a:solidFill>
+                <a:latin typeface="Helvetica"/>
+              </a:rPr>
+              <a:t>WELCOME TO THE TEAM</a:t>
+            </a:r>
+          </a:p>
+        </p:txBody>
+      </p:sp>
+      <p:sp>
+        <p:nvSpPr>
+          <p:cNvPr id="3" name="TextBox 2"/>
+          <p:cNvSpPr txBox="1"/>
+          <p:nvPr/>
+        </p:nvSpPr>
+        <p:spPr>
+          <a:xfrm>
+            <a:off x="640080" y="3840480"/>
+            <a:ext cx="10972800" cy="731520"/>
+          </a:xfrm>
+          <a:prstGeom prst="rect">
+            <a:avLst/>
+          </a:prstGeom>
+          <a:noFill/>
+        </p:spPr>
+        <p:txBody>
+          <a:bodyPr wrap="square" lIns="0" rIns="0" tIns="0" bIns="0">
+            <a:spAutoFit/>
+          </a:bodyPr>
+          <a:lstStyle/>
+          <a:p>
+            <a:pPr algn="ctr"/>
+            <a:r>
+              <a:rPr sz="2000" b="0">
+                <a:solidFill>
+                  <a:srgbClr val="D4AF5A"/>
+                </a:solidFill>
+                <a:latin typeface="Helvetica"/>
+              </a:rPr>
+              <a:t>Now go make every Luna night unforgettable.</a:t>
+            </a:r>
+          </a:p>
+        </p:txBody>
+      </p:sp>
+      <p:sp>
+        <p:nvSpPr>
+          <p:cNvPr id="4" name="TextBox 3"/>
+          <p:cNvSpPr txBox="1"/>
+          <p:nvPr/>
+        </p:nvSpPr>
+        <p:spPr>
+          <a:xfrm>
+            <a:off x="640080" y="5760720"/>
+            <a:ext cx="10972800" cy="365760"/>
+          </a:xfrm>
+          <a:prstGeom prst="rect">
+            <a:avLst/>
+          </a:prstGeom>
+          <a:noFill/>
+        </p:spPr>
+        <p:txBody>
+          <a:bodyPr wrap="square" lIns="0" rIns="0" tIns="0" bIns="0">
+            <a:spAutoFit/>
+          </a:bodyPr>
+          <a:lstStyle/>
+          <a:p>
+            <a:pPr algn="ctr"/>
+            <a:r>
+              <a:rPr sz="1200" b="0">
+                <a:solidFill>
+                  <a:srgbClr val="9A95B0"/>
+                </a:solidFill>
+                <a:latin typeface="Helvetica"/>
+              </a:rPr>
+              <a:t>Questions?  ·  support@lunagroupapp.com.au</a:t>
+            </a:r>
           </a:p>
         </p:txBody>
       </p:sp>
